--- a/slides/sources/J2-fonctions-structures.pptx
+++ b/slides/sources/J2-fonctions-structures.pptx
@@ -1658,7 +1658,7 @@
     <p:bg>
       <p:bgPr>
         <a:solidFill>
-          <a:srgbClr val="0D3325"/>
+          <a:srgbClr val="0A2E1A"/>
         </a:solidFill>
       </p:bgPr>
     </p:bg>
@@ -1691,7 +1691,7 @@
             <a:avLst/>
           </a:prstGeom>
           <a:solidFill>
-            <a:srgbClr val="14563C"/>
+            <a:srgbClr val="0E7A3D"/>
           </a:solidFill>
           <a:ln/>
         </p:spPr>
@@ -1711,8 +1711,8 @@
             <a:avLst/>
           </a:prstGeom>
           <a:solidFill>
-            <a:srgbClr val="C9A227">
-              <a:alpha val="45000"/>
+            <a:srgbClr val="FCD116">
+              <a:alpha val="55000"/>
             </a:srgbClr>
           </a:solidFill>
           <a:ln/>
@@ -1733,8 +1733,8 @@
             <a:avLst/>
           </a:prstGeom>
           <a:solidFill>
-            <a:srgbClr val="1E7A50">
-              <a:alpha val="60000"/>
+            <a:srgbClr val="CE1126">
+              <a:alpha val="65000"/>
             </a:srgbClr>
           </a:solidFill>
           <a:ln/>
@@ -1742,7 +1742,53 @@
       </p:sp>
       <p:sp>
         <p:nvSpPr>
-          <p:cNvPr id="5" name="Text 3"/>
+          <p:cNvPr id="5" name="Shape 3"/>
+          <p:cNvSpPr/>
+          <p:nvPr/>
+        </p:nvSpPr>
+        <p:spPr>
+          <a:xfrm>
+            <a:off x="9464040" y="502920"/>
+            <a:ext cx="2148840" cy="1828800"/>
+          </a:xfrm>
+          <a:prstGeom prst="roundRect">
+            <a:avLst>
+              <a:gd name="adj" fmla="val 6000"/>
+            </a:avLst>
+          </a:prstGeom>
+          <a:solidFill>
+            <a:srgbClr val="FFFFFF"/>
+          </a:solidFill>
+          <a:ln/>
+        </p:spPr>
+      </p:sp>
+      <p:pic>
+        <p:nvPicPr>
+          <p:cNvPr id="6" name="Image 0" descr="logo-dgi.png">    </p:cNvPr>
+          <p:cNvPicPr>
+            <a:picLocks noChangeAspect="1"/>
+          </p:cNvPicPr>
+          <p:nvPr/>
+        </p:nvPicPr>
+        <p:blipFill>
+          <a:blip r:embed="rId1"/>
+          <a:stretch>
+            <a:fillRect/>
+          </a:stretch>
+        </p:blipFill>
+        <p:spPr>
+          <a:xfrm>
+            <a:off x="9646920" y="740664"/>
+            <a:ext cx="1783080" cy="1353312"/>
+          </a:xfrm>
+          <a:prstGeom prst="rect">
+            <a:avLst/>
+          </a:prstGeom>
+        </p:spPr>
+      </p:pic>
+      <p:sp>
+        <p:nvSpPr>
+          <p:cNvPr id="7" name="Text 4"/>
           <p:cNvSpPr/>
           <p:nvPr/>
         </p:nvSpPr>
@@ -1767,7 +1813,7 @@
             <a:r>
               <a:rPr lang="en-US" sz="1500" b="1" spc="300" kern="0" dirty="0">
                 <a:solidFill>
-                  <a:srgbClr val="C9A227"/>
+                  <a:srgbClr val="FCD116"/>
                 </a:solidFill>
                 <a:latin typeface="Calibri" pitchFamily="34" charset="0"/>
                 <a:ea typeface="Calibri" pitchFamily="34" charset="-122"/>
@@ -1781,7 +1827,7 @@
       </p:sp>
       <p:sp>
         <p:nvSpPr>
-          <p:cNvPr id="6" name="Text 4"/>
+          <p:cNvPr id="8" name="Text 5"/>
           <p:cNvSpPr/>
           <p:nvPr/>
         </p:nvSpPr>
@@ -1820,7 +1866,7 @@
       </p:sp>
       <p:sp>
         <p:nvSpPr>
-          <p:cNvPr id="7" name="Text 5"/>
+          <p:cNvPr id="9" name="Text 6"/>
           <p:cNvSpPr/>
           <p:nvPr/>
         </p:nvSpPr>
@@ -1845,7 +1891,7 @@
             <a:r>
               <a:rPr lang="en-US" sz="3500" b="1" dirty="0">
                 <a:solidFill>
-                  <a:srgbClr val="E8D48A"/>
+                  <a:srgbClr val="FCD116"/>
                 </a:solidFill>
                 <a:latin typeface="Cambria" pitchFamily="34" charset="0"/>
                 <a:ea typeface="Cambria" pitchFamily="34" charset="-122"/>
@@ -1859,7 +1905,7 @@
       </p:sp>
       <p:sp>
         <p:nvSpPr>
-          <p:cNvPr id="8" name="Text 6"/>
+          <p:cNvPr id="10" name="Text 7"/>
           <p:cNvSpPr/>
           <p:nvPr/>
         </p:nvSpPr>
@@ -1921,7 +1967,7 @@
       </p:sp>
       <p:sp>
         <p:nvSpPr>
-          <p:cNvPr id="9" name="Shape 7"/>
+          <p:cNvPr id="11" name="Shape 8"/>
           <p:cNvSpPr/>
           <p:nvPr/>
         </p:nvSpPr>
@@ -1936,14 +1982,14 @@
             </a:avLst>
           </a:prstGeom>
           <a:solidFill>
-            <a:srgbClr val="14563C"/>
+            <a:srgbClr val="0E7A3D"/>
           </a:solidFill>
           <a:ln/>
         </p:spPr>
       </p:sp>
       <p:sp>
         <p:nvSpPr>
-          <p:cNvPr id="10" name="Text 8"/>
+          <p:cNvPr id="12" name="Text 9"/>
           <p:cNvSpPr/>
           <p:nvPr/>
         </p:nvSpPr>
@@ -1982,7 +2028,7 @@
       </p:sp>
       <p:sp>
         <p:nvSpPr>
-          <p:cNvPr id="11" name="Shape 9"/>
+          <p:cNvPr id="13" name="Shape 10"/>
           <p:cNvSpPr/>
           <p:nvPr/>
         </p:nvSpPr>
@@ -1997,14 +2043,14 @@
             </a:avLst>
           </a:prstGeom>
           <a:solidFill>
-            <a:srgbClr val="14563C"/>
+            <a:srgbClr val="0E7A3D"/>
           </a:solidFill>
           <a:ln/>
         </p:spPr>
       </p:sp>
       <p:sp>
         <p:nvSpPr>
-          <p:cNvPr id="12" name="Text 10"/>
+          <p:cNvPr id="14" name="Text 11"/>
           <p:cNvSpPr/>
           <p:nvPr/>
         </p:nvSpPr>
@@ -2043,7 +2089,7 @@
       </p:sp>
       <p:sp>
         <p:nvSpPr>
-          <p:cNvPr id="13" name="Text 11"/>
+          <p:cNvPr id="15" name="Text 12"/>
           <p:cNvSpPr/>
           <p:nvPr/>
         </p:nvSpPr>
@@ -2074,7 +2120,7 @@
                 <a:ea typeface="Calibri" pitchFamily="34" charset="-122"/>
                 <a:cs typeface="Calibri" pitchFamily="34" charset="-120"/>
               </a:rPr>
-              <a:t>Python, Fondamentaux et Analyse de Données  ·  contexte administration fiscale</a:t>
+              <a:t>DGI — Direction Générale des Impôts · Guinée-Bissau · données pédagogiques fictives</a:t>
             </a:r>
             <a:endParaRPr lang="en-US" sz="1200" dirty="0"/>
           </a:p>
@@ -2094,7 +2140,7 @@
     <p:bg>
       <p:bgPr>
         <a:solidFill>
-          <a:srgbClr val="0D3325"/>
+          <a:srgbClr val="0A2E1A"/>
         </a:solidFill>
       </p:bgPr>
     </p:bg>
@@ -2127,14 +2173,36 @@
             <a:avLst/>
           </a:prstGeom>
           <a:solidFill>
-            <a:srgbClr val="14563C"/>
+            <a:srgbClr val="0E7A3D"/>
           </a:solidFill>
           <a:ln/>
         </p:spPr>
       </p:sp>
       <p:sp>
         <p:nvSpPr>
-          <p:cNvPr id="3" name="Text 1"/>
+          <p:cNvPr id="3" name="Shape 1"/>
+          <p:cNvSpPr/>
+          <p:nvPr/>
+        </p:nvSpPr>
+        <p:spPr>
+          <a:xfrm>
+            <a:off x="11430000" y="5394960"/>
+            <a:ext cx="2011680" cy="2011680"/>
+          </a:xfrm>
+          <a:prstGeom prst="ellipse">
+            <a:avLst/>
+          </a:prstGeom>
+          <a:solidFill>
+            <a:srgbClr val="CE1126">
+              <a:alpha val="60000"/>
+            </a:srgbClr>
+          </a:solidFill>
+          <a:ln/>
+        </p:spPr>
+      </p:sp>
+      <p:sp>
+        <p:nvSpPr>
+          <p:cNvPr id="4" name="Text 2"/>
           <p:cNvSpPr/>
           <p:nvPr/>
         </p:nvSpPr>
@@ -2159,7 +2227,7 @@
             <a:r>
               <a:rPr lang="en-US" sz="1300" b="1" spc="200" kern="0" dirty="0">
                 <a:solidFill>
-                  <a:srgbClr val="C9A227"/>
+                  <a:srgbClr val="C79100"/>
                 </a:solidFill>
                 <a:latin typeface="Calibri" pitchFamily="34" charset="0"/>
                 <a:ea typeface="Calibri" pitchFamily="34" charset="-122"/>
@@ -2173,7 +2241,7 @@
       </p:sp>
       <p:sp>
         <p:nvSpPr>
-          <p:cNvPr id="4" name="Text 2"/>
+          <p:cNvPr id="5" name="Text 3"/>
           <p:cNvSpPr/>
           <p:nvPr/>
         </p:nvSpPr>
@@ -2212,7 +2280,7 @@
       </p:sp>
       <p:sp>
         <p:nvSpPr>
-          <p:cNvPr id="5" name="Shape 3"/>
+          <p:cNvPr id="6" name="Shape 4"/>
           <p:cNvSpPr/>
           <p:nvPr/>
         </p:nvSpPr>
@@ -2225,14 +2293,14 @@
             <a:avLst/>
           </a:prstGeom>
           <a:solidFill>
-            <a:srgbClr val="1E7A50"/>
+            <a:srgbClr val="2E9E4F"/>
           </a:solidFill>
           <a:ln/>
         </p:spPr>
       </p:sp>
       <p:pic>
         <p:nvPicPr>
-          <p:cNvPr id="6" name="Image 0" descr="icons/check.png">    </p:cNvPr>
+          <p:cNvPr id="7" name="Image 0" descr="icons/check.png">    </p:cNvPr>
           <p:cNvPicPr>
             <a:picLocks noChangeAspect="1"/>
           </p:cNvPicPr>
@@ -2256,7 +2324,7 @@
       </p:pic>
       <p:sp>
         <p:nvSpPr>
-          <p:cNvPr id="7" name="Text 4"/>
+          <p:cNvPr id="8" name="Text 5"/>
           <p:cNvSpPr/>
           <p:nvPr/>
         </p:nvSpPr>
@@ -2309,7 +2377,7 @@
       </p:sp>
       <p:sp>
         <p:nvSpPr>
-          <p:cNvPr id="8" name="Shape 5"/>
+          <p:cNvPr id="9" name="Shape 6"/>
           <p:cNvSpPr/>
           <p:nvPr/>
         </p:nvSpPr>
@@ -2322,14 +2390,14 @@
             <a:avLst/>
           </a:prstGeom>
           <a:solidFill>
-            <a:srgbClr val="1E7A50"/>
+            <a:srgbClr val="2E9E4F"/>
           </a:solidFill>
           <a:ln/>
         </p:spPr>
       </p:sp>
       <p:pic>
         <p:nvPicPr>
-          <p:cNvPr id="9" name="Image 1" descr="icons/check.png">    </p:cNvPr>
+          <p:cNvPr id="10" name="Image 1" descr="icons/check.png">    </p:cNvPr>
           <p:cNvPicPr>
             <a:picLocks noChangeAspect="1"/>
           </p:cNvPicPr>
@@ -2353,7 +2421,7 @@
       </p:pic>
       <p:sp>
         <p:nvSpPr>
-          <p:cNvPr id="10" name="Text 6"/>
+          <p:cNvPr id="11" name="Text 7"/>
           <p:cNvSpPr/>
           <p:nvPr/>
         </p:nvSpPr>
@@ -2406,7 +2474,7 @@
       </p:sp>
       <p:sp>
         <p:nvSpPr>
-          <p:cNvPr id="11" name="Shape 7"/>
+          <p:cNvPr id="12" name="Shape 8"/>
           <p:cNvSpPr/>
           <p:nvPr/>
         </p:nvSpPr>
@@ -2419,14 +2487,14 @@
             <a:avLst/>
           </a:prstGeom>
           <a:solidFill>
-            <a:srgbClr val="1E7A50"/>
+            <a:srgbClr val="2E9E4F"/>
           </a:solidFill>
           <a:ln/>
         </p:spPr>
       </p:sp>
       <p:pic>
         <p:nvPicPr>
-          <p:cNvPr id="12" name="Image 2" descr="icons/check.png">    </p:cNvPr>
+          <p:cNvPr id="13" name="Image 2" descr="icons/check.png">    </p:cNvPr>
           <p:cNvPicPr>
             <a:picLocks noChangeAspect="1"/>
           </p:cNvPicPr>
@@ -2450,7 +2518,7 @@
       </p:pic>
       <p:sp>
         <p:nvSpPr>
-          <p:cNvPr id="13" name="Text 8"/>
+          <p:cNvPr id="14" name="Text 9"/>
           <p:cNvSpPr/>
           <p:nvPr/>
         </p:nvSpPr>
@@ -2503,7 +2571,7 @@
       </p:sp>
       <p:sp>
         <p:nvSpPr>
-          <p:cNvPr id="14" name="Shape 9"/>
+          <p:cNvPr id="15" name="Shape 10"/>
           <p:cNvSpPr/>
           <p:nvPr/>
         </p:nvSpPr>
@@ -2516,14 +2584,14 @@
             <a:avLst/>
           </a:prstGeom>
           <a:solidFill>
-            <a:srgbClr val="1E7A50"/>
+            <a:srgbClr val="2E9E4F"/>
           </a:solidFill>
           <a:ln/>
         </p:spPr>
       </p:sp>
       <p:pic>
         <p:nvPicPr>
-          <p:cNvPr id="15" name="Image 3" descr="icons/check.png">    </p:cNvPr>
+          <p:cNvPr id="16" name="Image 3" descr="icons/check.png">    </p:cNvPr>
           <p:cNvPicPr>
             <a:picLocks noChangeAspect="1"/>
           </p:cNvPicPr>
@@ -2547,7 +2615,7 @@
       </p:pic>
       <p:sp>
         <p:nvSpPr>
-          <p:cNvPr id="16" name="Text 10"/>
+          <p:cNvPr id="17" name="Text 11"/>
           <p:cNvSpPr/>
           <p:nvPr/>
         </p:nvSpPr>
@@ -2600,7 +2668,7 @@
       </p:sp>
       <p:sp>
         <p:nvSpPr>
-          <p:cNvPr id="17" name="Shape 11"/>
+          <p:cNvPr id="18" name="Shape 12"/>
           <p:cNvSpPr/>
           <p:nvPr/>
         </p:nvSpPr>
@@ -2613,14 +2681,14 @@
             <a:avLst/>
           </a:prstGeom>
           <a:solidFill>
-            <a:srgbClr val="1E7A50"/>
+            <a:srgbClr val="2E9E4F"/>
           </a:solidFill>
           <a:ln/>
         </p:spPr>
       </p:sp>
       <p:pic>
         <p:nvPicPr>
-          <p:cNvPr id="18" name="Image 4" descr="icons/check.png">    </p:cNvPr>
+          <p:cNvPr id="19" name="Image 4" descr="icons/check.png">    </p:cNvPr>
           <p:cNvPicPr>
             <a:picLocks noChangeAspect="1"/>
           </p:cNvPicPr>
@@ -2644,7 +2712,7 @@
       </p:pic>
       <p:sp>
         <p:nvSpPr>
-          <p:cNvPr id="19" name="Text 12"/>
+          <p:cNvPr id="20" name="Text 13"/>
           <p:cNvSpPr/>
           <p:nvPr/>
         </p:nvSpPr>
@@ -2697,7 +2765,7 @@
       </p:sp>
       <p:sp>
         <p:nvSpPr>
-          <p:cNvPr id="20" name="Shape 13"/>
+          <p:cNvPr id="21" name="Shape 14"/>
           <p:cNvSpPr/>
           <p:nvPr/>
         </p:nvSpPr>
@@ -2712,14 +2780,14 @@
             </a:avLst>
           </a:prstGeom>
           <a:solidFill>
-            <a:srgbClr val="14563C"/>
+            <a:srgbClr val="0E7A3D"/>
           </a:solidFill>
           <a:ln/>
         </p:spPr>
       </p:sp>
       <p:sp>
         <p:nvSpPr>
-          <p:cNvPr id="21" name="Shape 14"/>
+          <p:cNvPr id="22" name="Shape 15"/>
           <p:cNvSpPr/>
           <p:nvPr/>
         </p:nvSpPr>
@@ -2732,14 +2800,14 @@
             <a:avLst/>
           </a:prstGeom>
           <a:solidFill>
-            <a:srgbClr val="C9A227"/>
+            <a:srgbClr val="C79100"/>
           </a:solidFill>
           <a:ln/>
         </p:spPr>
       </p:sp>
       <p:pic>
         <p:nvPicPr>
-          <p:cNvPr id="22" name="Image 5" descr="icons/rocket.png">    </p:cNvPr>
+          <p:cNvPr id="23" name="Image 5" descr="icons/rocket.png">    </p:cNvPr>
           <p:cNvPicPr>
             <a:picLocks noChangeAspect="1"/>
           </p:cNvPicPr>
@@ -2763,7 +2831,7 @@
       </p:pic>
       <p:sp>
         <p:nvSpPr>
-          <p:cNvPr id="23" name="Text 15"/>
+          <p:cNvPr id="24" name="Text 16"/>
           <p:cNvSpPr/>
           <p:nvPr/>
         </p:nvSpPr>
@@ -2802,7 +2870,7 @@
       </p:sp>
       <p:sp>
         <p:nvSpPr>
-          <p:cNvPr id="24" name="Text 16"/>
+          <p:cNvPr id="25" name="Text 17"/>
           <p:cNvSpPr/>
           <p:nvPr/>
         </p:nvSpPr>
@@ -2880,7 +2948,7 @@
         <p:spPr>
           <a:xfrm>
             <a:off x="548640" y="384048"/>
-            <a:ext cx="10972800" cy="320040"/>
+            <a:ext cx="9601200" cy="320040"/>
           </a:xfrm>
           <a:prstGeom prst="rect">
             <a:avLst/>
@@ -2898,7 +2966,7 @@
             <a:r>
               <a:rPr lang="en-US" sz="1300" b="1" spc="200" kern="0" dirty="0">
                 <a:solidFill>
-                  <a:srgbClr val="C9A227"/>
+                  <a:srgbClr val="C79100"/>
                 </a:solidFill>
                 <a:latin typeface="Calibri" pitchFamily="34" charset="0"/>
                 <a:ea typeface="Calibri" pitchFamily="34" charset="-122"/>
@@ -2919,7 +2987,7 @@
         <p:spPr>
           <a:xfrm>
             <a:off x="548640" y="658368"/>
-            <a:ext cx="11064240" cy="731520"/>
+            <a:ext cx="9966960" cy="731520"/>
           </a:xfrm>
           <a:prstGeom prst="rect">
             <a:avLst/>
@@ -2937,7 +3005,7 @@
             <a:r>
               <a:rPr lang="en-US" sz="3400" b="1" dirty="0">
                 <a:solidFill>
-                  <a:srgbClr val="14563C"/>
+                  <a:srgbClr val="0E7A3D"/>
                 </a:solidFill>
                 <a:latin typeface="Cambria" pitchFamily="34" charset="0"/>
                 <a:ea typeface="Cambria" pitchFamily="34" charset="-122"/>
@@ -2949,29 +3017,9 @@
           </a:p>
         </p:txBody>
       </p:sp>
-      <p:sp>
-        <p:nvSpPr>
-          <p:cNvPr id="4" name="Shape 2"/>
-          <p:cNvSpPr/>
-          <p:nvPr/>
-        </p:nvSpPr>
-        <p:spPr>
-          <a:xfrm>
-            <a:off x="640080" y="1783080"/>
-            <a:ext cx="566928" cy="566928"/>
-          </a:xfrm>
-          <a:prstGeom prst="ellipse">
-            <a:avLst/>
-          </a:prstGeom>
-          <a:solidFill>
-            <a:srgbClr val="14563C"/>
-          </a:solidFill>
-          <a:ln/>
-        </p:spPr>
-      </p:sp>
       <p:pic>
         <p:nvPicPr>
-          <p:cNvPr id="5" name="Image 0" descr="icons/puzzle.png">    </p:cNvPr>
+          <p:cNvPr id="4" name="Image 0" descr="logo-dgi.png">    </p:cNvPr>
           <p:cNvPicPr>
             <a:picLocks noChangeAspect="1"/>
           </p:cNvPicPr>
@@ -2985,8 +3033,8 @@
         </p:blipFill>
         <p:spPr>
           <a:xfrm>
-            <a:off x="787481" y="1930481"/>
-            <a:ext cx="272125" cy="272125"/>
+            <a:off x="10744200" y="384048"/>
+            <a:ext cx="1051560" cy="795528"/>
           </a:xfrm>
           <a:prstGeom prst="rect">
             <a:avLst/>
@@ -2995,105 +3043,27 @@
       </p:pic>
       <p:sp>
         <p:nvSpPr>
-          <p:cNvPr id="6" name="Text 3"/>
-          <p:cNvSpPr/>
-          <p:nvPr/>
-        </p:nvSpPr>
-        <p:spPr>
-          <a:xfrm>
-            <a:off x="1417320" y="1728216"/>
-            <a:ext cx="5852160" cy="365760"/>
-          </a:xfrm>
-          <a:prstGeom prst="rect">
-            <a:avLst/>
-          </a:prstGeom>
-          <a:noFill/>
-          <a:ln/>
-        </p:spPr>
-        <p:txBody>
-          <a:bodyPr wrap="square" lIns="0" tIns="0" rIns="0" bIns="0" rtlCol="0" anchor="ctr"/>
-          <a:lstStyle/>
-          <a:p>
-            <a:pPr indent="0" marL="0">
-              <a:buNone/>
-            </a:pPr>
-            <a:r>
-              <a:rPr lang="en-US" sz="1650" b="1" dirty="0">
-                <a:solidFill>
-                  <a:srgbClr val="1C2A24"/>
-                </a:solidFill>
-                <a:latin typeface="Calibri" pitchFamily="34" charset="0"/>
-                <a:ea typeface="Calibri" pitchFamily="34" charset="-122"/>
-                <a:cs typeface="Calibri" pitchFamily="34" charset="-120"/>
-              </a:rPr>
-              <a:t>Des fonctions propres</a:t>
-            </a:r>
-            <a:endParaRPr lang="en-US" sz="1650" dirty="0"/>
-          </a:p>
-        </p:txBody>
-      </p:sp>
-      <p:sp>
-        <p:nvSpPr>
-          <p:cNvPr id="7" name="Text 4"/>
-          <p:cNvSpPr/>
-          <p:nvPr/>
-        </p:nvSpPr>
-        <p:spPr>
-          <a:xfrm>
-            <a:off x="1417320" y="2057400"/>
-            <a:ext cx="5852160" cy="502920"/>
-          </a:xfrm>
-          <a:prstGeom prst="rect">
-            <a:avLst/>
-          </a:prstGeom>
-          <a:noFill/>
-          <a:ln/>
-        </p:spPr>
-        <p:txBody>
-          <a:bodyPr wrap="square" lIns="0" tIns="0" rIns="0" bIns="0" rtlCol="0" anchor="ctr"/>
-          <a:lstStyle/>
-          <a:p>
-            <a:pPr indent="0" marL="0">
-              <a:buNone/>
-            </a:pPr>
-            <a:r>
-              <a:rPr lang="en-US" sz="1300" dirty="0">
-                <a:solidFill>
-                  <a:srgbClr val="5C6B63"/>
-                </a:solidFill>
-                <a:latin typeface="Calibri" pitchFamily="34" charset="0"/>
-                <a:ea typeface="Calibri" pitchFamily="34" charset="-122"/>
-                <a:cs typeface="Calibri" pitchFamily="34" charset="-120"/>
-              </a:rPr>
-              <a:t>def, return, arguments nommés, valeurs par défaut, docstrings.</a:t>
-            </a:r>
-            <a:endParaRPr lang="en-US" sz="1300" dirty="0"/>
-          </a:p>
-        </p:txBody>
-      </p:sp>
-      <p:sp>
-        <p:nvSpPr>
-          <p:cNvPr id="8" name="Shape 5"/>
-          <p:cNvSpPr/>
-          <p:nvPr/>
-        </p:nvSpPr>
-        <p:spPr>
-          <a:xfrm>
-            <a:off x="640080" y="2807208"/>
+          <p:cNvPr id="5" name="Shape 2"/>
+          <p:cNvSpPr/>
+          <p:nvPr/>
+        </p:nvSpPr>
+        <p:spPr>
+          <a:xfrm>
+            <a:off x="640080" y="1783080"/>
             <a:ext cx="566928" cy="566928"/>
           </a:xfrm>
           <a:prstGeom prst="ellipse">
             <a:avLst/>
           </a:prstGeom>
           <a:solidFill>
-            <a:srgbClr val="1E7A50"/>
+            <a:srgbClr val="0E7A3D"/>
           </a:solidFill>
           <a:ln/>
         </p:spPr>
       </p:sp>
       <p:pic>
         <p:nvPicPr>
-          <p:cNvPr id="9" name="Image 1" descr="icons/shield.png">    </p:cNvPr>
+          <p:cNvPr id="6" name="Image 1" descr="icons/puzzle.png">    </p:cNvPr>
           <p:cNvPicPr>
             <a:picLocks noChangeAspect="1"/>
           </p:cNvPicPr>
@@ -3107,7 +3077,7 @@
         </p:blipFill>
         <p:spPr>
           <a:xfrm>
-            <a:off x="787481" y="2954609"/>
+            <a:off x="787481" y="1930481"/>
             <a:ext cx="272125" cy="272125"/>
           </a:xfrm>
           <a:prstGeom prst="rect">
@@ -3117,13 +3087,13 @@
       </p:pic>
       <p:sp>
         <p:nvSpPr>
-          <p:cNvPr id="10" name="Text 6"/>
-          <p:cNvSpPr/>
-          <p:nvPr/>
-        </p:nvSpPr>
-        <p:spPr>
-          <a:xfrm>
-            <a:off x="1417320" y="2752344"/>
+          <p:cNvPr id="7" name="Text 3"/>
+          <p:cNvSpPr/>
+          <p:nvPr/>
+        </p:nvSpPr>
+        <p:spPr>
+          <a:xfrm>
+            <a:off x="1417320" y="1728216"/>
             <a:ext cx="5852160" cy="365760"/>
           </a:xfrm>
           <a:prstGeom prst="rect">
@@ -3148,7 +3118,7 @@
                 <a:ea typeface="Calibri" pitchFamily="34" charset="-122"/>
                 <a:cs typeface="Calibri" pitchFamily="34" charset="-120"/>
               </a:rPr>
-              <a:t>Vérifier avec assert</a:t>
+              <a:t>Des fonctions propres</a:t>
             </a:r>
             <a:endParaRPr lang="en-US" sz="1650" dirty="0"/>
           </a:p>
@@ -3156,13 +3126,13 @@
       </p:sp>
       <p:sp>
         <p:nvSpPr>
-          <p:cNvPr id="11" name="Text 7"/>
-          <p:cNvSpPr/>
-          <p:nvPr/>
-        </p:nvSpPr>
-        <p:spPr>
-          <a:xfrm>
-            <a:off x="1417320" y="3081528"/>
+          <p:cNvPr id="8" name="Text 4"/>
+          <p:cNvSpPr/>
+          <p:nvPr/>
+        </p:nvSpPr>
+        <p:spPr>
+          <a:xfrm>
+            <a:off x="1417320" y="2057400"/>
             <a:ext cx="5852160" cy="502920"/>
           </a:xfrm>
           <a:prstGeom prst="rect">
@@ -3187,7 +3157,7 @@
                 <a:ea typeface="Calibri" pitchFamily="34" charset="-122"/>
                 <a:cs typeface="Calibri" pitchFamily="34" charset="-120"/>
               </a:rPr>
-              <a:t>Le calcul des pénalités, protégé par des tests minute.</a:t>
+              <a:t>def, return, arguments nommés, valeurs par défaut, docstrings.</a:t>
             </a:r>
             <a:endParaRPr lang="en-US" sz="1300" dirty="0"/>
           </a:p>
@@ -3195,27 +3165,27 @@
       </p:sp>
       <p:sp>
         <p:nvSpPr>
-          <p:cNvPr id="12" name="Shape 8"/>
-          <p:cNvSpPr/>
-          <p:nvPr/>
-        </p:nvSpPr>
-        <p:spPr>
-          <a:xfrm>
-            <a:off x="640080" y="3831336"/>
+          <p:cNvPr id="9" name="Shape 5"/>
+          <p:cNvSpPr/>
+          <p:nvPr/>
+        </p:nvSpPr>
+        <p:spPr>
+          <a:xfrm>
+            <a:off x="640080" y="2807208"/>
             <a:ext cx="566928" cy="566928"/>
           </a:xfrm>
           <a:prstGeom prst="ellipse">
             <a:avLst/>
           </a:prstGeom>
           <a:solidFill>
-            <a:srgbClr val="C9A227"/>
+            <a:srgbClr val="2E9E4F"/>
           </a:solidFill>
           <a:ln/>
         </p:spPr>
       </p:sp>
       <p:pic>
         <p:nvPicPr>
-          <p:cNvPr id="13" name="Image 2" descr="icons/layers.png">    </p:cNvPr>
+          <p:cNvPr id="10" name="Image 2" descr="icons/shield.png">    </p:cNvPr>
           <p:cNvPicPr>
             <a:picLocks noChangeAspect="1"/>
           </p:cNvPicPr>
@@ -3229,7 +3199,7 @@
         </p:blipFill>
         <p:spPr>
           <a:xfrm>
-            <a:off x="787481" y="3978737"/>
+            <a:off x="787481" y="2954609"/>
             <a:ext cx="272125" cy="272125"/>
           </a:xfrm>
           <a:prstGeom prst="rect">
@@ -3239,13 +3209,13 @@
       </p:pic>
       <p:sp>
         <p:nvSpPr>
-          <p:cNvPr id="14" name="Text 9"/>
-          <p:cNvSpPr/>
-          <p:nvPr/>
-        </p:nvSpPr>
-        <p:spPr>
-          <a:xfrm>
-            <a:off x="1417320" y="3776472"/>
+          <p:cNvPr id="11" name="Text 6"/>
+          <p:cNvSpPr/>
+          <p:nvPr/>
+        </p:nvSpPr>
+        <p:spPr>
+          <a:xfrm>
+            <a:off x="1417320" y="2752344"/>
             <a:ext cx="5852160" cy="365760"/>
           </a:xfrm>
           <a:prstGeom prst="rect">
@@ -3270,7 +3240,7 @@
                 <a:ea typeface="Calibri" pitchFamily="34" charset="-122"/>
                 <a:cs typeface="Calibri" pitchFamily="34" charset="-120"/>
               </a:rPr>
-              <a:t>Choisir sa structure</a:t>
+              <a:t>Vérifier avec assert</a:t>
             </a:r>
             <a:endParaRPr lang="en-US" sz="1650" dirty="0"/>
           </a:p>
@@ -3278,13 +3248,13 @@
       </p:sp>
       <p:sp>
         <p:nvSpPr>
-          <p:cNvPr id="15" name="Text 10"/>
-          <p:cNvSpPr/>
-          <p:nvPr/>
-        </p:nvSpPr>
-        <p:spPr>
-          <a:xfrm>
-            <a:off x="1417320" y="4105656"/>
+          <p:cNvPr id="12" name="Text 7"/>
+          <p:cNvSpPr/>
+          <p:nvPr/>
+        </p:nvSpPr>
+        <p:spPr>
+          <a:xfrm>
+            <a:off x="1417320" y="3081528"/>
             <a:ext cx="5852160" cy="502920"/>
           </a:xfrm>
           <a:prstGeom prst="rect">
@@ -3309,7 +3279,7 @@
                 <a:ea typeface="Calibri" pitchFamily="34" charset="-122"/>
                 <a:cs typeface="Calibri" pitchFamily="34" charset="-120"/>
               </a:rPr>
-              <a:t>Liste, dict, set, tuple : chacune a son travail.</a:t>
+              <a:t>Le calcul des pénalités, protégé par des tests minute.</a:t>
             </a:r>
             <a:endParaRPr lang="en-US" sz="1300" dirty="0"/>
           </a:p>
@@ -3317,27 +3287,27 @@
       </p:sp>
       <p:sp>
         <p:nvSpPr>
-          <p:cNvPr id="16" name="Shape 11"/>
-          <p:cNvSpPr/>
-          <p:nvPr/>
-        </p:nvSpPr>
-        <p:spPr>
-          <a:xfrm>
-            <a:off x="640080" y="4855464"/>
+          <p:cNvPr id="13" name="Shape 8"/>
+          <p:cNvSpPr/>
+          <p:nvPr/>
+        </p:nvSpPr>
+        <p:spPr>
+          <a:xfrm>
+            <a:off x="640080" y="3831336"/>
             <a:ext cx="566928" cy="566928"/>
           </a:xfrm>
           <a:prstGeom prst="ellipse">
             <a:avLst/>
           </a:prstGeom>
           <a:solidFill>
-            <a:srgbClr val="14563C"/>
+            <a:srgbClr val="C79100"/>
           </a:solidFill>
           <a:ln/>
         </p:spPr>
       </p:sp>
       <p:pic>
         <p:nvPicPr>
-          <p:cNvPr id="17" name="Image 3" descr="icons/users.png">    </p:cNvPr>
+          <p:cNvPr id="14" name="Image 3" descr="icons/layers.png">    </p:cNvPr>
           <p:cNvPicPr>
             <a:picLocks noChangeAspect="1"/>
           </p:cNvPicPr>
@@ -3351,7 +3321,7 @@
         </p:blipFill>
         <p:spPr>
           <a:xfrm>
-            <a:off x="787481" y="5002865"/>
+            <a:off x="787481" y="3978737"/>
             <a:ext cx="272125" cy="272125"/>
           </a:xfrm>
           <a:prstGeom prst="rect">
@@ -3361,13 +3331,13 @@
       </p:pic>
       <p:sp>
         <p:nvSpPr>
-          <p:cNvPr id="18" name="Text 12"/>
-          <p:cNvSpPr/>
-          <p:nvPr/>
-        </p:nvSpPr>
-        <p:spPr>
-          <a:xfrm>
-            <a:off x="1417320" y="4800600"/>
+          <p:cNvPr id="15" name="Text 9"/>
+          <p:cNvSpPr/>
+          <p:nvPr/>
+        </p:nvSpPr>
+        <p:spPr>
+          <a:xfrm>
+            <a:off x="1417320" y="3776472"/>
             <a:ext cx="5852160" cy="365760"/>
           </a:xfrm>
           <a:prstGeom prst="rect">
@@ -3392,7 +3362,7 @@
                 <a:ea typeface="Calibri" pitchFamily="34" charset="-122"/>
                 <a:cs typeface="Calibri" pitchFamily="34" charset="-120"/>
               </a:rPr>
-              <a:t>Le mini-annuaire</a:t>
+              <a:t>Choisir sa structure</a:t>
             </a:r>
             <a:endParaRPr lang="en-US" sz="1650" dirty="0"/>
           </a:p>
@@ -3400,13 +3370,13 @@
       </p:sp>
       <p:sp>
         <p:nvSpPr>
-          <p:cNvPr id="19" name="Text 13"/>
-          <p:cNvSpPr/>
-          <p:nvPr/>
-        </p:nvSpPr>
-        <p:spPr>
-          <a:xfrm>
-            <a:off x="1417320" y="5129784"/>
+          <p:cNvPr id="16" name="Text 10"/>
+          <p:cNvSpPr/>
+          <p:nvPr/>
+        </p:nvSpPr>
+        <p:spPr>
+          <a:xfrm>
+            <a:off x="1417320" y="4105656"/>
             <a:ext cx="5852160" cy="502920"/>
           </a:xfrm>
           <a:prstGeom prst="rect">
@@ -3431,6 +3401,128 @@
                 <a:ea typeface="Calibri" pitchFamily="34" charset="-122"/>
                 <a:cs typeface="Calibri" pitchFamily="34" charset="-120"/>
               </a:rPr>
+              <a:t>Liste, dict, set, tuple : chacune a son travail.</a:t>
+            </a:r>
+            <a:endParaRPr lang="en-US" sz="1300" dirty="0"/>
+          </a:p>
+        </p:txBody>
+      </p:sp>
+      <p:sp>
+        <p:nvSpPr>
+          <p:cNvPr id="17" name="Shape 11"/>
+          <p:cNvSpPr/>
+          <p:nvPr/>
+        </p:nvSpPr>
+        <p:spPr>
+          <a:xfrm>
+            <a:off x="640080" y="4855464"/>
+            <a:ext cx="566928" cy="566928"/>
+          </a:xfrm>
+          <a:prstGeom prst="ellipse">
+            <a:avLst/>
+          </a:prstGeom>
+          <a:solidFill>
+            <a:srgbClr val="0E7A3D"/>
+          </a:solidFill>
+          <a:ln/>
+        </p:spPr>
+      </p:sp>
+      <p:pic>
+        <p:nvPicPr>
+          <p:cNvPr id="18" name="Image 4" descr="icons/users.png">    </p:cNvPr>
+          <p:cNvPicPr>
+            <a:picLocks noChangeAspect="1"/>
+          </p:cNvPicPr>
+          <p:nvPr/>
+        </p:nvPicPr>
+        <p:blipFill>
+          <a:blip r:embed="rId5"/>
+          <a:stretch>
+            <a:fillRect/>
+          </a:stretch>
+        </p:blipFill>
+        <p:spPr>
+          <a:xfrm>
+            <a:off x="787481" y="5002865"/>
+            <a:ext cx="272125" cy="272125"/>
+          </a:xfrm>
+          <a:prstGeom prst="rect">
+            <a:avLst/>
+          </a:prstGeom>
+        </p:spPr>
+      </p:pic>
+      <p:sp>
+        <p:nvSpPr>
+          <p:cNvPr id="19" name="Text 12"/>
+          <p:cNvSpPr/>
+          <p:nvPr/>
+        </p:nvSpPr>
+        <p:spPr>
+          <a:xfrm>
+            <a:off x="1417320" y="4800600"/>
+            <a:ext cx="5852160" cy="365760"/>
+          </a:xfrm>
+          <a:prstGeom prst="rect">
+            <a:avLst/>
+          </a:prstGeom>
+          <a:noFill/>
+          <a:ln/>
+        </p:spPr>
+        <p:txBody>
+          <a:bodyPr wrap="square" lIns="0" tIns="0" rIns="0" bIns="0" rtlCol="0" anchor="ctr"/>
+          <a:lstStyle/>
+          <a:p>
+            <a:pPr indent="0" marL="0">
+              <a:buNone/>
+            </a:pPr>
+            <a:r>
+              <a:rPr lang="en-US" sz="1650" b="1" dirty="0">
+                <a:solidFill>
+                  <a:srgbClr val="1C2A24"/>
+                </a:solidFill>
+                <a:latin typeface="Calibri" pitchFamily="34" charset="0"/>
+                <a:ea typeface="Calibri" pitchFamily="34" charset="-122"/>
+                <a:cs typeface="Calibri" pitchFamily="34" charset="-120"/>
+              </a:rPr>
+              <a:t>Le mini-annuaire</a:t>
+            </a:r>
+            <a:endParaRPr lang="en-US" sz="1650" dirty="0"/>
+          </a:p>
+        </p:txBody>
+      </p:sp>
+      <p:sp>
+        <p:nvSpPr>
+          <p:cNvPr id="20" name="Text 13"/>
+          <p:cNvSpPr/>
+          <p:nvPr/>
+        </p:nvSpPr>
+        <p:spPr>
+          <a:xfrm>
+            <a:off x="1417320" y="5129784"/>
+            <a:ext cx="5852160" cy="502920"/>
+          </a:xfrm>
+          <a:prstGeom prst="rect">
+            <a:avLst/>
+          </a:prstGeom>
+          <a:noFill/>
+          <a:ln/>
+        </p:spPr>
+        <p:txBody>
+          <a:bodyPr wrap="square" lIns="0" tIns="0" rIns="0" bIns="0" rtlCol="0" anchor="ctr"/>
+          <a:lstStyle/>
+          <a:p>
+            <a:pPr indent="0" marL="0">
+              <a:buNone/>
+            </a:pPr>
+            <a:r>
+              <a:rPr lang="en-US" sz="1300" dirty="0">
+                <a:solidFill>
+                  <a:srgbClr val="5C6B63"/>
+                </a:solidFill>
+                <a:latin typeface="Calibri" pitchFamily="34" charset="0"/>
+                <a:ea typeface="Calibri" pitchFamily="34" charset="-122"/>
+                <a:cs typeface="Calibri" pitchFamily="34" charset="-120"/>
+              </a:rPr>
               <a:t>Comptages, dédoublonnage, NIF orphelins — en mémoire.</a:t>
             </a:r>
             <a:endParaRPr lang="en-US" sz="1300" dirty="0"/>
@@ -3439,7 +3531,7 @@
       </p:sp>
       <p:sp>
         <p:nvSpPr>
-          <p:cNvPr id="20" name="Shape 14"/>
+          <p:cNvPr id="21" name="Shape 14"/>
           <p:cNvSpPr/>
           <p:nvPr/>
         </p:nvSpPr>
@@ -3454,14 +3546,14 @@
             </a:avLst>
           </a:prstGeom>
           <a:solidFill>
-            <a:srgbClr val="0D3325"/>
+            <a:srgbClr val="0A2E1A"/>
           </a:solidFill>
           <a:ln/>
         </p:spPr>
       </p:sp>
       <p:sp>
         <p:nvSpPr>
-          <p:cNvPr id="21" name="Text 15"/>
+          <p:cNvPr id="22" name="Text 15"/>
           <p:cNvSpPr/>
           <p:nvPr/>
         </p:nvSpPr>
@@ -3486,7 +3578,7 @@
             <a:r>
               <a:rPr lang="en-US" sz="1150" b="1" spc="200" kern="0" dirty="0">
                 <a:solidFill>
-                  <a:srgbClr val="C9A227"/>
+                  <a:srgbClr val="C79100"/>
                 </a:solidFill>
                 <a:latin typeface="Calibri" pitchFamily="34" charset="0"/>
                 <a:ea typeface="Calibri" pitchFamily="34" charset="-122"/>
@@ -3500,7 +3592,7 @@
       </p:sp>
       <p:sp>
         <p:nvSpPr>
-          <p:cNvPr id="22" name="Shape 16"/>
+          <p:cNvPr id="23" name="Shape 16"/>
           <p:cNvSpPr/>
           <p:nvPr/>
         </p:nvSpPr>
@@ -3513,14 +3605,14 @@
             <a:avLst/>
           </a:prstGeom>
           <a:solidFill>
-            <a:srgbClr val="14563C"/>
+            <a:srgbClr val="0E7A3D"/>
           </a:solidFill>
           <a:ln/>
         </p:spPr>
       </p:sp>
       <p:sp>
         <p:nvSpPr>
-          <p:cNvPr id="23" name="Text 17"/>
+          <p:cNvPr id="24" name="Text 17"/>
           <p:cNvSpPr/>
           <p:nvPr/>
         </p:nvSpPr>
@@ -3559,7 +3651,7 @@
       </p:sp>
       <p:sp>
         <p:nvSpPr>
-          <p:cNvPr id="24" name="Text 18"/>
+          <p:cNvPr id="25" name="Text 18"/>
           <p:cNvSpPr/>
           <p:nvPr/>
         </p:nvSpPr>
@@ -3598,7 +3690,7 @@
       </p:sp>
       <p:sp>
         <p:nvSpPr>
-          <p:cNvPr id="25" name="Shape 19"/>
+          <p:cNvPr id="26" name="Shape 19"/>
           <p:cNvSpPr/>
           <p:nvPr/>
         </p:nvSpPr>
@@ -3611,14 +3703,14 @@
             <a:avLst/>
           </a:prstGeom>
           <a:solidFill>
-            <a:srgbClr val="C9A227"/>
+            <a:srgbClr val="C79100"/>
           </a:solidFill>
           <a:ln/>
         </p:spPr>
       </p:sp>
       <p:sp>
         <p:nvSpPr>
-          <p:cNvPr id="26" name="Text 20"/>
+          <p:cNvPr id="27" name="Text 20"/>
           <p:cNvSpPr/>
           <p:nvPr/>
         </p:nvSpPr>
@@ -3643,7 +3735,7 @@
             <a:r>
               <a:rPr lang="en-US" sz="1250" b="1" dirty="0">
                 <a:solidFill>
-                  <a:srgbClr val="0D3325"/>
+                  <a:srgbClr val="0A2E1A"/>
                 </a:solidFill>
                 <a:latin typeface="Calibri" pitchFamily="34" charset="0"/>
                 <a:ea typeface="Calibri" pitchFamily="34" charset="-122"/>
@@ -3657,7 +3749,7 @@
       </p:sp>
       <p:sp>
         <p:nvSpPr>
-          <p:cNvPr id="27" name="Text 21"/>
+          <p:cNvPr id="28" name="Text 21"/>
           <p:cNvSpPr/>
           <p:nvPr/>
         </p:nvSpPr>
@@ -3696,7 +3788,7 @@
       </p:sp>
       <p:sp>
         <p:nvSpPr>
-          <p:cNvPr id="28" name="Shape 22"/>
+          <p:cNvPr id="29" name="Shape 22"/>
           <p:cNvSpPr/>
           <p:nvPr/>
         </p:nvSpPr>
@@ -3709,14 +3801,14 @@
             <a:avLst/>
           </a:prstGeom>
           <a:solidFill>
-            <a:srgbClr val="14563C"/>
+            <a:srgbClr val="0E7A3D"/>
           </a:solidFill>
           <a:ln/>
         </p:spPr>
       </p:sp>
       <p:sp>
         <p:nvSpPr>
-          <p:cNvPr id="29" name="Text 23"/>
+          <p:cNvPr id="30" name="Text 23"/>
           <p:cNvSpPr/>
           <p:nvPr/>
         </p:nvSpPr>
@@ -3755,7 +3847,7 @@
       </p:sp>
       <p:sp>
         <p:nvSpPr>
-          <p:cNvPr id="30" name="Text 24"/>
+          <p:cNvPr id="31" name="Text 24"/>
           <p:cNvSpPr/>
           <p:nvPr/>
         </p:nvSpPr>
@@ -3794,7 +3886,7 @@
       </p:sp>
       <p:sp>
         <p:nvSpPr>
-          <p:cNvPr id="31" name="Shape 25"/>
+          <p:cNvPr id="32" name="Shape 25"/>
           <p:cNvSpPr/>
           <p:nvPr/>
         </p:nvSpPr>
@@ -3807,14 +3899,14 @@
             <a:avLst/>
           </a:prstGeom>
           <a:solidFill>
-            <a:srgbClr val="14563C"/>
+            <a:srgbClr val="0E7A3D"/>
           </a:solidFill>
           <a:ln/>
         </p:spPr>
       </p:sp>
       <p:sp>
         <p:nvSpPr>
-          <p:cNvPr id="32" name="Text 26"/>
+          <p:cNvPr id="33" name="Text 26"/>
           <p:cNvSpPr/>
           <p:nvPr/>
         </p:nvSpPr>
@@ -3853,7 +3945,7 @@
       </p:sp>
       <p:sp>
         <p:nvSpPr>
-          <p:cNvPr id="33" name="Text 27"/>
+          <p:cNvPr id="34" name="Text 27"/>
           <p:cNvSpPr/>
           <p:nvPr/>
         </p:nvSpPr>
@@ -3892,7 +3984,7 @@
       </p:sp>
       <p:sp>
         <p:nvSpPr>
-          <p:cNvPr id="34" name="Shape 28"/>
+          <p:cNvPr id="35" name="Shape 28"/>
           <p:cNvSpPr/>
           <p:nvPr/>
         </p:nvSpPr>
@@ -3905,14 +3997,14 @@
             <a:avLst/>
           </a:prstGeom>
           <a:solidFill>
-            <a:srgbClr val="14563C"/>
+            <a:srgbClr val="0E7A3D"/>
           </a:solidFill>
           <a:ln/>
         </p:spPr>
       </p:sp>
       <p:sp>
         <p:nvSpPr>
-          <p:cNvPr id="35" name="Text 29"/>
+          <p:cNvPr id="36" name="Text 29"/>
           <p:cNvSpPr/>
           <p:nvPr/>
         </p:nvSpPr>
@@ -3951,7 +4043,7 @@
       </p:sp>
       <p:sp>
         <p:nvSpPr>
-          <p:cNvPr id="36" name="Text 30"/>
+          <p:cNvPr id="37" name="Text 30"/>
           <p:cNvSpPr/>
           <p:nvPr/>
         </p:nvSpPr>
@@ -3990,7 +4082,7 @@
       </p:sp>
       <p:sp>
         <p:nvSpPr>
-          <p:cNvPr id="37" name="Text 31"/>
+          <p:cNvPr id="38" name="Text 31"/>
           <p:cNvSpPr/>
           <p:nvPr/>
         </p:nvSpPr>
@@ -4015,7 +4107,7 @@
             <a:r>
               <a:rPr lang="en-US" sz="1050" i="1" dirty="0">
                 <a:solidFill>
-                  <a:srgbClr val="E8D48A"/>
+                  <a:srgbClr val="FCD116"/>
                 </a:solidFill>
                 <a:latin typeface="Calibri" pitchFamily="34" charset="0"/>
                 <a:ea typeface="Calibri" pitchFamily="34" charset="-122"/>
@@ -4068,7 +4160,7 @@
         <p:spPr>
           <a:xfrm>
             <a:off x="548640" y="384048"/>
-            <a:ext cx="10972800" cy="320040"/>
+            <a:ext cx="9601200" cy="320040"/>
           </a:xfrm>
           <a:prstGeom prst="rect">
             <a:avLst/>
@@ -4086,7 +4178,7 @@
             <a:r>
               <a:rPr lang="en-US" sz="1300" b="1" spc="200" kern="0" dirty="0">
                 <a:solidFill>
-                  <a:srgbClr val="C9A227"/>
+                  <a:srgbClr val="C79100"/>
                 </a:solidFill>
                 <a:latin typeface="Calibri" pitchFamily="34" charset="0"/>
                 <a:ea typeface="Calibri" pitchFamily="34" charset="-122"/>
@@ -4107,7 +4199,7 @@
         <p:spPr>
           <a:xfrm>
             <a:off x="548640" y="658368"/>
-            <a:ext cx="11064240" cy="731520"/>
+            <a:ext cx="9966960" cy="731520"/>
           </a:xfrm>
           <a:prstGeom prst="rect">
             <a:avLst/>
@@ -4125,7 +4217,7 @@
             <a:r>
               <a:rPr lang="en-US" sz="3400" b="1" dirty="0">
                 <a:solidFill>
-                  <a:srgbClr val="14563C"/>
+                  <a:srgbClr val="0E7A3D"/>
                 </a:solidFill>
                 <a:latin typeface="Cambria" pitchFamily="34" charset="0"/>
                 <a:ea typeface="Cambria" pitchFamily="34" charset="-122"/>
@@ -4137,29 +4229,9 @@
           </a:p>
         </p:txBody>
       </p:sp>
-      <p:sp>
-        <p:nvSpPr>
-          <p:cNvPr id="4" name="Shape 2"/>
-          <p:cNvSpPr/>
-          <p:nvPr/>
-        </p:nvSpPr>
-        <p:spPr>
-          <a:xfrm>
-            <a:off x="640080" y="1874520"/>
-            <a:ext cx="411480" cy="411480"/>
-          </a:xfrm>
-          <a:prstGeom prst="ellipse">
-            <a:avLst/>
-          </a:prstGeom>
-          <a:solidFill>
-            <a:srgbClr val="1E7A50"/>
-          </a:solidFill>
-          <a:ln/>
-        </p:spPr>
-      </p:sp>
       <p:pic>
         <p:nvPicPr>
-          <p:cNvPr id="5" name="Image 0" descr="icons/check.png">    </p:cNvPr>
+          <p:cNvPr id="4" name="Image 0" descr="logo-dgi.png">    </p:cNvPr>
           <p:cNvPicPr>
             <a:picLocks noChangeAspect="1"/>
           </p:cNvPicPr>
@@ -4173,8 +4245,8 @@
         </p:blipFill>
         <p:spPr>
           <a:xfrm>
-            <a:off x="747065" y="1981505"/>
-            <a:ext cx="197510" cy="197510"/>
+            <a:off x="10744200" y="384048"/>
+            <a:ext cx="1051560" cy="795528"/>
           </a:xfrm>
           <a:prstGeom prst="rect">
             <a:avLst/>
@@ -4183,89 +4255,27 @@
       </p:pic>
       <p:sp>
         <p:nvSpPr>
-          <p:cNvPr id="6" name="Text 3"/>
-          <p:cNvSpPr/>
-          <p:nvPr/>
-        </p:nvSpPr>
-        <p:spPr>
-          <a:xfrm>
-            <a:off x="1234440" y="1801368"/>
-            <a:ext cx="4800600" cy="960120"/>
-          </a:xfrm>
-          <a:prstGeom prst="rect">
-            <a:avLst/>
-          </a:prstGeom>
-          <a:noFill/>
-          <a:ln/>
-        </p:spPr>
-        <p:txBody>
-          <a:bodyPr wrap="square" lIns="0" tIns="0" rIns="0" bIns="0" rtlCol="0" anchor="ctr"/>
-          <a:lstStyle/>
-          <a:p>
-            <a:pPr indent="0" marL="0">
-              <a:lnSpc>
-                <a:spcPct val="105000"/>
-              </a:lnSpc>
-              <a:buNone/>
-            </a:pPr>
-            <a:r>
-              <a:rPr lang="en-US" sz="1450" b="1" dirty="0">
-                <a:solidFill>
-                  <a:srgbClr val="1C2A24"/>
-                </a:solidFill>
-                <a:latin typeface="Calibri" pitchFamily="34" charset="0"/>
-                <a:ea typeface="Calibri" pitchFamily="34" charset="-122"/>
-                <a:cs typeface="Calibri" pitchFamily="34" charset="-120"/>
-              </a:rPr>
-              <a:t>def nomme, return renvoie</a:t>
-            </a:r>
-            <a:endParaRPr lang="en-US" sz="1450" dirty="0"/>
-          </a:p>
-          <a:p>
-            <a:pPr indent="0" marL="0">
-              <a:lnSpc>
-                <a:spcPct val="105000"/>
-              </a:lnSpc>
-              <a:buNone/>
-            </a:pPr>
-            <a:r>
-              <a:rPr lang="en-US" sz="1250" dirty="0">
-                <a:solidFill>
-                  <a:srgbClr val="5C6B63"/>
-                </a:solidFill>
-                <a:latin typeface="Calibri" pitchFamily="34" charset="0"/>
-                <a:ea typeface="Calibri" pitchFamily="34" charset="-122"/>
-                <a:cs typeface="Calibri" pitchFamily="34" charset="-120"/>
-              </a:rPr>
-              <a:t>Sans return, la fonction renvoie None — source classique de bug.</a:t>
-            </a:r>
-            <a:endParaRPr lang="en-US" sz="1450" dirty="0"/>
-          </a:p>
-        </p:txBody>
-      </p:sp>
-      <p:sp>
-        <p:nvSpPr>
-          <p:cNvPr id="7" name="Shape 4"/>
-          <p:cNvSpPr/>
-          <p:nvPr/>
-        </p:nvSpPr>
-        <p:spPr>
-          <a:xfrm>
-            <a:off x="640080" y="2926080"/>
+          <p:cNvPr id="5" name="Shape 2"/>
+          <p:cNvSpPr/>
+          <p:nvPr/>
+        </p:nvSpPr>
+        <p:spPr>
+          <a:xfrm>
+            <a:off x="640080" y="1874520"/>
             <a:ext cx="411480" cy="411480"/>
           </a:xfrm>
           <a:prstGeom prst="ellipse">
             <a:avLst/>
           </a:prstGeom>
           <a:solidFill>
-            <a:srgbClr val="1E7A50"/>
+            <a:srgbClr val="2E9E4F"/>
           </a:solidFill>
           <a:ln/>
         </p:spPr>
       </p:sp>
       <p:pic>
         <p:nvPicPr>
-          <p:cNvPr id="8" name="Image 1" descr="icons/check.png">    </p:cNvPr>
+          <p:cNvPr id="6" name="Image 1" descr="icons/check.png">    </p:cNvPr>
           <p:cNvPicPr>
             <a:picLocks noChangeAspect="1"/>
           </p:cNvPicPr>
@@ -4279,7 +4289,7 @@
         </p:blipFill>
         <p:spPr>
           <a:xfrm>
-            <a:off x="747065" y="3033065"/>
+            <a:off x="747065" y="1981505"/>
             <a:ext cx="197510" cy="197510"/>
           </a:xfrm>
           <a:prstGeom prst="rect">
@@ -4289,13 +4299,13 @@
       </p:pic>
       <p:sp>
         <p:nvSpPr>
-          <p:cNvPr id="9" name="Text 5"/>
-          <p:cNvSpPr/>
-          <p:nvPr/>
-        </p:nvSpPr>
-        <p:spPr>
-          <a:xfrm>
-            <a:off x="1234440" y="2852928"/>
+          <p:cNvPr id="7" name="Text 3"/>
+          <p:cNvSpPr/>
+          <p:nvPr/>
+        </p:nvSpPr>
+        <p:spPr>
+          <a:xfrm>
+            <a:off x="1234440" y="1801368"/>
             <a:ext cx="4800600" cy="960120"/>
           </a:xfrm>
           <a:prstGeom prst="rect">
@@ -4323,7 +4333,7 @@
                 <a:ea typeface="Calibri" pitchFamily="34" charset="-122"/>
                 <a:cs typeface="Calibri" pitchFamily="34" charset="-120"/>
               </a:rPr>
-              <a:t>Annotations de types</a:t>
+              <a:t>def nomme, return renvoie</a:t>
             </a:r>
             <a:endParaRPr lang="en-US" sz="1450" dirty="0"/>
           </a:p>
@@ -4343,7 +4353,7 @@
                 <a:ea typeface="Calibri" pitchFamily="34" charset="-122"/>
                 <a:cs typeface="Calibri" pitchFamily="34" charset="-120"/>
               </a:rPr>
-              <a:t>def f(ca: int) -&gt; str : documentation vivante, aide de VS Code.</a:t>
+              <a:t>Sans return, la fonction renvoie None — source classique de bug.</a:t>
             </a:r>
             <a:endParaRPr lang="en-US" sz="1450" dirty="0"/>
           </a:p>
@@ -4351,27 +4361,27 @@
       </p:sp>
       <p:sp>
         <p:nvSpPr>
-          <p:cNvPr id="10" name="Shape 6"/>
-          <p:cNvSpPr/>
-          <p:nvPr/>
-        </p:nvSpPr>
-        <p:spPr>
-          <a:xfrm>
-            <a:off x="640080" y="3977640"/>
+          <p:cNvPr id="8" name="Shape 4"/>
+          <p:cNvSpPr/>
+          <p:nvPr/>
+        </p:nvSpPr>
+        <p:spPr>
+          <a:xfrm>
+            <a:off x="640080" y="2926080"/>
             <a:ext cx="411480" cy="411480"/>
           </a:xfrm>
           <a:prstGeom prst="ellipse">
             <a:avLst/>
           </a:prstGeom>
           <a:solidFill>
-            <a:srgbClr val="1E7A50"/>
+            <a:srgbClr val="2E9E4F"/>
           </a:solidFill>
           <a:ln/>
         </p:spPr>
       </p:sp>
       <p:pic>
         <p:nvPicPr>
-          <p:cNvPr id="11" name="Image 2" descr="icons/check.png">    </p:cNvPr>
+          <p:cNvPr id="9" name="Image 2" descr="icons/check.png">    </p:cNvPr>
           <p:cNvPicPr>
             <a:picLocks noChangeAspect="1"/>
           </p:cNvPicPr>
@@ -4385,7 +4395,7 @@
         </p:blipFill>
         <p:spPr>
           <a:xfrm>
-            <a:off x="747065" y="4084625"/>
+            <a:off x="747065" y="3033065"/>
             <a:ext cx="197510" cy="197510"/>
           </a:xfrm>
           <a:prstGeom prst="rect">
@@ -4395,13 +4405,13 @@
       </p:pic>
       <p:sp>
         <p:nvSpPr>
-          <p:cNvPr id="12" name="Text 7"/>
-          <p:cNvSpPr/>
-          <p:nvPr/>
-        </p:nvSpPr>
-        <p:spPr>
-          <a:xfrm>
-            <a:off x="1234440" y="3904488"/>
+          <p:cNvPr id="10" name="Text 5"/>
+          <p:cNvSpPr/>
+          <p:nvPr/>
+        </p:nvSpPr>
+        <p:spPr>
+          <a:xfrm>
+            <a:off x="1234440" y="2852928"/>
             <a:ext cx="4800600" cy="960120"/>
           </a:xfrm>
           <a:prstGeom prst="rect">
@@ -4429,7 +4439,7 @@
                 <a:ea typeface="Calibri" pitchFamily="34" charset="-122"/>
                 <a:cs typeface="Calibri" pitchFamily="34" charset="-120"/>
               </a:rPr>
-              <a:t>Valeurs par défaut</a:t>
+              <a:t>Annotations de types</a:t>
             </a:r>
             <a:endParaRPr lang="en-US" sz="1450" dirty="0"/>
           </a:p>
@@ -4449,7 +4459,7 @@
                 <a:ea typeface="Calibri" pitchFamily="34" charset="-122"/>
                 <a:cs typeface="Calibri" pitchFamily="34" charset="-120"/>
               </a:rPr>
-              <a:t>plafond: float = 0.50 — l’appelant ne précise que l’essentiel.</a:t>
+              <a:t>def f(ca: int) -&gt; str : documentation vivante, aide de VS Code.</a:t>
             </a:r>
             <a:endParaRPr lang="en-US" sz="1450" dirty="0"/>
           </a:p>
@@ -4457,27 +4467,27 @@
       </p:sp>
       <p:sp>
         <p:nvSpPr>
-          <p:cNvPr id="13" name="Shape 8"/>
-          <p:cNvSpPr/>
-          <p:nvPr/>
-        </p:nvSpPr>
-        <p:spPr>
-          <a:xfrm>
-            <a:off x="640080" y="5029200"/>
+          <p:cNvPr id="11" name="Shape 6"/>
+          <p:cNvSpPr/>
+          <p:nvPr/>
+        </p:nvSpPr>
+        <p:spPr>
+          <a:xfrm>
+            <a:off x="640080" y="3977640"/>
             <a:ext cx="411480" cy="411480"/>
           </a:xfrm>
           <a:prstGeom prst="ellipse">
             <a:avLst/>
           </a:prstGeom>
           <a:solidFill>
-            <a:srgbClr val="1E7A50"/>
+            <a:srgbClr val="2E9E4F"/>
           </a:solidFill>
           <a:ln/>
         </p:spPr>
       </p:sp>
       <p:pic>
         <p:nvPicPr>
-          <p:cNvPr id="14" name="Image 3" descr="icons/check.png">    </p:cNvPr>
+          <p:cNvPr id="12" name="Image 3" descr="icons/check.png">    </p:cNvPr>
           <p:cNvPicPr>
             <a:picLocks noChangeAspect="1"/>
           </p:cNvPicPr>
@@ -4491,7 +4501,7 @@
         </p:blipFill>
         <p:spPr>
           <a:xfrm>
-            <a:off x="747065" y="5136185"/>
+            <a:off x="747065" y="4084625"/>
             <a:ext cx="197510" cy="197510"/>
           </a:xfrm>
           <a:prstGeom prst="rect">
@@ -4501,13 +4511,13 @@
       </p:pic>
       <p:sp>
         <p:nvSpPr>
-          <p:cNvPr id="15" name="Text 9"/>
-          <p:cNvSpPr/>
-          <p:nvPr/>
-        </p:nvSpPr>
-        <p:spPr>
-          <a:xfrm>
-            <a:off x="1234440" y="4956048"/>
+          <p:cNvPr id="13" name="Text 7"/>
+          <p:cNvSpPr/>
+          <p:nvPr/>
+        </p:nvSpPr>
+        <p:spPr>
+          <a:xfrm>
+            <a:off x="1234440" y="3904488"/>
             <a:ext cx="4800600" cy="960120"/>
           </a:xfrm>
           <a:prstGeom prst="rect">
@@ -4535,7 +4545,7 @@
                 <a:ea typeface="Calibri" pitchFamily="34" charset="-122"/>
                 <a:cs typeface="Calibri" pitchFamily="34" charset="-120"/>
               </a:rPr>
-              <a:t>La docstring dit le POURQUOI</a:t>
+              <a:t>Valeurs par défaut</a:t>
             </a:r>
             <a:endParaRPr lang="en-US" sz="1450" dirty="0"/>
           </a:p>
@@ -4555,6 +4565,112 @@
                 <a:ea typeface="Calibri" pitchFamily="34" charset="-122"/>
                 <a:cs typeface="Calibri" pitchFamily="34" charset="-120"/>
               </a:rPr>
+              <a:t>plafond: float = 0.50 — l’appelant ne précise que l’essentiel.</a:t>
+            </a:r>
+            <a:endParaRPr lang="en-US" sz="1450" dirty="0"/>
+          </a:p>
+        </p:txBody>
+      </p:sp>
+      <p:sp>
+        <p:nvSpPr>
+          <p:cNvPr id="14" name="Shape 8"/>
+          <p:cNvSpPr/>
+          <p:nvPr/>
+        </p:nvSpPr>
+        <p:spPr>
+          <a:xfrm>
+            <a:off x="640080" y="5029200"/>
+            <a:ext cx="411480" cy="411480"/>
+          </a:xfrm>
+          <a:prstGeom prst="ellipse">
+            <a:avLst/>
+          </a:prstGeom>
+          <a:solidFill>
+            <a:srgbClr val="2E9E4F"/>
+          </a:solidFill>
+          <a:ln/>
+        </p:spPr>
+      </p:sp>
+      <p:pic>
+        <p:nvPicPr>
+          <p:cNvPr id="15" name="Image 4" descr="icons/check.png">    </p:cNvPr>
+          <p:cNvPicPr>
+            <a:picLocks noChangeAspect="1"/>
+          </p:cNvPicPr>
+          <p:nvPr/>
+        </p:nvPicPr>
+        <p:blipFill>
+          <a:blip r:embed="rId5"/>
+          <a:stretch>
+            <a:fillRect/>
+          </a:stretch>
+        </p:blipFill>
+        <p:spPr>
+          <a:xfrm>
+            <a:off x="747065" y="5136185"/>
+            <a:ext cx="197510" cy="197510"/>
+          </a:xfrm>
+          <a:prstGeom prst="rect">
+            <a:avLst/>
+          </a:prstGeom>
+        </p:spPr>
+      </p:pic>
+      <p:sp>
+        <p:nvSpPr>
+          <p:cNvPr id="16" name="Text 9"/>
+          <p:cNvSpPr/>
+          <p:nvPr/>
+        </p:nvSpPr>
+        <p:spPr>
+          <a:xfrm>
+            <a:off x="1234440" y="4956048"/>
+            <a:ext cx="4800600" cy="960120"/>
+          </a:xfrm>
+          <a:prstGeom prst="rect">
+            <a:avLst/>
+          </a:prstGeom>
+          <a:noFill/>
+          <a:ln/>
+        </p:spPr>
+        <p:txBody>
+          <a:bodyPr wrap="square" lIns="0" tIns="0" rIns="0" bIns="0" rtlCol="0" anchor="ctr"/>
+          <a:lstStyle/>
+          <a:p>
+            <a:pPr indent="0" marL="0">
+              <a:lnSpc>
+                <a:spcPct val="105000"/>
+              </a:lnSpc>
+              <a:buNone/>
+            </a:pPr>
+            <a:r>
+              <a:rPr lang="en-US" sz="1450" b="1" dirty="0">
+                <a:solidFill>
+                  <a:srgbClr val="1C2A24"/>
+                </a:solidFill>
+                <a:latin typeface="Calibri" pitchFamily="34" charset="0"/>
+                <a:ea typeface="Calibri" pitchFamily="34" charset="-122"/>
+                <a:cs typeface="Calibri" pitchFamily="34" charset="-120"/>
+              </a:rPr>
+              <a:t>La docstring dit le POURQUOI</a:t>
+            </a:r>
+            <a:endParaRPr lang="en-US" sz="1450" dirty="0"/>
+          </a:p>
+          <a:p>
+            <a:pPr indent="0" marL="0">
+              <a:lnSpc>
+                <a:spcPct val="105000"/>
+              </a:lnSpc>
+              <a:buNone/>
+            </a:pPr>
+            <a:r>
+              <a:rPr lang="en-US" sz="1250" dirty="0">
+                <a:solidFill>
+                  <a:srgbClr val="5C6B63"/>
+                </a:solidFill>
+                <a:latin typeface="Calibri" pitchFamily="34" charset="0"/>
+                <a:ea typeface="Calibri" pitchFamily="34" charset="-122"/>
+                <a:cs typeface="Calibri" pitchFamily="34" charset="-120"/>
+              </a:rPr>
               <a:t>Première ligne à l’impératif ; help(f) l’affiche.</a:t>
             </a:r>
             <a:endParaRPr lang="en-US" sz="1450" dirty="0"/>
@@ -4563,7 +4679,7 @@
       </p:sp>
       <p:sp>
         <p:nvSpPr>
-          <p:cNvPr id="16" name="Shape 10"/>
+          <p:cNvPr id="17" name="Shape 10"/>
           <p:cNvSpPr/>
           <p:nvPr/>
         </p:nvSpPr>
@@ -4578,14 +4694,14 @@
             </a:avLst>
           </a:prstGeom>
           <a:solidFill>
-            <a:srgbClr val="10241B"/>
+            <a:srgbClr val="0F2418"/>
           </a:solidFill>
           <a:ln/>
         </p:spPr>
       </p:sp>
       <p:sp>
         <p:nvSpPr>
-          <p:cNvPr id="17" name="Shape 11"/>
+          <p:cNvPr id="18" name="Shape 11"/>
           <p:cNvSpPr/>
           <p:nvPr/>
         </p:nvSpPr>
@@ -4605,7 +4721,7 @@
       </p:sp>
       <p:sp>
         <p:nvSpPr>
-          <p:cNvPr id="18" name="Shape 12"/>
+          <p:cNvPr id="19" name="Shape 12"/>
           <p:cNvSpPr/>
           <p:nvPr/>
         </p:nvSpPr>
@@ -4618,14 +4734,14 @@
             <a:avLst/>
           </a:prstGeom>
           <a:solidFill>
-            <a:srgbClr val="C9A227"/>
+            <a:srgbClr val="C79100"/>
           </a:solidFill>
           <a:ln/>
         </p:spPr>
       </p:sp>
       <p:sp>
         <p:nvSpPr>
-          <p:cNvPr id="19" name="Shape 13"/>
+          <p:cNvPr id="20" name="Shape 13"/>
           <p:cNvSpPr/>
           <p:nvPr/>
         </p:nvSpPr>
@@ -4645,7 +4761,7 @@
       </p:sp>
       <p:sp>
         <p:nvSpPr>
-          <p:cNvPr id="20" name="Text 14"/>
+          <p:cNvPr id="21" name="Text 14"/>
           <p:cNvSpPr/>
           <p:nvPr/>
         </p:nvSpPr>
@@ -4684,7 +4800,7 @@
       </p:sp>
       <p:sp>
         <p:nvSpPr>
-          <p:cNvPr id="21" name="Text 15"/>
+          <p:cNvPr id="22" name="Text 15"/>
           <p:cNvSpPr/>
           <p:nvPr/>
         </p:nvSpPr>
@@ -5455,7 +5571,7 @@
         <p:spPr>
           <a:xfrm>
             <a:off x="548640" y="384048"/>
-            <a:ext cx="10972800" cy="320040"/>
+            <a:ext cx="9601200" cy="320040"/>
           </a:xfrm>
           <a:prstGeom prst="rect">
             <a:avLst/>
@@ -5473,7 +5589,7 @@
             <a:r>
               <a:rPr lang="en-US" sz="1300" b="1" spc="200" kern="0" dirty="0">
                 <a:solidFill>
-                  <a:srgbClr val="C9A227"/>
+                  <a:srgbClr val="C79100"/>
                 </a:solidFill>
                 <a:latin typeface="Calibri" pitchFamily="34" charset="0"/>
                 <a:ea typeface="Calibri" pitchFamily="34" charset="-122"/>
@@ -5494,7 +5610,7 @@
         <p:spPr>
           <a:xfrm>
             <a:off x="548640" y="658368"/>
-            <a:ext cx="11064240" cy="731520"/>
+            <a:ext cx="9966960" cy="731520"/>
           </a:xfrm>
           <a:prstGeom prst="rect">
             <a:avLst/>
@@ -5512,7 +5628,7 @@
             <a:r>
               <a:rPr lang="en-US" sz="3400" b="1" dirty="0">
                 <a:solidFill>
-                  <a:srgbClr val="14563C"/>
+                  <a:srgbClr val="0E7A3D"/>
                 </a:solidFill>
                 <a:latin typeface="Cambria" pitchFamily="34" charset="0"/>
                 <a:ea typeface="Cambria" pitchFamily="34" charset="-122"/>
@@ -5524,29 +5640,9 @@
           </a:p>
         </p:txBody>
       </p:sp>
-      <p:sp>
-        <p:nvSpPr>
-          <p:cNvPr id="4" name="Shape 2"/>
-          <p:cNvSpPr/>
-          <p:nvPr/>
-        </p:nvSpPr>
-        <p:spPr>
-          <a:xfrm>
-            <a:off x="640080" y="1874520"/>
-            <a:ext cx="411480" cy="411480"/>
-          </a:xfrm>
-          <a:prstGeom prst="ellipse">
-            <a:avLst/>
-          </a:prstGeom>
-          <a:solidFill>
-            <a:srgbClr val="1E7A50"/>
-          </a:solidFill>
-          <a:ln/>
-        </p:spPr>
-      </p:sp>
       <p:pic>
         <p:nvPicPr>
-          <p:cNvPr id="5" name="Image 0" descr="icons/check.png">    </p:cNvPr>
+          <p:cNvPr id="4" name="Image 0" descr="logo-dgi.png">    </p:cNvPr>
           <p:cNvPicPr>
             <a:picLocks noChangeAspect="1"/>
           </p:cNvPicPr>
@@ -5560,8 +5656,8 @@
         </p:blipFill>
         <p:spPr>
           <a:xfrm>
-            <a:off x="747065" y="1981505"/>
-            <a:ext cx="197510" cy="197510"/>
+            <a:off x="10744200" y="384048"/>
+            <a:ext cx="1051560" cy="795528"/>
           </a:xfrm>
           <a:prstGeom prst="rect">
             <a:avLst/>
@@ -5570,89 +5666,27 @@
       </p:pic>
       <p:sp>
         <p:nvSpPr>
-          <p:cNvPr id="6" name="Text 3"/>
-          <p:cNvSpPr/>
-          <p:nvPr/>
-        </p:nvSpPr>
-        <p:spPr>
-          <a:xfrm>
-            <a:off x="1234440" y="1801368"/>
-            <a:ext cx="4800600" cy="960120"/>
-          </a:xfrm>
-          <a:prstGeom prst="rect">
-            <a:avLst/>
-          </a:prstGeom>
-          <a:noFill/>
-          <a:ln/>
-        </p:spPr>
-        <p:txBody>
-          <a:bodyPr wrap="square" lIns="0" tIns="0" rIns="0" bIns="0" rtlCol="0" anchor="ctr"/>
-          <a:lstStyle/>
-          <a:p>
-            <a:pPr indent="0" marL="0">
-              <a:lnSpc>
-                <a:spcPct val="105000"/>
-              </a:lnSpc>
-              <a:buNone/>
-            </a:pPr>
-            <a:r>
-              <a:rPr lang="en-US" sz="1450" b="1" dirty="0">
-                <a:solidFill>
-                  <a:srgbClr val="1C2A24"/>
-                </a:solidFill>
-                <a:latin typeface="Calibri" pitchFamily="34" charset="0"/>
-                <a:ea typeface="Calibri" pitchFamily="34" charset="-122"/>
-                <a:cs typeface="Calibri" pitchFamily="34" charset="-120"/>
-              </a:rPr>
-              <a:t>Un test en une ligne</a:t>
-            </a:r>
-            <a:endParaRPr lang="en-US" sz="1450" dirty="0"/>
-          </a:p>
-          <a:p>
-            <a:pPr indent="0" marL="0">
-              <a:lnSpc>
-                <a:spcPct val="105000"/>
-              </a:lnSpc>
-              <a:buNone/>
-            </a:pPr>
-            <a:r>
-              <a:rPr lang="en-US" sz="1250" dirty="0">
-                <a:solidFill>
-                  <a:srgbClr val="5C6B63"/>
-                </a:solidFill>
-                <a:latin typeface="Calibri" pitchFamily="34" charset="0"/>
-                <a:ea typeface="Calibri" pitchFamily="34" charset="-122"/>
-                <a:cs typeface="Calibri" pitchFamily="34" charset="-120"/>
-              </a:rPr>
-              <a:t>assert f(30) == 0 : si faux, le programme s’arrête net.</a:t>
-            </a:r>
-            <a:endParaRPr lang="en-US" sz="1450" dirty="0"/>
-          </a:p>
-        </p:txBody>
-      </p:sp>
-      <p:sp>
-        <p:nvSpPr>
-          <p:cNvPr id="7" name="Shape 4"/>
-          <p:cNvSpPr/>
-          <p:nvPr/>
-        </p:nvSpPr>
-        <p:spPr>
-          <a:xfrm>
-            <a:off x="640080" y="2926080"/>
+          <p:cNvPr id="5" name="Shape 2"/>
+          <p:cNvSpPr/>
+          <p:nvPr/>
+        </p:nvSpPr>
+        <p:spPr>
+          <a:xfrm>
+            <a:off x="640080" y="1874520"/>
             <a:ext cx="411480" cy="411480"/>
           </a:xfrm>
           <a:prstGeom prst="ellipse">
             <a:avLst/>
           </a:prstGeom>
           <a:solidFill>
-            <a:srgbClr val="1E7A50"/>
+            <a:srgbClr val="2E9E4F"/>
           </a:solidFill>
           <a:ln/>
         </p:spPr>
       </p:sp>
       <p:pic>
         <p:nvPicPr>
-          <p:cNvPr id="8" name="Image 1" descr="icons/check.png">    </p:cNvPr>
+          <p:cNvPr id="6" name="Image 1" descr="icons/check.png">    </p:cNvPr>
           <p:cNvPicPr>
             <a:picLocks noChangeAspect="1"/>
           </p:cNvPicPr>
@@ -5666,7 +5700,7 @@
         </p:blipFill>
         <p:spPr>
           <a:xfrm>
-            <a:off x="747065" y="3033065"/>
+            <a:off x="747065" y="1981505"/>
             <a:ext cx="197510" cy="197510"/>
           </a:xfrm>
           <a:prstGeom prst="rect">
@@ -5676,13 +5710,13 @@
       </p:pic>
       <p:sp>
         <p:nvSpPr>
-          <p:cNvPr id="9" name="Text 5"/>
-          <p:cNvSpPr/>
-          <p:nvPr/>
-        </p:nvSpPr>
-        <p:spPr>
-          <a:xfrm>
-            <a:off x="1234440" y="2852928"/>
+          <p:cNvPr id="7" name="Text 3"/>
+          <p:cNvSpPr/>
+          <p:nvPr/>
+        </p:nvSpPr>
+        <p:spPr>
+          <a:xfrm>
+            <a:off x="1234440" y="1801368"/>
             <a:ext cx="4800600" cy="960120"/>
           </a:xfrm>
           <a:prstGeom prst="rect">
@@ -5710,7 +5744,7 @@
                 <a:ea typeface="Calibri" pitchFamily="34" charset="-122"/>
                 <a:cs typeface="Calibri" pitchFamily="34" charset="-120"/>
               </a:rPr>
-              <a:t>Les bords d’abord</a:t>
+              <a:t>Un test en une ligne</a:t>
             </a:r>
             <a:endParaRPr lang="en-US" sz="1450" dirty="0"/>
           </a:p>
@@ -5730,7 +5764,7 @@
                 <a:ea typeface="Calibri" pitchFamily="34" charset="-122"/>
                 <a:cs typeface="Calibri" pitchFamily="34" charset="-120"/>
               </a:rPr>
-              <a:t>30 vs 31 jours, 0, le plafond : c’est là que ça casse.</a:t>
+              <a:t>assert f(30) == 0 : si faux, le programme s’arrête net.</a:t>
             </a:r>
             <a:endParaRPr lang="en-US" sz="1450" dirty="0"/>
           </a:p>
@@ -5738,27 +5772,27 @@
       </p:sp>
       <p:sp>
         <p:nvSpPr>
-          <p:cNvPr id="10" name="Shape 6"/>
-          <p:cNvSpPr/>
-          <p:nvPr/>
-        </p:nvSpPr>
-        <p:spPr>
-          <a:xfrm>
-            <a:off x="640080" y="3977640"/>
+          <p:cNvPr id="8" name="Shape 4"/>
+          <p:cNvSpPr/>
+          <p:nvPr/>
+        </p:nvSpPr>
+        <p:spPr>
+          <a:xfrm>
+            <a:off x="640080" y="2926080"/>
             <a:ext cx="411480" cy="411480"/>
           </a:xfrm>
           <a:prstGeom prst="ellipse">
             <a:avLst/>
           </a:prstGeom>
           <a:solidFill>
-            <a:srgbClr val="1E7A50"/>
+            <a:srgbClr val="2E9E4F"/>
           </a:solidFill>
           <a:ln/>
         </p:spPr>
       </p:sp>
       <p:pic>
         <p:nvPicPr>
-          <p:cNvPr id="11" name="Image 2" descr="icons/check.png">    </p:cNvPr>
+          <p:cNvPr id="9" name="Image 2" descr="icons/check.png">    </p:cNvPr>
           <p:cNvPicPr>
             <a:picLocks noChangeAspect="1"/>
           </p:cNvPicPr>
@@ -5772,7 +5806,7 @@
         </p:blipFill>
         <p:spPr>
           <a:xfrm>
-            <a:off x="747065" y="4084625"/>
+            <a:off x="747065" y="3033065"/>
             <a:ext cx="197510" cy="197510"/>
           </a:xfrm>
           <a:prstGeom prst="rect">
@@ -5782,13 +5816,13 @@
       </p:pic>
       <p:sp>
         <p:nvSpPr>
-          <p:cNvPr id="12" name="Text 7"/>
-          <p:cNvSpPr/>
-          <p:nvPr/>
-        </p:nvSpPr>
-        <p:spPr>
-          <a:xfrm>
-            <a:off x="1234440" y="3904488"/>
+          <p:cNvPr id="10" name="Text 5"/>
+          <p:cNvSpPr/>
+          <p:nvPr/>
+        </p:nvSpPr>
+        <p:spPr>
+          <a:xfrm>
+            <a:off x="1234440" y="2852928"/>
             <a:ext cx="4800600" cy="960120"/>
           </a:xfrm>
           <a:prstGeom prst="rect">
@@ -5816,7 +5850,7 @@
                 <a:ea typeface="Calibri" pitchFamily="34" charset="-122"/>
                 <a:cs typeface="Calibri" pitchFamily="34" charset="-120"/>
               </a:rPr>
-              <a:t>Écrire le test AVANT</a:t>
+              <a:t>Les bords d’abord</a:t>
             </a:r>
             <a:endParaRPr lang="en-US" sz="1450" dirty="0"/>
           </a:p>
@@ -5836,7 +5870,7 @@
                 <a:ea typeface="Calibri" pitchFamily="34" charset="-122"/>
                 <a:cs typeface="Calibri" pitchFamily="34" charset="-120"/>
               </a:rPr>
-              <a:t>Le TP fournit les assert ; votre code doit les faire passer.</a:t>
+              <a:t>30 vs 31 jours, 0, le plafond : c’est là que ça casse.</a:t>
             </a:r>
             <a:endParaRPr lang="en-US" sz="1450" dirty="0"/>
           </a:p>
@@ -5844,27 +5878,27 @@
       </p:sp>
       <p:sp>
         <p:nvSpPr>
-          <p:cNvPr id="13" name="Shape 8"/>
-          <p:cNvSpPr/>
-          <p:nvPr/>
-        </p:nvSpPr>
-        <p:spPr>
-          <a:xfrm>
-            <a:off x="640080" y="5029200"/>
+          <p:cNvPr id="11" name="Shape 6"/>
+          <p:cNvSpPr/>
+          <p:nvPr/>
+        </p:nvSpPr>
+        <p:spPr>
+          <a:xfrm>
+            <a:off x="640080" y="3977640"/>
             <a:ext cx="411480" cy="411480"/>
           </a:xfrm>
           <a:prstGeom prst="ellipse">
             <a:avLst/>
           </a:prstGeom>
           <a:solidFill>
-            <a:srgbClr val="1E7A50"/>
+            <a:srgbClr val="2E9E4F"/>
           </a:solidFill>
           <a:ln/>
         </p:spPr>
       </p:sp>
       <p:pic>
         <p:nvPicPr>
-          <p:cNvPr id="14" name="Image 3" descr="icons/check.png">    </p:cNvPr>
+          <p:cNvPr id="12" name="Image 3" descr="icons/check.png">    </p:cNvPr>
           <p:cNvPicPr>
             <a:picLocks noChangeAspect="1"/>
           </p:cNvPicPr>
@@ -5878,7 +5912,7 @@
         </p:blipFill>
         <p:spPr>
           <a:xfrm>
-            <a:off x="747065" y="5136185"/>
+            <a:off x="747065" y="4084625"/>
             <a:ext cx="197510" cy="197510"/>
           </a:xfrm>
           <a:prstGeom prst="rect">
@@ -5888,13 +5922,13 @@
       </p:pic>
       <p:sp>
         <p:nvSpPr>
-          <p:cNvPr id="15" name="Text 9"/>
-          <p:cNvSpPr/>
-          <p:nvPr/>
-        </p:nvSpPr>
-        <p:spPr>
-          <a:xfrm>
-            <a:off x="1234440" y="4956048"/>
+          <p:cNvPr id="13" name="Text 7"/>
+          <p:cNvSpPr/>
+          <p:nvPr/>
+        </p:nvSpPr>
+        <p:spPr>
+          <a:xfrm>
+            <a:off x="1234440" y="3904488"/>
             <a:ext cx="4800600" cy="960120"/>
           </a:xfrm>
           <a:prstGeom prst="rect">
@@ -5922,7 +5956,7 @@
                 <a:ea typeface="Calibri" pitchFamily="34" charset="-122"/>
                 <a:cs typeface="Calibri" pitchFamily="34" charset="-120"/>
               </a:rPr>
-              <a:t>Demain, les vrais tests</a:t>
+              <a:t>Écrire le test AVANT</a:t>
             </a:r>
             <a:endParaRPr lang="en-US" sz="1450" dirty="0"/>
           </a:p>
@@ -5942,6 +5976,112 @@
                 <a:ea typeface="Calibri" pitchFamily="34" charset="-122"/>
                 <a:cs typeface="Calibri" pitchFamily="34" charset="-120"/>
               </a:rPr>
+              <a:t>Le TP fournit les assert ; votre code doit les faire passer.</a:t>
+            </a:r>
+            <a:endParaRPr lang="en-US" sz="1450" dirty="0"/>
+          </a:p>
+        </p:txBody>
+      </p:sp>
+      <p:sp>
+        <p:nvSpPr>
+          <p:cNvPr id="14" name="Shape 8"/>
+          <p:cNvSpPr/>
+          <p:nvPr/>
+        </p:nvSpPr>
+        <p:spPr>
+          <a:xfrm>
+            <a:off x="640080" y="5029200"/>
+            <a:ext cx="411480" cy="411480"/>
+          </a:xfrm>
+          <a:prstGeom prst="ellipse">
+            <a:avLst/>
+          </a:prstGeom>
+          <a:solidFill>
+            <a:srgbClr val="2E9E4F"/>
+          </a:solidFill>
+          <a:ln/>
+        </p:spPr>
+      </p:sp>
+      <p:pic>
+        <p:nvPicPr>
+          <p:cNvPr id="15" name="Image 4" descr="icons/check.png">    </p:cNvPr>
+          <p:cNvPicPr>
+            <a:picLocks noChangeAspect="1"/>
+          </p:cNvPicPr>
+          <p:nvPr/>
+        </p:nvPicPr>
+        <p:blipFill>
+          <a:blip r:embed="rId5"/>
+          <a:stretch>
+            <a:fillRect/>
+          </a:stretch>
+        </p:blipFill>
+        <p:spPr>
+          <a:xfrm>
+            <a:off x="747065" y="5136185"/>
+            <a:ext cx="197510" cy="197510"/>
+          </a:xfrm>
+          <a:prstGeom prst="rect">
+            <a:avLst/>
+          </a:prstGeom>
+        </p:spPr>
+      </p:pic>
+      <p:sp>
+        <p:nvSpPr>
+          <p:cNvPr id="16" name="Text 9"/>
+          <p:cNvSpPr/>
+          <p:nvPr/>
+        </p:nvSpPr>
+        <p:spPr>
+          <a:xfrm>
+            <a:off x="1234440" y="4956048"/>
+            <a:ext cx="4800600" cy="960120"/>
+          </a:xfrm>
+          <a:prstGeom prst="rect">
+            <a:avLst/>
+          </a:prstGeom>
+          <a:noFill/>
+          <a:ln/>
+        </p:spPr>
+        <p:txBody>
+          <a:bodyPr wrap="square" lIns="0" tIns="0" rIns="0" bIns="0" rtlCol="0" anchor="ctr"/>
+          <a:lstStyle/>
+          <a:p>
+            <a:pPr indent="0" marL="0">
+              <a:lnSpc>
+                <a:spcPct val="105000"/>
+              </a:lnSpc>
+              <a:buNone/>
+            </a:pPr>
+            <a:r>
+              <a:rPr lang="en-US" sz="1450" b="1" dirty="0">
+                <a:solidFill>
+                  <a:srgbClr val="1C2A24"/>
+                </a:solidFill>
+                <a:latin typeface="Calibri" pitchFamily="34" charset="0"/>
+                <a:ea typeface="Calibri" pitchFamily="34" charset="-122"/>
+                <a:cs typeface="Calibri" pitchFamily="34" charset="-120"/>
+              </a:rPr>
+              <a:t>Demain, les vrais tests</a:t>
+            </a:r>
+            <a:endParaRPr lang="en-US" sz="1450" dirty="0"/>
+          </a:p>
+          <a:p>
+            <a:pPr indent="0" marL="0">
+              <a:lnSpc>
+                <a:spcPct val="105000"/>
+              </a:lnSpc>
+              <a:buNone/>
+            </a:pPr>
+            <a:r>
+              <a:rPr lang="en-US" sz="1250" dirty="0">
+                <a:solidFill>
+                  <a:srgbClr val="5C6B63"/>
+                </a:solidFill>
+                <a:latin typeface="Calibri" pitchFamily="34" charset="0"/>
+                <a:ea typeface="Calibri" pitchFamily="34" charset="-122"/>
+                <a:cs typeface="Calibri" pitchFamily="34" charset="-120"/>
+              </a:rPr>
               <a:t>assert est l’antichambre de pytest — même logique.</a:t>
             </a:r>
             <a:endParaRPr lang="en-US" sz="1450" dirty="0"/>
@@ -5950,7 +6090,7 @@
       </p:sp>
       <p:sp>
         <p:nvSpPr>
-          <p:cNvPr id="16" name="Shape 10"/>
+          <p:cNvPr id="17" name="Shape 10"/>
           <p:cNvSpPr/>
           <p:nvPr/>
         </p:nvSpPr>
@@ -5965,14 +6105,14 @@
             </a:avLst>
           </a:prstGeom>
           <a:solidFill>
-            <a:srgbClr val="10241B"/>
+            <a:srgbClr val="0F2418"/>
           </a:solidFill>
           <a:ln/>
         </p:spPr>
       </p:sp>
       <p:sp>
         <p:nvSpPr>
-          <p:cNvPr id="17" name="Shape 11"/>
+          <p:cNvPr id="18" name="Shape 11"/>
           <p:cNvSpPr/>
           <p:nvPr/>
         </p:nvSpPr>
@@ -5992,7 +6132,7 @@
       </p:sp>
       <p:sp>
         <p:nvSpPr>
-          <p:cNvPr id="18" name="Shape 12"/>
+          <p:cNvPr id="19" name="Shape 12"/>
           <p:cNvSpPr/>
           <p:nvPr/>
         </p:nvSpPr>
@@ -6005,14 +6145,14 @@
             <a:avLst/>
           </a:prstGeom>
           <a:solidFill>
-            <a:srgbClr val="C9A227"/>
+            <a:srgbClr val="C79100"/>
           </a:solidFill>
           <a:ln/>
         </p:spPr>
       </p:sp>
       <p:sp>
         <p:nvSpPr>
-          <p:cNvPr id="19" name="Shape 13"/>
+          <p:cNvPr id="20" name="Shape 13"/>
           <p:cNvSpPr/>
           <p:nvPr/>
         </p:nvSpPr>
@@ -6032,7 +6172,7 @@
       </p:sp>
       <p:sp>
         <p:nvSpPr>
-          <p:cNvPr id="20" name="Text 14"/>
+          <p:cNvPr id="21" name="Text 14"/>
           <p:cNvSpPr/>
           <p:nvPr/>
         </p:nvSpPr>
@@ -6071,7 +6211,7 @@
       </p:sp>
       <p:sp>
         <p:nvSpPr>
-          <p:cNvPr id="21" name="Text 15"/>
+          <p:cNvPr id="22" name="Text 15"/>
           <p:cNvSpPr/>
           <p:nvPr/>
         </p:nvSpPr>
@@ -6709,7 +6849,7 @@
         <p:spPr>
           <a:xfrm>
             <a:off x="548640" y="384048"/>
-            <a:ext cx="10972800" cy="320040"/>
+            <a:ext cx="9601200" cy="320040"/>
           </a:xfrm>
           <a:prstGeom prst="rect">
             <a:avLst/>
@@ -6727,7 +6867,7 @@
             <a:r>
               <a:rPr lang="en-US" sz="1300" b="1" spc="200" kern="0" dirty="0">
                 <a:solidFill>
-                  <a:srgbClr val="C9A227"/>
+                  <a:srgbClr val="C79100"/>
                 </a:solidFill>
                 <a:latin typeface="Calibri" pitchFamily="34" charset="0"/>
                 <a:ea typeface="Calibri" pitchFamily="34" charset="-122"/>
@@ -6748,7 +6888,7 @@
         <p:spPr>
           <a:xfrm>
             <a:off x="548640" y="658368"/>
-            <a:ext cx="11064240" cy="731520"/>
+            <a:ext cx="9966960" cy="731520"/>
           </a:xfrm>
           <a:prstGeom prst="rect">
             <a:avLst/>
@@ -6766,7 +6906,7 @@
             <a:r>
               <a:rPr lang="en-US" sz="3400" b="1" dirty="0">
                 <a:solidFill>
-                  <a:srgbClr val="14563C"/>
+                  <a:srgbClr val="0E7A3D"/>
                 </a:solidFill>
                 <a:latin typeface="Cambria" pitchFamily="34" charset="0"/>
                 <a:ea typeface="Cambria" pitchFamily="34" charset="-122"/>
@@ -6778,29 +6918,9 @@
           </a:p>
         </p:txBody>
       </p:sp>
-      <p:sp>
-        <p:nvSpPr>
-          <p:cNvPr id="4" name="Shape 2"/>
-          <p:cNvSpPr/>
-          <p:nvPr/>
-        </p:nvSpPr>
-        <p:spPr>
-          <a:xfrm>
-            <a:off x="640080" y="1874520"/>
-            <a:ext cx="411480" cy="411480"/>
-          </a:xfrm>
-          <a:prstGeom prst="ellipse">
-            <a:avLst/>
-          </a:prstGeom>
-          <a:solidFill>
-            <a:srgbClr val="1E7A50"/>
-          </a:solidFill>
-          <a:ln/>
-        </p:spPr>
-      </p:sp>
       <p:pic>
         <p:nvPicPr>
-          <p:cNvPr id="5" name="Image 0" descr="icons/check.png">    </p:cNvPr>
+          <p:cNvPr id="4" name="Image 0" descr="logo-dgi.png">    </p:cNvPr>
           <p:cNvPicPr>
             <a:picLocks noChangeAspect="1"/>
           </p:cNvPicPr>
@@ -6814,8 +6934,8 @@
         </p:blipFill>
         <p:spPr>
           <a:xfrm>
-            <a:off x="747065" y="1981505"/>
-            <a:ext cx="197510" cy="197510"/>
+            <a:off x="10744200" y="384048"/>
+            <a:ext cx="1051560" cy="795528"/>
           </a:xfrm>
           <a:prstGeom prst="rect">
             <a:avLst/>
@@ -6824,89 +6944,27 @@
       </p:pic>
       <p:sp>
         <p:nvSpPr>
-          <p:cNvPr id="6" name="Text 3"/>
-          <p:cNvSpPr/>
-          <p:nvPr/>
-        </p:nvSpPr>
-        <p:spPr>
-          <a:xfrm>
-            <a:off x="1234440" y="1801368"/>
-            <a:ext cx="4800600" cy="960120"/>
-          </a:xfrm>
-          <a:prstGeom prst="rect">
-            <a:avLst/>
-          </a:prstGeom>
-          <a:noFill/>
-          <a:ln/>
-        </p:spPr>
-        <p:txBody>
-          <a:bodyPr wrap="square" lIns="0" tIns="0" rIns="0" bIns="0" rtlCol="0" anchor="ctr"/>
-          <a:lstStyle/>
-          <a:p>
-            <a:pPr indent="0" marL="0">
-              <a:lnSpc>
-                <a:spcPct val="105000"/>
-              </a:lnSpc>
-              <a:buNone/>
-            </a:pPr>
-            <a:r>
-              <a:rPr lang="en-US" sz="1450" b="1" dirty="0">
-                <a:solidFill>
-                  <a:srgbClr val="1C2A24"/>
-                </a:solidFill>
-                <a:latin typeface="Calibri" pitchFamily="34" charset="0"/>
-                <a:ea typeface="Calibri" pitchFamily="34" charset="-122"/>
-                <a:cs typeface="Calibri" pitchFamily="34" charset="-120"/>
-              </a:rPr>
-              <a:t>La liste : modifiable, ordonnée</a:t>
-            </a:r>
-            <a:endParaRPr lang="en-US" sz="1450" dirty="0"/>
-          </a:p>
-          <a:p>
-            <a:pPr indent="0" marL="0">
-              <a:lnSpc>
-                <a:spcPct val="105000"/>
-              </a:lnSpc>
-              <a:buNone/>
-            </a:pPr>
-            <a:r>
-              <a:rPr lang="en-US" sz="1250" dirty="0">
-                <a:solidFill>
-                  <a:srgbClr val="5C6B63"/>
-                </a:solidFill>
-                <a:latin typeface="Calibri" pitchFamily="34" charset="0"/>
-                <a:ea typeface="Calibri" pitchFamily="34" charset="-122"/>
-                <a:cs typeface="Calibri" pitchFamily="34" charset="-120"/>
-              </a:rPr>
-              <a:t>append, sort, découpage lst[2:5] — l’outil à tout faire.</a:t>
-            </a:r>
-            <a:endParaRPr lang="en-US" sz="1450" dirty="0"/>
-          </a:p>
-        </p:txBody>
-      </p:sp>
-      <p:sp>
-        <p:nvSpPr>
-          <p:cNvPr id="7" name="Shape 4"/>
-          <p:cNvSpPr/>
-          <p:nvPr/>
-        </p:nvSpPr>
-        <p:spPr>
-          <a:xfrm>
-            <a:off x="640080" y="2926080"/>
+          <p:cNvPr id="5" name="Shape 2"/>
+          <p:cNvSpPr/>
+          <p:nvPr/>
+        </p:nvSpPr>
+        <p:spPr>
+          <a:xfrm>
+            <a:off x="640080" y="1874520"/>
             <a:ext cx="411480" cy="411480"/>
           </a:xfrm>
           <a:prstGeom prst="ellipse">
             <a:avLst/>
           </a:prstGeom>
           <a:solidFill>
-            <a:srgbClr val="1E7A50"/>
+            <a:srgbClr val="2E9E4F"/>
           </a:solidFill>
           <a:ln/>
         </p:spPr>
       </p:sp>
       <p:pic>
         <p:nvPicPr>
-          <p:cNvPr id="8" name="Image 1" descr="icons/check.png">    </p:cNvPr>
+          <p:cNvPr id="6" name="Image 1" descr="icons/check.png">    </p:cNvPr>
           <p:cNvPicPr>
             <a:picLocks noChangeAspect="1"/>
           </p:cNvPicPr>
@@ -6920,7 +6978,7 @@
         </p:blipFill>
         <p:spPr>
           <a:xfrm>
-            <a:off x="747065" y="3033065"/>
+            <a:off x="747065" y="1981505"/>
             <a:ext cx="197510" cy="197510"/>
           </a:xfrm>
           <a:prstGeom prst="rect">
@@ -6930,13 +6988,13 @@
       </p:pic>
       <p:sp>
         <p:nvSpPr>
-          <p:cNvPr id="9" name="Text 5"/>
-          <p:cNvSpPr/>
-          <p:nvPr/>
-        </p:nvSpPr>
-        <p:spPr>
-          <a:xfrm>
-            <a:off x="1234440" y="2852928"/>
+          <p:cNvPr id="7" name="Text 3"/>
+          <p:cNvSpPr/>
+          <p:nvPr/>
+        </p:nvSpPr>
+        <p:spPr>
+          <a:xfrm>
+            <a:off x="1234440" y="1801368"/>
             <a:ext cx="4800600" cy="960120"/>
           </a:xfrm>
           <a:prstGeom prst="rect">
@@ -6964,7 +7022,7 @@
                 <a:ea typeface="Calibri" pitchFamily="34" charset="-122"/>
                 <a:cs typeface="Calibri" pitchFamily="34" charset="-120"/>
               </a:rPr>
-              <a:t>b = a ne copie PAS</a:t>
+              <a:t>La liste : modifiable, ordonnée</a:t>
             </a:r>
             <a:endParaRPr lang="en-US" sz="1450" dirty="0"/>
           </a:p>
@@ -6984,7 +7042,7 @@
                 <a:ea typeface="Calibri" pitchFamily="34" charset="-122"/>
                 <a:cs typeface="Calibri" pitchFamily="34" charset="-120"/>
               </a:rPr>
-              <a:t>Deux noms, une seule liste. Copier : b = a.copy().</a:t>
+              <a:t>append, sort, découpage lst[2:5] — l’outil à tout faire.</a:t>
             </a:r>
             <a:endParaRPr lang="en-US" sz="1450" dirty="0"/>
           </a:p>
@@ -6992,27 +7050,27 @@
       </p:sp>
       <p:sp>
         <p:nvSpPr>
-          <p:cNvPr id="10" name="Shape 6"/>
-          <p:cNvSpPr/>
-          <p:nvPr/>
-        </p:nvSpPr>
-        <p:spPr>
-          <a:xfrm>
-            <a:off x="640080" y="3977640"/>
+          <p:cNvPr id="8" name="Shape 4"/>
+          <p:cNvSpPr/>
+          <p:nvPr/>
+        </p:nvSpPr>
+        <p:spPr>
+          <a:xfrm>
+            <a:off x="640080" y="2926080"/>
             <a:ext cx="411480" cy="411480"/>
           </a:xfrm>
           <a:prstGeom prst="ellipse">
             <a:avLst/>
           </a:prstGeom>
           <a:solidFill>
-            <a:srgbClr val="1E7A50"/>
+            <a:srgbClr val="2E9E4F"/>
           </a:solidFill>
           <a:ln/>
         </p:spPr>
       </p:sp>
       <p:pic>
         <p:nvPicPr>
-          <p:cNvPr id="11" name="Image 2" descr="icons/check.png">    </p:cNvPr>
+          <p:cNvPr id="9" name="Image 2" descr="icons/check.png">    </p:cNvPr>
           <p:cNvPicPr>
             <a:picLocks noChangeAspect="1"/>
           </p:cNvPicPr>
@@ -7026,7 +7084,7 @@
         </p:blipFill>
         <p:spPr>
           <a:xfrm>
-            <a:off x="747065" y="4084625"/>
+            <a:off x="747065" y="3033065"/>
             <a:ext cx="197510" cy="197510"/>
           </a:xfrm>
           <a:prstGeom prst="rect">
@@ -7036,13 +7094,13 @@
       </p:pic>
       <p:sp>
         <p:nvSpPr>
-          <p:cNvPr id="12" name="Text 7"/>
-          <p:cNvSpPr/>
-          <p:nvPr/>
-        </p:nvSpPr>
-        <p:spPr>
-          <a:xfrm>
-            <a:off x="1234440" y="3904488"/>
+          <p:cNvPr id="10" name="Text 5"/>
+          <p:cNvSpPr/>
+          <p:nvPr/>
+        </p:nvSpPr>
+        <p:spPr>
+          <a:xfrm>
+            <a:off x="1234440" y="2852928"/>
             <a:ext cx="4800600" cy="960120"/>
           </a:xfrm>
           <a:prstGeom prst="rect">
@@ -7070,7 +7128,7 @@
                 <a:ea typeface="Calibri" pitchFamily="34" charset="-122"/>
                 <a:cs typeface="Calibri" pitchFamily="34" charset="-120"/>
               </a:rPr>
-              <a:t>Le tuple : figé</a:t>
+              <a:t>b = a ne copie PAS</a:t>
             </a:r>
             <a:endParaRPr lang="en-US" sz="1450" dirty="0"/>
           </a:p>
@@ -7090,7 +7148,7 @@
                 <a:ea typeface="Calibri" pitchFamily="34" charset="-122"/>
                 <a:cs typeface="Calibri" pitchFamily="34" charset="-120"/>
               </a:rPr>
-              <a:t>Coordonnées, paires (cle, valeur) — ce qui ne doit pas bouger.</a:t>
+              <a:t>Deux noms, une seule liste. Copier : b = a.copy().</a:t>
             </a:r>
             <a:endParaRPr lang="en-US" sz="1450" dirty="0"/>
           </a:p>
@@ -7098,27 +7156,27 @@
       </p:sp>
       <p:sp>
         <p:nvSpPr>
-          <p:cNvPr id="13" name="Shape 8"/>
-          <p:cNvSpPr/>
-          <p:nvPr/>
-        </p:nvSpPr>
-        <p:spPr>
-          <a:xfrm>
-            <a:off x="640080" y="5029200"/>
+          <p:cNvPr id="11" name="Shape 6"/>
+          <p:cNvSpPr/>
+          <p:nvPr/>
+        </p:nvSpPr>
+        <p:spPr>
+          <a:xfrm>
+            <a:off x="640080" y="3977640"/>
             <a:ext cx="411480" cy="411480"/>
           </a:xfrm>
           <a:prstGeom prst="ellipse">
             <a:avLst/>
           </a:prstGeom>
           <a:solidFill>
-            <a:srgbClr val="1E7A50"/>
+            <a:srgbClr val="2E9E4F"/>
           </a:solidFill>
           <a:ln/>
         </p:spPr>
       </p:sp>
       <p:pic>
         <p:nvPicPr>
-          <p:cNvPr id="14" name="Image 3" descr="icons/check.png">    </p:cNvPr>
+          <p:cNvPr id="12" name="Image 3" descr="icons/check.png">    </p:cNvPr>
           <p:cNvPicPr>
             <a:picLocks noChangeAspect="1"/>
           </p:cNvPicPr>
@@ -7132,7 +7190,7 @@
         </p:blipFill>
         <p:spPr>
           <a:xfrm>
-            <a:off x="747065" y="5136185"/>
+            <a:off x="747065" y="4084625"/>
             <a:ext cx="197510" cy="197510"/>
           </a:xfrm>
           <a:prstGeom prst="rect">
@@ -7142,13 +7200,13 @@
       </p:pic>
       <p:sp>
         <p:nvSpPr>
-          <p:cNvPr id="15" name="Text 9"/>
-          <p:cNvSpPr/>
-          <p:nvPr/>
-        </p:nvSpPr>
-        <p:spPr>
-          <a:xfrm>
-            <a:off x="1234440" y="4956048"/>
+          <p:cNvPr id="13" name="Text 7"/>
+          <p:cNvSpPr/>
+          <p:nvPr/>
+        </p:nvSpPr>
+        <p:spPr>
+          <a:xfrm>
+            <a:off x="1234440" y="3904488"/>
             <a:ext cx="4800600" cy="960120"/>
           </a:xfrm>
           <a:prstGeom prst="rect">
@@ -7176,7 +7234,7 @@
                 <a:ea typeface="Calibri" pitchFamily="34" charset="-122"/>
                 <a:cs typeface="Calibri" pitchFamily="34" charset="-120"/>
               </a:rPr>
-              <a:t>Dépaquetage</a:t>
+              <a:t>Le tuple : figé</a:t>
             </a:r>
             <a:endParaRPr lang="en-US" sz="1450" dirty="0"/>
           </a:p>
@@ -7196,7 +7254,7 @@
                 <a:ea typeface="Calibri" pitchFamily="34" charset="-122"/>
                 <a:cs typeface="Calibri" pitchFamily="34" charset="-120"/>
               </a:rPr>
-              <a:t>code, nom = ("CKY", "Conakry") : deux affectations d’un coup.</a:t>
+              <a:t>Coordonnées, paires (cle, valeur) — ce qui ne doit pas bouger.</a:t>
             </a:r>
             <a:endParaRPr lang="en-US" sz="1450" dirty="0"/>
           </a:p>
@@ -7204,7 +7262,113 @@
       </p:sp>
       <p:sp>
         <p:nvSpPr>
-          <p:cNvPr id="16" name="Shape 10"/>
+          <p:cNvPr id="14" name="Shape 8"/>
+          <p:cNvSpPr/>
+          <p:nvPr/>
+        </p:nvSpPr>
+        <p:spPr>
+          <a:xfrm>
+            <a:off x="640080" y="5029200"/>
+            <a:ext cx="411480" cy="411480"/>
+          </a:xfrm>
+          <a:prstGeom prst="ellipse">
+            <a:avLst/>
+          </a:prstGeom>
+          <a:solidFill>
+            <a:srgbClr val="2E9E4F"/>
+          </a:solidFill>
+          <a:ln/>
+        </p:spPr>
+      </p:sp>
+      <p:pic>
+        <p:nvPicPr>
+          <p:cNvPr id="15" name="Image 4" descr="icons/check.png">    </p:cNvPr>
+          <p:cNvPicPr>
+            <a:picLocks noChangeAspect="1"/>
+          </p:cNvPicPr>
+          <p:nvPr/>
+        </p:nvPicPr>
+        <p:blipFill>
+          <a:blip r:embed="rId5"/>
+          <a:stretch>
+            <a:fillRect/>
+          </a:stretch>
+        </p:blipFill>
+        <p:spPr>
+          <a:xfrm>
+            <a:off x="747065" y="5136185"/>
+            <a:ext cx="197510" cy="197510"/>
+          </a:xfrm>
+          <a:prstGeom prst="rect">
+            <a:avLst/>
+          </a:prstGeom>
+        </p:spPr>
+      </p:pic>
+      <p:sp>
+        <p:nvSpPr>
+          <p:cNvPr id="16" name="Text 9"/>
+          <p:cNvSpPr/>
+          <p:nvPr/>
+        </p:nvSpPr>
+        <p:spPr>
+          <a:xfrm>
+            <a:off x="1234440" y="4956048"/>
+            <a:ext cx="4800600" cy="960120"/>
+          </a:xfrm>
+          <a:prstGeom prst="rect">
+            <a:avLst/>
+          </a:prstGeom>
+          <a:noFill/>
+          <a:ln/>
+        </p:spPr>
+        <p:txBody>
+          <a:bodyPr wrap="square" lIns="0" tIns="0" rIns="0" bIns="0" rtlCol="0" anchor="ctr"/>
+          <a:lstStyle/>
+          <a:p>
+            <a:pPr indent="0" marL="0">
+              <a:lnSpc>
+                <a:spcPct val="105000"/>
+              </a:lnSpc>
+              <a:buNone/>
+            </a:pPr>
+            <a:r>
+              <a:rPr lang="en-US" sz="1450" b="1" dirty="0">
+                <a:solidFill>
+                  <a:srgbClr val="1C2A24"/>
+                </a:solidFill>
+                <a:latin typeface="Calibri" pitchFamily="34" charset="0"/>
+                <a:ea typeface="Calibri" pitchFamily="34" charset="-122"/>
+                <a:cs typeface="Calibri" pitchFamily="34" charset="-120"/>
+              </a:rPr>
+              <a:t>Dépaquetage</a:t>
+            </a:r>
+            <a:endParaRPr lang="en-US" sz="1450" dirty="0"/>
+          </a:p>
+          <a:p>
+            <a:pPr indent="0" marL="0">
+              <a:lnSpc>
+                <a:spcPct val="105000"/>
+              </a:lnSpc>
+              <a:buNone/>
+            </a:pPr>
+            <a:r>
+              <a:rPr lang="en-US" sz="1250" dirty="0">
+                <a:solidFill>
+                  <a:srgbClr val="5C6B63"/>
+                </a:solidFill>
+                <a:latin typeface="Calibri" pitchFamily="34" charset="0"/>
+                <a:ea typeface="Calibri" pitchFamily="34" charset="-122"/>
+                <a:cs typeface="Calibri" pitchFamily="34" charset="-120"/>
+              </a:rPr>
+              <a:t>code, nom = ("BIS", "Bissau") : deux affectations d’un coup.</a:t>
+            </a:r>
+            <a:endParaRPr lang="en-US" sz="1450" dirty="0"/>
+          </a:p>
+        </p:txBody>
+      </p:sp>
+      <p:sp>
+        <p:nvSpPr>
+          <p:cNvPr id="17" name="Shape 10"/>
           <p:cNvSpPr/>
           <p:nvPr/>
         </p:nvSpPr>
@@ -7219,14 +7383,14 @@
             </a:avLst>
           </a:prstGeom>
           <a:solidFill>
-            <a:srgbClr val="10241B"/>
+            <a:srgbClr val="0F2418"/>
           </a:solidFill>
           <a:ln/>
         </p:spPr>
       </p:sp>
       <p:sp>
         <p:nvSpPr>
-          <p:cNvPr id="17" name="Shape 11"/>
+          <p:cNvPr id="18" name="Shape 11"/>
           <p:cNvSpPr/>
           <p:nvPr/>
         </p:nvSpPr>
@@ -7246,7 +7410,7 @@
       </p:sp>
       <p:sp>
         <p:nvSpPr>
-          <p:cNvPr id="18" name="Shape 12"/>
+          <p:cNvPr id="19" name="Shape 12"/>
           <p:cNvSpPr/>
           <p:nvPr/>
         </p:nvSpPr>
@@ -7259,14 +7423,14 @@
             <a:avLst/>
           </a:prstGeom>
           <a:solidFill>
-            <a:srgbClr val="C9A227"/>
+            <a:srgbClr val="C79100"/>
           </a:solidFill>
           <a:ln/>
         </p:spPr>
       </p:sp>
       <p:sp>
         <p:nvSpPr>
-          <p:cNvPr id="19" name="Shape 13"/>
+          <p:cNvPr id="20" name="Shape 13"/>
           <p:cNvSpPr/>
           <p:nvPr/>
         </p:nvSpPr>
@@ -7286,7 +7450,7 @@
       </p:sp>
       <p:sp>
         <p:nvSpPr>
-          <p:cNvPr id="20" name="Text 14"/>
+          <p:cNvPr id="21" name="Text 14"/>
           <p:cNvSpPr/>
           <p:nvPr/>
         </p:nvSpPr>
@@ -7325,7 +7489,7 @@
       </p:sp>
       <p:sp>
         <p:nvSpPr>
-          <p:cNvPr id="21" name="Text 15"/>
+          <p:cNvPr id="22" name="Text 15"/>
           <p:cNvSpPr/>
           <p:nvPr/>
         </p:nvSpPr>
@@ -7848,7 +8012,7 @@
                 <a:ea typeface="Courier New" pitchFamily="34" charset="-122"/>
                 <a:cs typeface="Courier New" pitchFamily="34" charset="-120"/>
               </a:rPr>
-              <a:t>"CKY"</a:t>
+              <a:t>"BIS"</a:t>
             </a:r>
             <a:pPr indent="0" marL="0">
               <a:lnSpc>
@@ -7882,7 +8046,7 @@
                 <a:ea typeface="Courier New" pitchFamily="34" charset="-122"/>
                 <a:cs typeface="Courier New" pitchFamily="34" charset="-120"/>
               </a:rPr>
-              <a:t>"Conakry"</a:t>
+              <a:t>"Bissau"</a:t>
             </a:r>
             <a:pPr indent="0" marL="0">
               <a:lnSpc>
@@ -7946,7 +8110,7 @@
         <p:spPr>
           <a:xfrm>
             <a:off x="548640" y="384048"/>
-            <a:ext cx="10972800" cy="320040"/>
+            <a:ext cx="9601200" cy="320040"/>
           </a:xfrm>
           <a:prstGeom prst="rect">
             <a:avLst/>
@@ -7964,7 +8128,7 @@
             <a:r>
               <a:rPr lang="en-US" sz="1300" b="1" spc="200" kern="0" dirty="0">
                 <a:solidFill>
-                  <a:srgbClr val="C9A227"/>
+                  <a:srgbClr val="C79100"/>
                 </a:solidFill>
                 <a:latin typeface="Calibri" pitchFamily="34" charset="0"/>
                 <a:ea typeface="Calibri" pitchFamily="34" charset="-122"/>
@@ -7985,7 +8149,7 @@
         <p:spPr>
           <a:xfrm>
             <a:off x="548640" y="658368"/>
-            <a:ext cx="11064240" cy="731520"/>
+            <a:ext cx="9966960" cy="731520"/>
           </a:xfrm>
           <a:prstGeom prst="rect">
             <a:avLst/>
@@ -8003,7 +8167,7 @@
             <a:r>
               <a:rPr lang="en-US" sz="3400" b="1" dirty="0">
                 <a:solidFill>
-                  <a:srgbClr val="14563C"/>
+                  <a:srgbClr val="0E7A3D"/>
                 </a:solidFill>
                 <a:latin typeface="Cambria" pitchFamily="34" charset="0"/>
                 <a:ea typeface="Cambria" pitchFamily="34" charset="-122"/>
@@ -8015,29 +8179,9 @@
           </a:p>
         </p:txBody>
       </p:sp>
-      <p:sp>
-        <p:nvSpPr>
-          <p:cNvPr id="4" name="Shape 2"/>
-          <p:cNvSpPr/>
-          <p:nvPr/>
-        </p:nvSpPr>
-        <p:spPr>
-          <a:xfrm>
-            <a:off x="640080" y="1874520"/>
-            <a:ext cx="411480" cy="411480"/>
-          </a:xfrm>
-          <a:prstGeom prst="ellipse">
-            <a:avLst/>
-          </a:prstGeom>
-          <a:solidFill>
-            <a:srgbClr val="1E7A50"/>
-          </a:solidFill>
-          <a:ln/>
-        </p:spPr>
-      </p:sp>
       <p:pic>
         <p:nvPicPr>
-          <p:cNvPr id="5" name="Image 0" descr="icons/check.png">    </p:cNvPr>
+          <p:cNvPr id="4" name="Image 0" descr="logo-dgi.png">    </p:cNvPr>
           <p:cNvPicPr>
             <a:picLocks noChangeAspect="1"/>
           </p:cNvPicPr>
@@ -8051,8 +8195,8 @@
         </p:blipFill>
         <p:spPr>
           <a:xfrm>
-            <a:off x="747065" y="1981505"/>
-            <a:ext cx="197510" cy="197510"/>
+            <a:off x="10744200" y="384048"/>
+            <a:ext cx="1051560" cy="795528"/>
           </a:xfrm>
           <a:prstGeom prst="rect">
             <a:avLst/>
@@ -8061,89 +8205,27 @@
       </p:pic>
       <p:sp>
         <p:nvSpPr>
-          <p:cNvPr id="6" name="Text 3"/>
-          <p:cNvSpPr/>
-          <p:nvPr/>
-        </p:nvSpPr>
-        <p:spPr>
-          <a:xfrm>
-            <a:off x="1234440" y="1801368"/>
-            <a:ext cx="4800600" cy="960120"/>
-          </a:xfrm>
-          <a:prstGeom prst="rect">
-            <a:avLst/>
-          </a:prstGeom>
-          <a:noFill/>
-          <a:ln/>
-        </p:spPr>
-        <p:txBody>
-          <a:bodyPr wrap="square" lIns="0" tIns="0" rIns="0" bIns="0" rtlCol="0" anchor="ctr"/>
-          <a:lstStyle/>
-          <a:p>
-            <a:pPr indent="0" marL="0">
-              <a:lnSpc>
-                <a:spcPct val="105000"/>
-              </a:lnSpc>
-              <a:buNone/>
-            </a:pPr>
-            <a:r>
-              <a:rPr lang="en-US" sz="1450" b="1" dirty="0">
-                <a:solidFill>
-                  <a:srgbClr val="1C2A24"/>
-                </a:solidFill>
-                <a:latin typeface="Calibri" pitchFamily="34" charset="0"/>
-                <a:ea typeface="Calibri" pitchFamily="34" charset="-122"/>
-                <a:cs typeface="Calibri" pitchFamily="34" charset="-120"/>
-              </a:rPr>
-              <a:t>clé → valeur</a:t>
-            </a:r>
-            <a:endParaRPr lang="en-US" sz="1450" dirty="0"/>
-          </a:p>
-          <a:p>
-            <a:pPr indent="0" marL="0">
-              <a:lnSpc>
-                <a:spcPct val="105000"/>
-              </a:lnSpc>
-              <a:buNone/>
-            </a:pPr>
-            <a:r>
-              <a:rPr lang="en-US" sz="1250" dirty="0">
-                <a:solidFill>
-                  <a:srgbClr val="5C6B63"/>
-                </a:solidFill>
-                <a:latin typeface="Calibri" pitchFamily="34" charset="0"/>
-                <a:ea typeface="Calibri" pitchFamily="34" charset="-122"/>
-                <a:cs typeface="Calibri" pitchFamily="34" charset="-120"/>
-              </a:rPr>
-              <a:t>La fiche contribuable naturelle : c["nif"], c["regime"].</a:t>
-            </a:r>
-            <a:endParaRPr lang="en-US" sz="1450" dirty="0"/>
-          </a:p>
-        </p:txBody>
-      </p:sp>
-      <p:sp>
-        <p:nvSpPr>
-          <p:cNvPr id="7" name="Shape 4"/>
-          <p:cNvSpPr/>
-          <p:nvPr/>
-        </p:nvSpPr>
-        <p:spPr>
-          <a:xfrm>
-            <a:off x="640080" y="2926080"/>
+          <p:cNvPr id="5" name="Shape 2"/>
+          <p:cNvSpPr/>
+          <p:nvPr/>
+        </p:nvSpPr>
+        <p:spPr>
+          <a:xfrm>
+            <a:off x="640080" y="1874520"/>
             <a:ext cx="411480" cy="411480"/>
           </a:xfrm>
           <a:prstGeom prst="ellipse">
             <a:avLst/>
           </a:prstGeom>
           <a:solidFill>
-            <a:srgbClr val="1E7A50"/>
+            <a:srgbClr val="2E9E4F"/>
           </a:solidFill>
           <a:ln/>
         </p:spPr>
       </p:sp>
       <p:pic>
         <p:nvPicPr>
-          <p:cNvPr id="8" name="Image 1" descr="icons/check.png">    </p:cNvPr>
+          <p:cNvPr id="6" name="Image 1" descr="icons/check.png">    </p:cNvPr>
           <p:cNvPicPr>
             <a:picLocks noChangeAspect="1"/>
           </p:cNvPicPr>
@@ -8157,7 +8239,7 @@
         </p:blipFill>
         <p:spPr>
           <a:xfrm>
-            <a:off x="747065" y="3033065"/>
+            <a:off x="747065" y="1981505"/>
             <a:ext cx="197510" cy="197510"/>
           </a:xfrm>
           <a:prstGeom prst="rect">
@@ -8167,13 +8249,13 @@
       </p:pic>
       <p:sp>
         <p:nvSpPr>
-          <p:cNvPr id="9" name="Text 5"/>
-          <p:cNvSpPr/>
-          <p:nvPr/>
-        </p:nvSpPr>
-        <p:spPr>
-          <a:xfrm>
-            <a:off x="1234440" y="2852928"/>
+          <p:cNvPr id="7" name="Text 3"/>
+          <p:cNvSpPr/>
+          <p:nvPr/>
+        </p:nvSpPr>
+        <p:spPr>
+          <a:xfrm>
+            <a:off x="1234440" y="1801368"/>
             <a:ext cx="4800600" cy="960120"/>
           </a:xfrm>
           <a:prstGeom prst="rect">
@@ -8201,7 +8283,7 @@
                 <a:ea typeface="Calibri" pitchFamily="34" charset="-122"/>
                 <a:cs typeface="Calibri" pitchFamily="34" charset="-120"/>
               </a:rPr>
-              <a:t>d[cle] plante si absente</a:t>
+              <a:t>clé → valeur</a:t>
             </a:r>
             <a:endParaRPr lang="en-US" sz="1450" dirty="0"/>
           </a:p>
@@ -8221,7 +8303,7 @@
                 <a:ea typeface="Calibri" pitchFamily="34" charset="-122"/>
                 <a:cs typeface="Calibri" pitchFamily="34" charset="-120"/>
               </a:rPr>
-              <a:t>d.get(cle, defaut) jamais — LE réflexe des comptages.</a:t>
+              <a:t>La fiche contribuable naturelle : c["nif"], c["regime"].</a:t>
             </a:r>
             <a:endParaRPr lang="en-US" sz="1450" dirty="0"/>
           </a:p>
@@ -8229,27 +8311,27 @@
       </p:sp>
       <p:sp>
         <p:nvSpPr>
-          <p:cNvPr id="10" name="Shape 6"/>
-          <p:cNvSpPr/>
-          <p:nvPr/>
-        </p:nvSpPr>
-        <p:spPr>
-          <a:xfrm>
-            <a:off x="640080" y="3977640"/>
+          <p:cNvPr id="8" name="Shape 4"/>
+          <p:cNvSpPr/>
+          <p:nvPr/>
+        </p:nvSpPr>
+        <p:spPr>
+          <a:xfrm>
+            <a:off x="640080" y="2926080"/>
             <a:ext cx="411480" cy="411480"/>
           </a:xfrm>
           <a:prstGeom prst="ellipse">
             <a:avLst/>
           </a:prstGeom>
           <a:solidFill>
-            <a:srgbClr val="1E7A50"/>
+            <a:srgbClr val="2E9E4F"/>
           </a:solidFill>
           <a:ln/>
         </p:spPr>
       </p:sp>
       <p:pic>
         <p:nvPicPr>
-          <p:cNvPr id="11" name="Image 2" descr="icons/check.png">    </p:cNvPr>
+          <p:cNvPr id="9" name="Image 2" descr="icons/check.png">    </p:cNvPr>
           <p:cNvPicPr>
             <a:picLocks noChangeAspect="1"/>
           </p:cNvPicPr>
@@ -8263,7 +8345,7 @@
         </p:blipFill>
         <p:spPr>
           <a:xfrm>
-            <a:off x="747065" y="4084625"/>
+            <a:off x="747065" y="3033065"/>
             <a:ext cx="197510" cy="197510"/>
           </a:xfrm>
           <a:prstGeom prst="rect">
@@ -8273,13 +8355,13 @@
       </p:pic>
       <p:sp>
         <p:nvSpPr>
-          <p:cNvPr id="12" name="Text 7"/>
-          <p:cNvSpPr/>
-          <p:nvPr/>
-        </p:nvSpPr>
-        <p:spPr>
-          <a:xfrm>
-            <a:off x="1234440" y="3904488"/>
+          <p:cNvPr id="10" name="Text 5"/>
+          <p:cNvSpPr/>
+          <p:nvPr/>
+        </p:nvSpPr>
+        <p:spPr>
+          <a:xfrm>
+            <a:off x="1234440" y="2852928"/>
             <a:ext cx="4800600" cy="960120"/>
           </a:xfrm>
           <a:prstGeom prst="rect">
@@ -8307,7 +8389,7 @@
                 <a:ea typeface="Calibri" pitchFamily="34" charset="-122"/>
                 <a:cs typeface="Calibri" pitchFamily="34" charset="-120"/>
               </a:rPr>
-              <a:t>Le motif du comptage</a:t>
+              <a:t>d[cle] plante si absente</a:t>
             </a:r>
             <a:endParaRPr lang="en-US" sz="1450" dirty="0"/>
           </a:p>
@@ -8327,7 +8409,7 @@
                 <a:ea typeface="Calibri" pitchFamily="34" charset="-122"/>
                 <a:cs typeface="Calibri" pitchFamily="34" charset="-120"/>
               </a:rPr>
-              <a:t>compte[k] = compte.get(k, 0) + 1 — à connaître par cœur.</a:t>
+              <a:t>d.get(cle, defaut) jamais — LE réflexe des comptages.</a:t>
             </a:r>
             <a:endParaRPr lang="en-US" sz="1450" dirty="0"/>
           </a:p>
@@ -8335,27 +8417,27 @@
       </p:sp>
       <p:sp>
         <p:nvSpPr>
-          <p:cNvPr id="13" name="Shape 8"/>
-          <p:cNvSpPr/>
-          <p:nvPr/>
-        </p:nvSpPr>
-        <p:spPr>
-          <a:xfrm>
-            <a:off x="640080" y="5029200"/>
+          <p:cNvPr id="11" name="Shape 6"/>
+          <p:cNvSpPr/>
+          <p:nvPr/>
+        </p:nvSpPr>
+        <p:spPr>
+          <a:xfrm>
+            <a:off x="640080" y="3977640"/>
             <a:ext cx="411480" cy="411480"/>
           </a:xfrm>
           <a:prstGeom prst="ellipse">
             <a:avLst/>
           </a:prstGeom>
           <a:solidFill>
-            <a:srgbClr val="1E7A50"/>
+            <a:srgbClr val="2E9E4F"/>
           </a:solidFill>
           <a:ln/>
         </p:spPr>
       </p:sp>
       <p:pic>
         <p:nvPicPr>
-          <p:cNvPr id="14" name="Image 3" descr="icons/check.png">    </p:cNvPr>
+          <p:cNvPr id="12" name="Image 3" descr="icons/check.png">    </p:cNvPr>
           <p:cNvPicPr>
             <a:picLocks noChangeAspect="1"/>
           </p:cNvPicPr>
@@ -8369,7 +8451,7 @@
         </p:blipFill>
         <p:spPr>
           <a:xfrm>
-            <a:off x="747065" y="5136185"/>
+            <a:off x="747065" y="4084625"/>
             <a:ext cx="197510" cy="197510"/>
           </a:xfrm>
           <a:prstGeom prst="rect">
@@ -8379,13 +8461,13 @@
       </p:pic>
       <p:sp>
         <p:nvSpPr>
-          <p:cNvPr id="15" name="Text 9"/>
-          <p:cNvSpPr/>
-          <p:nvPr/>
-        </p:nvSpPr>
-        <p:spPr>
-          <a:xfrm>
-            <a:off x="1234440" y="4956048"/>
+          <p:cNvPr id="13" name="Text 7"/>
+          <p:cNvSpPr/>
+          <p:nvPr/>
+        </p:nvSpPr>
+        <p:spPr>
+          <a:xfrm>
+            <a:off x="1234440" y="3904488"/>
             <a:ext cx="4800600" cy="960120"/>
           </a:xfrm>
           <a:prstGeom prst="rect">
@@ -8413,7 +8495,7 @@
                 <a:ea typeface="Calibri" pitchFamily="34" charset="-122"/>
                 <a:cs typeface="Calibri" pitchFamily="34" charset="-120"/>
               </a:rPr>
-              <a:t>Liste de dictionnaires</a:t>
+              <a:t>Le motif du comptage</a:t>
             </a:r>
             <a:endParaRPr lang="en-US" sz="1450" dirty="0"/>
           </a:p>
@@ -8433,6 +8515,112 @@
                 <a:ea typeface="Calibri" pitchFamily="34" charset="-122"/>
                 <a:cs typeface="Calibri" pitchFamily="34" charset="-120"/>
               </a:rPr>
+              <a:t>compte[k] = compte.get(k, 0) + 1 — à connaître par cœur.</a:t>
+            </a:r>
+            <a:endParaRPr lang="en-US" sz="1450" dirty="0"/>
+          </a:p>
+        </p:txBody>
+      </p:sp>
+      <p:sp>
+        <p:nvSpPr>
+          <p:cNvPr id="14" name="Shape 8"/>
+          <p:cNvSpPr/>
+          <p:nvPr/>
+        </p:nvSpPr>
+        <p:spPr>
+          <a:xfrm>
+            <a:off x="640080" y="5029200"/>
+            <a:ext cx="411480" cy="411480"/>
+          </a:xfrm>
+          <a:prstGeom prst="ellipse">
+            <a:avLst/>
+          </a:prstGeom>
+          <a:solidFill>
+            <a:srgbClr val="2E9E4F"/>
+          </a:solidFill>
+          <a:ln/>
+        </p:spPr>
+      </p:sp>
+      <p:pic>
+        <p:nvPicPr>
+          <p:cNvPr id="15" name="Image 4" descr="icons/check.png">    </p:cNvPr>
+          <p:cNvPicPr>
+            <a:picLocks noChangeAspect="1"/>
+          </p:cNvPicPr>
+          <p:nvPr/>
+        </p:nvPicPr>
+        <p:blipFill>
+          <a:blip r:embed="rId5"/>
+          <a:stretch>
+            <a:fillRect/>
+          </a:stretch>
+        </p:blipFill>
+        <p:spPr>
+          <a:xfrm>
+            <a:off x="747065" y="5136185"/>
+            <a:ext cx="197510" cy="197510"/>
+          </a:xfrm>
+          <a:prstGeom prst="rect">
+            <a:avLst/>
+          </a:prstGeom>
+        </p:spPr>
+      </p:pic>
+      <p:sp>
+        <p:nvSpPr>
+          <p:cNvPr id="16" name="Text 9"/>
+          <p:cNvSpPr/>
+          <p:nvPr/>
+        </p:nvSpPr>
+        <p:spPr>
+          <a:xfrm>
+            <a:off x="1234440" y="4956048"/>
+            <a:ext cx="4800600" cy="960120"/>
+          </a:xfrm>
+          <a:prstGeom prst="rect">
+            <a:avLst/>
+          </a:prstGeom>
+          <a:noFill/>
+          <a:ln/>
+        </p:spPr>
+        <p:txBody>
+          <a:bodyPr wrap="square" lIns="0" tIns="0" rIns="0" bIns="0" rtlCol="0" anchor="ctr"/>
+          <a:lstStyle/>
+          <a:p>
+            <a:pPr indent="0" marL="0">
+              <a:lnSpc>
+                <a:spcPct val="105000"/>
+              </a:lnSpc>
+              <a:buNone/>
+            </a:pPr>
+            <a:r>
+              <a:rPr lang="en-US" sz="1450" b="1" dirty="0">
+                <a:solidFill>
+                  <a:srgbClr val="1C2A24"/>
+                </a:solidFill>
+                <a:latin typeface="Calibri" pitchFamily="34" charset="0"/>
+                <a:ea typeface="Calibri" pitchFamily="34" charset="-122"/>
+                <a:cs typeface="Calibri" pitchFamily="34" charset="-120"/>
+              </a:rPr>
+              <a:t>Liste de dictionnaires</a:t>
+            </a:r>
+            <a:endParaRPr lang="en-US" sz="1450" dirty="0"/>
+          </a:p>
+          <a:p>
+            <a:pPr indent="0" marL="0">
+              <a:lnSpc>
+                <a:spcPct val="105000"/>
+              </a:lnSpc>
+              <a:buNone/>
+            </a:pPr>
+            <a:r>
+              <a:rPr lang="en-US" sz="1250" dirty="0">
+                <a:solidFill>
+                  <a:srgbClr val="5C6B63"/>
+                </a:solidFill>
+                <a:latin typeface="Calibri" pitchFamily="34" charset="0"/>
+                <a:ea typeface="Calibri" pitchFamily="34" charset="-122"/>
+                <a:cs typeface="Calibri" pitchFamily="34" charset="-120"/>
+              </a:rPr>
               <a:t>Un fichier CSV en mémoire, c’est exactement ça.</a:t>
             </a:r>
             <a:endParaRPr lang="en-US" sz="1450" dirty="0"/>
@@ -8441,7 +8629,7 @@
       </p:sp>
       <p:sp>
         <p:nvSpPr>
-          <p:cNvPr id="16" name="Shape 10"/>
+          <p:cNvPr id="17" name="Shape 10"/>
           <p:cNvSpPr/>
           <p:nvPr/>
         </p:nvSpPr>
@@ -8456,14 +8644,14 @@
             </a:avLst>
           </a:prstGeom>
           <a:solidFill>
-            <a:srgbClr val="10241B"/>
+            <a:srgbClr val="0F2418"/>
           </a:solidFill>
           <a:ln/>
         </p:spPr>
       </p:sp>
       <p:sp>
         <p:nvSpPr>
-          <p:cNvPr id="17" name="Shape 11"/>
+          <p:cNvPr id="18" name="Shape 11"/>
           <p:cNvSpPr/>
           <p:nvPr/>
         </p:nvSpPr>
@@ -8483,7 +8671,7 @@
       </p:sp>
       <p:sp>
         <p:nvSpPr>
-          <p:cNvPr id="18" name="Shape 12"/>
+          <p:cNvPr id="19" name="Shape 12"/>
           <p:cNvSpPr/>
           <p:nvPr/>
         </p:nvSpPr>
@@ -8496,14 +8684,14 @@
             <a:avLst/>
           </a:prstGeom>
           <a:solidFill>
-            <a:srgbClr val="C9A227"/>
+            <a:srgbClr val="C79100"/>
           </a:solidFill>
           <a:ln/>
         </p:spPr>
       </p:sp>
       <p:sp>
         <p:nvSpPr>
-          <p:cNvPr id="19" name="Shape 13"/>
+          <p:cNvPr id="20" name="Shape 13"/>
           <p:cNvSpPr/>
           <p:nvPr/>
         </p:nvSpPr>
@@ -8523,7 +8711,7 @@
       </p:sp>
       <p:sp>
         <p:nvSpPr>
-          <p:cNvPr id="20" name="Text 14"/>
+          <p:cNvPr id="21" name="Text 14"/>
           <p:cNvSpPr/>
           <p:nvPr/>
         </p:nvSpPr>
@@ -8562,7 +8750,7 @@
       </p:sp>
       <p:sp>
         <p:nvSpPr>
-          <p:cNvPr id="21" name="Text 15"/>
+          <p:cNvPr id="22" name="Text 15"/>
           <p:cNvSpPr/>
           <p:nvPr/>
         </p:nvSpPr>
@@ -8735,7 +8923,7 @@
                 <a:ea typeface="Courier New" pitchFamily="34" charset="-122"/>
                 <a:cs typeface="Courier New" pitchFamily="34" charset="-120"/>
               </a:rPr>
-              <a:t>"Conakry"</a:t>
+              <a:t>"Bissau"</a:t>
             </a:r>
             <a:pPr indent="0" marL="0">
               <a:lnSpc>
@@ -9048,7 +9236,7 @@
                 <a:ea typeface="Courier New" pitchFamily="34" charset="-122"/>
                 <a:cs typeface="Courier New" pitchFamily="34" charset="-120"/>
               </a:rPr>
-              <a:t>{'Conakry': 2, 'Kindia': 2, 'Labé': 1}</a:t>
+              <a:t>{'Bissau': 2, 'Bafatá': 2, 'Gabú': 1}</a:t>
             </a:r>
             <a:endParaRPr lang="en-US" sz="1250" dirty="0"/>
           </a:p>
@@ -9095,7 +9283,7 @@
         <p:spPr>
           <a:xfrm>
             <a:off x="548640" y="384048"/>
-            <a:ext cx="10972800" cy="320040"/>
+            <a:ext cx="9601200" cy="320040"/>
           </a:xfrm>
           <a:prstGeom prst="rect">
             <a:avLst/>
@@ -9113,7 +9301,7 @@
             <a:r>
               <a:rPr lang="en-US" sz="1300" b="1" spc="200" kern="0" dirty="0">
                 <a:solidFill>
-                  <a:srgbClr val="C9A227"/>
+                  <a:srgbClr val="C79100"/>
                 </a:solidFill>
                 <a:latin typeface="Calibri" pitchFamily="34" charset="0"/>
                 <a:ea typeface="Calibri" pitchFamily="34" charset="-122"/>
@@ -9134,7 +9322,7 @@
         <p:spPr>
           <a:xfrm>
             <a:off x="548640" y="658368"/>
-            <a:ext cx="11064240" cy="731520"/>
+            <a:ext cx="9966960" cy="731520"/>
           </a:xfrm>
           <a:prstGeom prst="rect">
             <a:avLst/>
@@ -9152,7 +9340,7 @@
             <a:r>
               <a:rPr lang="en-US" sz="3400" b="1" dirty="0">
                 <a:solidFill>
-                  <a:srgbClr val="14563C"/>
+                  <a:srgbClr val="0E7A3D"/>
                 </a:solidFill>
                 <a:latin typeface="Cambria" pitchFamily="34" charset="0"/>
                 <a:ea typeface="Cambria" pitchFamily="34" charset="-122"/>
@@ -9164,29 +9352,9 @@
           </a:p>
         </p:txBody>
       </p:sp>
-      <p:sp>
-        <p:nvSpPr>
-          <p:cNvPr id="4" name="Shape 2"/>
-          <p:cNvSpPr/>
-          <p:nvPr/>
-        </p:nvSpPr>
-        <p:spPr>
-          <a:xfrm>
-            <a:off x="640080" y="1874520"/>
-            <a:ext cx="411480" cy="411480"/>
-          </a:xfrm>
-          <a:prstGeom prst="ellipse">
-            <a:avLst/>
-          </a:prstGeom>
-          <a:solidFill>
-            <a:srgbClr val="1E7A50"/>
-          </a:solidFill>
-          <a:ln/>
-        </p:spPr>
-      </p:sp>
       <p:pic>
         <p:nvPicPr>
-          <p:cNvPr id="5" name="Image 0" descr="icons/check.png">    </p:cNvPr>
+          <p:cNvPr id="4" name="Image 0" descr="logo-dgi.png">    </p:cNvPr>
           <p:cNvPicPr>
             <a:picLocks noChangeAspect="1"/>
           </p:cNvPicPr>
@@ -9200,8 +9368,8 @@
         </p:blipFill>
         <p:spPr>
           <a:xfrm>
-            <a:off x="747065" y="1981505"/>
-            <a:ext cx="197510" cy="197510"/>
+            <a:off x="10744200" y="384048"/>
+            <a:ext cx="1051560" cy="795528"/>
           </a:xfrm>
           <a:prstGeom prst="rect">
             <a:avLst/>
@@ -9210,89 +9378,27 @@
       </p:pic>
       <p:sp>
         <p:nvSpPr>
-          <p:cNvPr id="6" name="Text 3"/>
-          <p:cNvSpPr/>
-          <p:nvPr/>
-        </p:nvSpPr>
-        <p:spPr>
-          <a:xfrm>
-            <a:off x="1234440" y="1801368"/>
-            <a:ext cx="4800600" cy="960120"/>
-          </a:xfrm>
-          <a:prstGeom prst="rect">
-            <a:avLst/>
-          </a:prstGeom>
-          <a:noFill/>
-          <a:ln/>
-        </p:spPr>
-        <p:txBody>
-          <a:bodyPr wrap="square" lIns="0" tIns="0" rIns="0" bIns="0" rtlCol="0" anchor="ctr"/>
-          <a:lstStyle/>
-          <a:p>
-            <a:pPr indent="0" marL="0">
-              <a:lnSpc>
-                <a:spcPct val="105000"/>
-              </a:lnSpc>
-              <a:buNone/>
-            </a:pPr>
-            <a:r>
-              <a:rPr lang="en-US" sz="1450" b="1" dirty="0">
-                <a:solidFill>
-                  <a:srgbClr val="1C2A24"/>
-                </a:solidFill>
-                <a:latin typeface="Calibri" pitchFamily="34" charset="0"/>
-                <a:ea typeface="Calibri" pitchFamily="34" charset="-122"/>
-                <a:cs typeface="Calibri" pitchFamily="34" charset="-120"/>
-              </a:rPr>
-              <a:t>Unicité garantie</a:t>
-            </a:r>
-            <a:endParaRPr lang="en-US" sz="1450" dirty="0"/>
-          </a:p>
-          <a:p>
-            <a:pPr indent="0" marL="0">
-              <a:lnSpc>
-                <a:spcPct val="105000"/>
-              </a:lnSpc>
-              <a:buNone/>
-            </a:pPr>
-            <a:r>
-              <a:rPr lang="en-US" sz="1250" dirty="0">
-                <a:solidFill>
-                  <a:srgbClr val="5C6B63"/>
-                </a:solidFill>
-                <a:latin typeface="Calibri" pitchFamily="34" charset="0"/>
-                <a:ea typeface="Calibri" pitchFamily="34" charset="-122"/>
-                <a:cs typeface="Calibri" pitchFamily="34" charset="-120"/>
-              </a:rPr>
-              <a:t>Un set ne garde qu’un exemplaire — et "in" y est instantané.</a:t>
-            </a:r>
-            <a:endParaRPr lang="en-US" sz="1450" dirty="0"/>
-          </a:p>
-        </p:txBody>
-      </p:sp>
-      <p:sp>
-        <p:nvSpPr>
-          <p:cNvPr id="7" name="Shape 4"/>
-          <p:cNvSpPr/>
-          <p:nvPr/>
-        </p:nvSpPr>
-        <p:spPr>
-          <a:xfrm>
-            <a:off x="640080" y="2926080"/>
+          <p:cNvPr id="5" name="Shape 2"/>
+          <p:cNvSpPr/>
+          <p:nvPr/>
+        </p:nvSpPr>
+        <p:spPr>
+          <a:xfrm>
+            <a:off x="640080" y="1874520"/>
             <a:ext cx="411480" cy="411480"/>
           </a:xfrm>
           <a:prstGeom prst="ellipse">
             <a:avLst/>
           </a:prstGeom>
           <a:solidFill>
-            <a:srgbClr val="1E7A50"/>
+            <a:srgbClr val="2E9E4F"/>
           </a:solidFill>
           <a:ln/>
         </p:spPr>
       </p:sp>
       <p:pic>
         <p:nvPicPr>
-          <p:cNvPr id="8" name="Image 1" descr="icons/check.png">    </p:cNvPr>
+          <p:cNvPr id="6" name="Image 1" descr="icons/check.png">    </p:cNvPr>
           <p:cNvPicPr>
             <a:picLocks noChangeAspect="1"/>
           </p:cNvPicPr>
@@ -9306,7 +9412,7 @@
         </p:blipFill>
         <p:spPr>
           <a:xfrm>
-            <a:off x="747065" y="3033065"/>
+            <a:off x="747065" y="1981505"/>
             <a:ext cx="197510" cy="197510"/>
           </a:xfrm>
           <a:prstGeom prst="rect">
@@ -9316,13 +9422,13 @@
       </p:pic>
       <p:sp>
         <p:nvSpPr>
-          <p:cNvPr id="9" name="Text 5"/>
-          <p:cNvSpPr/>
-          <p:nvPr/>
-        </p:nvSpPr>
-        <p:spPr>
-          <a:xfrm>
-            <a:off x="1234440" y="2852928"/>
+          <p:cNvPr id="7" name="Text 3"/>
+          <p:cNvSpPr/>
+          <p:nvPr/>
+        </p:nvSpPr>
+        <p:spPr>
+          <a:xfrm>
+            <a:off x="1234440" y="1801368"/>
             <a:ext cx="4800600" cy="960120"/>
           </a:xfrm>
           <a:prstGeom prst="rect">
@@ -9350,7 +9456,7 @@
                 <a:ea typeface="Calibri" pitchFamily="34" charset="-122"/>
                 <a:cs typeface="Calibri" pitchFamily="34" charset="-120"/>
               </a:rPr>
-              <a:t>Le dédoublonnage type</a:t>
+              <a:t>Unicité garantie</a:t>
             </a:r>
             <a:endParaRPr lang="en-US" sz="1450" dirty="0"/>
           </a:p>
@@ -9370,7 +9476,7 @@
                 <a:ea typeface="Calibri" pitchFamily="34" charset="-122"/>
                 <a:cs typeface="Calibri" pitchFamily="34" charset="-120"/>
               </a:rPr>
-              <a:t>Un set des NIF déjà vus + une liste des fiches gardées.</a:t>
+              <a:t>Un set ne garde qu’un exemplaire — et "in" y est instantané.</a:t>
             </a:r>
             <a:endParaRPr lang="en-US" sz="1450" dirty="0"/>
           </a:p>
@@ -9378,27 +9484,27 @@
       </p:sp>
       <p:sp>
         <p:nvSpPr>
-          <p:cNvPr id="10" name="Shape 6"/>
-          <p:cNvSpPr/>
-          <p:nvPr/>
-        </p:nvSpPr>
-        <p:spPr>
-          <a:xfrm>
-            <a:off x="640080" y="3977640"/>
+          <p:cNvPr id="8" name="Shape 4"/>
+          <p:cNvSpPr/>
+          <p:nvPr/>
+        </p:nvSpPr>
+        <p:spPr>
+          <a:xfrm>
+            <a:off x="640080" y="2926080"/>
             <a:ext cx="411480" cy="411480"/>
           </a:xfrm>
           <a:prstGeom prst="ellipse">
             <a:avLst/>
           </a:prstGeom>
           <a:solidFill>
-            <a:srgbClr val="1E7A50"/>
+            <a:srgbClr val="2E9E4F"/>
           </a:solidFill>
           <a:ln/>
         </p:spPr>
       </p:sp>
       <p:pic>
         <p:nvPicPr>
-          <p:cNvPr id="11" name="Image 2" descr="icons/check.png">    </p:cNvPr>
+          <p:cNvPr id="9" name="Image 2" descr="icons/check.png">    </p:cNvPr>
           <p:cNvPicPr>
             <a:picLocks noChangeAspect="1"/>
           </p:cNvPicPr>
@@ -9412,7 +9518,7 @@
         </p:blipFill>
         <p:spPr>
           <a:xfrm>
-            <a:off x="747065" y="4084625"/>
+            <a:off x="747065" y="3033065"/>
             <a:ext cx="197510" cy="197510"/>
           </a:xfrm>
           <a:prstGeom prst="rect">
@@ -9422,13 +9528,13 @@
       </p:pic>
       <p:sp>
         <p:nvSpPr>
-          <p:cNvPr id="12" name="Text 7"/>
-          <p:cNvSpPr/>
-          <p:nvPr/>
-        </p:nvSpPr>
-        <p:spPr>
-          <a:xfrm>
-            <a:off x="1234440" y="3904488"/>
+          <p:cNvPr id="10" name="Text 5"/>
+          <p:cNvSpPr/>
+          <p:nvPr/>
+        </p:nvSpPr>
+        <p:spPr>
+          <a:xfrm>
+            <a:off x="1234440" y="2852928"/>
             <a:ext cx="4800600" cy="960120"/>
           </a:xfrm>
           <a:prstGeom prst="rect">
@@ -9456,7 +9562,7 @@
                 <a:ea typeface="Calibri" pitchFamily="34" charset="-122"/>
                 <a:cs typeface="Calibri" pitchFamily="34" charset="-120"/>
               </a:rPr>
-              <a:t>L’algèbre des ensembles</a:t>
+              <a:t>Le dédoublonnage type</a:t>
             </a:r>
             <a:endParaRPr lang="en-US" sz="1450" dirty="0"/>
           </a:p>
@@ -9476,7 +9582,7 @@
                 <a:ea typeface="Calibri" pitchFamily="34" charset="-122"/>
                 <a:cs typeface="Calibri" pitchFamily="34" charset="-120"/>
               </a:rPr>
-              <a:t>a - b : déclarants inconnus de l’annuaire. a &amp; b : communs.</a:t>
+              <a:t>Un set des NIF déjà vus + une liste des fiches gardées.</a:t>
             </a:r>
             <a:endParaRPr lang="en-US" sz="1450" dirty="0"/>
           </a:p>
@@ -9484,27 +9590,27 @@
       </p:sp>
       <p:sp>
         <p:nvSpPr>
-          <p:cNvPr id="13" name="Shape 8"/>
-          <p:cNvSpPr/>
-          <p:nvPr/>
-        </p:nvSpPr>
-        <p:spPr>
-          <a:xfrm>
-            <a:off x="640080" y="5029200"/>
+          <p:cNvPr id="11" name="Shape 6"/>
+          <p:cNvSpPr/>
+          <p:nvPr/>
+        </p:nvSpPr>
+        <p:spPr>
+          <a:xfrm>
+            <a:off x="640080" y="3977640"/>
             <a:ext cx="411480" cy="411480"/>
           </a:xfrm>
           <a:prstGeom prst="ellipse">
             <a:avLst/>
           </a:prstGeom>
           <a:solidFill>
-            <a:srgbClr val="1E7A50"/>
+            <a:srgbClr val="2E9E4F"/>
           </a:solidFill>
           <a:ln/>
         </p:spPr>
       </p:sp>
       <p:pic>
         <p:nvPicPr>
-          <p:cNvPr id="14" name="Image 3" descr="icons/check.png">    </p:cNvPr>
+          <p:cNvPr id="12" name="Image 3" descr="icons/check.png">    </p:cNvPr>
           <p:cNvPicPr>
             <a:picLocks noChangeAspect="1"/>
           </p:cNvPicPr>
@@ -9518,7 +9624,7 @@
         </p:blipFill>
         <p:spPr>
           <a:xfrm>
-            <a:off x="747065" y="5136185"/>
+            <a:off x="747065" y="4084625"/>
             <a:ext cx="197510" cy="197510"/>
           </a:xfrm>
           <a:prstGeom prst="rect">
@@ -9528,13 +9634,13 @@
       </p:pic>
       <p:sp>
         <p:nvSpPr>
-          <p:cNvPr id="15" name="Text 9"/>
-          <p:cNvSpPr/>
-          <p:nvPr/>
-        </p:nvSpPr>
-        <p:spPr>
-          <a:xfrm>
-            <a:off x="1234440" y="4956048"/>
+          <p:cNvPr id="13" name="Text 7"/>
+          <p:cNvSpPr/>
+          <p:nvPr/>
+        </p:nvSpPr>
+        <p:spPr>
+          <a:xfrm>
+            <a:off x="1234440" y="3904488"/>
             <a:ext cx="4800600" cy="960120"/>
           </a:xfrm>
           <a:prstGeom prst="rect">
@@ -9562,7 +9668,7 @@
                 <a:ea typeface="Calibri" pitchFamily="34" charset="-122"/>
                 <a:cs typeface="Calibri" pitchFamily="34" charset="-120"/>
               </a:rPr>
-              <a:t>Cas réel du dépôt</a:t>
+              <a:t>L’algèbre des ensembles</a:t>
             </a:r>
             <a:endParaRPr lang="en-US" sz="1450" dirty="0"/>
           </a:p>
@@ -9582,6 +9688,112 @@
                 <a:ea typeface="Calibri" pitchFamily="34" charset="-122"/>
                 <a:cs typeface="Calibri" pitchFamily="34" charset="-120"/>
               </a:rPr>
+              <a:t>a - b : déclarants inconnus de l’annuaire. a &amp; b : communs.</a:t>
+            </a:r>
+            <a:endParaRPr lang="en-US" sz="1450" dirty="0"/>
+          </a:p>
+        </p:txBody>
+      </p:sp>
+      <p:sp>
+        <p:nvSpPr>
+          <p:cNvPr id="14" name="Shape 8"/>
+          <p:cNvSpPr/>
+          <p:nvPr/>
+        </p:nvSpPr>
+        <p:spPr>
+          <a:xfrm>
+            <a:off x="640080" y="5029200"/>
+            <a:ext cx="411480" cy="411480"/>
+          </a:xfrm>
+          <a:prstGeom prst="ellipse">
+            <a:avLst/>
+          </a:prstGeom>
+          <a:solidFill>
+            <a:srgbClr val="2E9E4F"/>
+          </a:solidFill>
+          <a:ln/>
+        </p:spPr>
+      </p:sp>
+      <p:pic>
+        <p:nvPicPr>
+          <p:cNvPr id="15" name="Image 4" descr="icons/check.png">    </p:cNvPr>
+          <p:cNvPicPr>
+            <a:picLocks noChangeAspect="1"/>
+          </p:cNvPicPr>
+          <p:nvPr/>
+        </p:nvPicPr>
+        <p:blipFill>
+          <a:blip r:embed="rId5"/>
+          <a:stretch>
+            <a:fillRect/>
+          </a:stretch>
+        </p:blipFill>
+        <p:spPr>
+          <a:xfrm>
+            <a:off x="747065" y="5136185"/>
+            <a:ext cx="197510" cy="197510"/>
+          </a:xfrm>
+          <a:prstGeom prst="rect">
+            <a:avLst/>
+          </a:prstGeom>
+        </p:spPr>
+      </p:pic>
+      <p:sp>
+        <p:nvSpPr>
+          <p:cNvPr id="16" name="Text 9"/>
+          <p:cNvSpPr/>
+          <p:nvPr/>
+        </p:nvSpPr>
+        <p:spPr>
+          <a:xfrm>
+            <a:off x="1234440" y="4956048"/>
+            <a:ext cx="4800600" cy="960120"/>
+          </a:xfrm>
+          <a:prstGeom prst="rect">
+            <a:avLst/>
+          </a:prstGeom>
+          <a:noFill/>
+          <a:ln/>
+        </p:spPr>
+        <p:txBody>
+          <a:bodyPr wrap="square" lIns="0" tIns="0" rIns="0" bIns="0" rtlCol="0" anchor="ctr"/>
+          <a:lstStyle/>
+          <a:p>
+            <a:pPr indent="0" marL="0">
+              <a:lnSpc>
+                <a:spcPct val="105000"/>
+              </a:lnSpc>
+              <a:buNone/>
+            </a:pPr>
+            <a:r>
+              <a:rPr lang="en-US" sz="1450" b="1" dirty="0">
+                <a:solidFill>
+                  <a:srgbClr val="1C2A24"/>
+                </a:solidFill>
+                <a:latin typeface="Calibri" pitchFamily="34" charset="0"/>
+                <a:ea typeface="Calibri" pitchFamily="34" charset="-122"/>
+                <a:cs typeface="Calibri" pitchFamily="34" charset="-120"/>
+              </a:rPr>
+              <a:t>Cas réel du dépôt</a:t>
+            </a:r>
+            <a:endParaRPr lang="en-US" sz="1450" dirty="0"/>
+          </a:p>
+          <a:p>
+            <a:pPr indent="0" marL="0">
+              <a:lnSpc>
+                <a:spcPct val="105000"/>
+              </a:lnSpc>
+              <a:buNone/>
+            </a:pPr>
+            <a:r>
+              <a:rPr lang="en-US" sz="1250" dirty="0">
+                <a:solidFill>
+                  <a:srgbClr val="5C6B63"/>
+                </a:solidFill>
+                <a:latin typeface="Calibri" pitchFamily="34" charset="0"/>
+                <a:ea typeface="Calibri" pitchFamily="34" charset="-122"/>
+                <a:cs typeface="Calibri" pitchFamily="34" charset="-120"/>
+              </a:rPr>
               <a:t>paiements.csv contient des NIF orphelins — on les trouvera ainsi.</a:t>
             </a:r>
             <a:endParaRPr lang="en-US" sz="1450" dirty="0"/>
@@ -9590,7 +9802,7 @@
       </p:sp>
       <p:sp>
         <p:nvSpPr>
-          <p:cNvPr id="16" name="Shape 10"/>
+          <p:cNvPr id="17" name="Shape 10"/>
           <p:cNvSpPr/>
           <p:nvPr/>
         </p:nvSpPr>
@@ -9605,14 +9817,14 @@
             </a:avLst>
           </a:prstGeom>
           <a:solidFill>
-            <a:srgbClr val="10241B"/>
+            <a:srgbClr val="0F2418"/>
           </a:solidFill>
           <a:ln/>
         </p:spPr>
       </p:sp>
       <p:sp>
         <p:nvSpPr>
-          <p:cNvPr id="17" name="Shape 11"/>
+          <p:cNvPr id="18" name="Shape 11"/>
           <p:cNvSpPr/>
           <p:nvPr/>
         </p:nvSpPr>
@@ -9632,7 +9844,7 @@
       </p:sp>
       <p:sp>
         <p:nvSpPr>
-          <p:cNvPr id="18" name="Shape 12"/>
+          <p:cNvPr id="19" name="Shape 12"/>
           <p:cNvSpPr/>
           <p:nvPr/>
         </p:nvSpPr>
@@ -9645,14 +9857,14 @@
             <a:avLst/>
           </a:prstGeom>
           <a:solidFill>
-            <a:srgbClr val="C9A227"/>
+            <a:srgbClr val="C79100"/>
           </a:solidFill>
           <a:ln/>
         </p:spPr>
       </p:sp>
       <p:sp>
         <p:nvSpPr>
-          <p:cNvPr id="19" name="Shape 13"/>
+          <p:cNvPr id="20" name="Shape 13"/>
           <p:cNvSpPr/>
           <p:nvPr/>
         </p:nvSpPr>
@@ -9672,7 +9884,7 @@
       </p:sp>
       <p:sp>
         <p:nvSpPr>
-          <p:cNvPr id="20" name="Text 14"/>
+          <p:cNvPr id="21" name="Text 14"/>
           <p:cNvSpPr/>
           <p:nvPr/>
         </p:nvSpPr>
@@ -9711,7 +9923,7 @@
       </p:sp>
       <p:sp>
         <p:nvSpPr>
-          <p:cNvPr id="21" name="Text 15"/>
+          <p:cNvPr id="22" name="Text 15"/>
           <p:cNvSpPr/>
           <p:nvPr/>
         </p:nvSpPr>
@@ -10383,7 +10595,7 @@
         <p:spPr>
           <a:xfrm>
             <a:off x="548640" y="384048"/>
-            <a:ext cx="10972800" cy="320040"/>
+            <a:ext cx="9601200" cy="320040"/>
           </a:xfrm>
           <a:prstGeom prst="rect">
             <a:avLst/>
@@ -10401,7 +10613,7 @@
             <a:r>
               <a:rPr lang="en-US" sz="1300" b="1" spc="200" kern="0" dirty="0">
                 <a:solidFill>
-                  <a:srgbClr val="C9A227"/>
+                  <a:srgbClr val="C79100"/>
                 </a:solidFill>
                 <a:latin typeface="Calibri" pitchFamily="34" charset="0"/>
                 <a:ea typeface="Calibri" pitchFamily="34" charset="-122"/>
@@ -10422,7 +10634,7 @@
         <p:spPr>
           <a:xfrm>
             <a:off x="548640" y="658368"/>
-            <a:ext cx="11064240" cy="731520"/>
+            <a:ext cx="9966960" cy="731520"/>
           </a:xfrm>
           <a:prstGeom prst="rect">
             <a:avLst/>
@@ -10440,7 +10652,7 @@
             <a:r>
               <a:rPr lang="en-US" sz="3400" b="1" dirty="0">
                 <a:solidFill>
-                  <a:srgbClr val="14563C"/>
+                  <a:srgbClr val="0E7A3D"/>
                 </a:solidFill>
                 <a:latin typeface="Cambria" pitchFamily="34" charset="0"/>
                 <a:ea typeface="Cambria" pitchFamily="34" charset="-122"/>
@@ -10452,6 +10664,30 @@
           </a:p>
         </p:txBody>
       </p:sp>
+      <p:pic>
+        <p:nvPicPr>
+          <p:cNvPr id="4" name="Image 0" descr="logo-dgi.png">    </p:cNvPr>
+          <p:cNvPicPr>
+            <a:picLocks noChangeAspect="1"/>
+          </p:cNvPicPr>
+          <p:nvPr/>
+        </p:nvPicPr>
+        <p:blipFill>
+          <a:blip r:embed="rId1"/>
+          <a:stretch>
+            <a:fillRect/>
+          </a:stretch>
+        </p:blipFill>
+        <p:spPr>
+          <a:xfrm>
+            <a:off x="10744200" y="384048"/>
+            <a:ext cx="1051560" cy="795528"/>
+          </a:xfrm>
+          <a:prstGeom prst="rect">
+            <a:avLst/>
+          </a:prstGeom>
+        </p:spPr>
+      </p:pic>
       <p:graphicFrame>
         <p:nvGraphicFramePr>
           <p:cNvPr id="9" name="Table 0"/>
@@ -10544,7 +10780,7 @@
                       <a:tailEnd type="none" w="med" len="med"/>
                     </a:lnB>
                     <a:solidFill>
-                      <a:srgbClr val="14563C"/>
+                      <a:srgbClr val="0E7A3D"/>
                     </a:solidFill>
                   </a:tcPr>
                 </a:tc>
@@ -10612,7 +10848,7 @@
                       <a:tailEnd type="none" w="med" len="med"/>
                     </a:lnB>
                     <a:solidFill>
-                      <a:srgbClr val="14563C"/>
+                      <a:srgbClr val="0E7A3D"/>
                     </a:solidFill>
                   </a:tcPr>
                 </a:tc>
@@ -10680,7 +10916,7 @@
                       <a:tailEnd type="none" w="med" len="med"/>
                     </a:lnB>
                     <a:solidFill>
-                      <a:srgbClr val="14563C"/>
+                      <a:srgbClr val="0E7A3D"/>
                     </a:solidFill>
                   </a:tcPr>
                 </a:tc>
@@ -10956,7 +11192,7 @@
                       <a:tailEnd type="none" w="med" len="med"/>
                     </a:lnB>
                     <a:solidFill>
-                      <a:srgbClr val="EEF4F0"/>
+                      <a:srgbClr val="EEF5EF"/>
                     </a:solidFill>
                   </a:tcPr>
                 </a:tc>
@@ -11024,7 +11260,7 @@
                       <a:tailEnd type="none" w="med" len="med"/>
                     </a:lnB>
                     <a:solidFill>
-                      <a:srgbClr val="EEF4F0"/>
+                      <a:srgbClr val="EEF5EF"/>
                     </a:solidFill>
                   </a:tcPr>
                 </a:tc>
@@ -11092,7 +11328,7 @@
                       <a:tailEnd type="none" w="med" len="med"/>
                     </a:lnB>
                     <a:solidFill>
-                      <a:srgbClr val="EEF4F0"/>
+                      <a:srgbClr val="EEF5EF"/>
                     </a:solidFill>
                   </a:tcPr>
                 </a:tc>
@@ -11368,7 +11604,7 @@
                       <a:tailEnd type="none" w="med" len="med"/>
                     </a:lnB>
                     <a:solidFill>
-                      <a:srgbClr val="EEF4F0"/>
+                      <a:srgbClr val="EEF5EF"/>
                     </a:solidFill>
                   </a:tcPr>
                 </a:tc>
@@ -11436,7 +11672,7 @@
                       <a:tailEnd type="none" w="med" len="med"/>
                     </a:lnB>
                     <a:solidFill>
-                      <a:srgbClr val="EEF4F0"/>
+                      <a:srgbClr val="EEF5EF"/>
                     </a:solidFill>
                   </a:tcPr>
                 </a:tc>
@@ -11504,7 +11740,7 @@
                       <a:tailEnd type="none" w="med" len="med"/>
                     </a:lnB>
                     <a:solidFill>
-                      <a:srgbClr val="EEF4F0"/>
+                      <a:srgbClr val="EEF5EF"/>
                     </a:solidFill>
                   </a:tcPr>
                 </a:tc>
@@ -11780,7 +12016,7 @@
                       <a:tailEnd type="none" w="med" len="med"/>
                     </a:lnB>
                     <a:solidFill>
-                      <a:srgbClr val="EEF4F0"/>
+                      <a:srgbClr val="EEF5EF"/>
                     </a:solidFill>
                   </a:tcPr>
                 </a:tc>
@@ -11848,7 +12084,7 @@
                       <a:tailEnd type="none" w="med" len="med"/>
                     </a:lnB>
                     <a:solidFill>
-                      <a:srgbClr val="EEF4F0"/>
+                      <a:srgbClr val="EEF5EF"/>
                     </a:solidFill>
                   </a:tcPr>
                 </a:tc>
@@ -11916,7 +12152,7 @@
                       <a:tailEnd type="none" w="med" len="med"/>
                     </a:lnB>
                     <a:solidFill>
-                      <a:srgbClr val="EEF4F0"/>
+                      <a:srgbClr val="EEF5EF"/>
                     </a:solidFill>
                   </a:tcPr>
                 </a:tc>
@@ -11927,7 +12163,7 @@
       </p:graphicFrame>
       <p:sp>
         <p:nvSpPr>
-          <p:cNvPr id="5" name="Text 2"/>
+          <p:cNvPr id="6" name="Text 2"/>
           <p:cNvSpPr/>
           <p:nvPr/>
         </p:nvSpPr>
@@ -11952,7 +12188,7 @@
             <a:r>
               <a:rPr lang="en-US" sz="1350" i="1" dirty="0">
                 <a:solidFill>
-                  <a:srgbClr val="14563C"/>
+                  <a:srgbClr val="0E7A3D"/>
                 </a:solidFill>
                 <a:latin typeface="Calibri" pitchFamily="34" charset="0"/>
                 <a:ea typeface="Calibri" pitchFamily="34" charset="-122"/>
@@ -12005,7 +12241,7 @@
         <p:spPr>
           <a:xfrm>
             <a:off x="548640" y="384048"/>
-            <a:ext cx="10972800" cy="320040"/>
+            <a:ext cx="9601200" cy="320040"/>
           </a:xfrm>
           <a:prstGeom prst="rect">
             <a:avLst/>
@@ -12023,7 +12259,7 @@
             <a:r>
               <a:rPr lang="en-US" sz="1300" b="1" spc="200" kern="0" dirty="0">
                 <a:solidFill>
-                  <a:srgbClr val="C9A227"/>
+                  <a:srgbClr val="C79100"/>
                 </a:solidFill>
                 <a:latin typeface="Calibri" pitchFamily="34" charset="0"/>
                 <a:ea typeface="Calibri" pitchFamily="34" charset="-122"/>
@@ -12044,7 +12280,7 @@
         <p:spPr>
           <a:xfrm>
             <a:off x="548640" y="658368"/>
-            <a:ext cx="11064240" cy="731520"/>
+            <a:ext cx="9966960" cy="731520"/>
           </a:xfrm>
           <a:prstGeom prst="rect">
             <a:avLst/>
@@ -12062,7 +12298,7 @@
             <a:r>
               <a:rPr lang="en-US" sz="3400" b="1" dirty="0">
                 <a:solidFill>
-                  <a:srgbClr val="14563C"/>
+                  <a:srgbClr val="0E7A3D"/>
                 </a:solidFill>
                 <a:latin typeface="Cambria" pitchFamily="34" charset="0"/>
                 <a:ea typeface="Cambria" pitchFamily="34" charset="-122"/>
@@ -12074,499 +12310,9 @@
           </a:p>
         </p:txBody>
       </p:sp>
-      <p:sp>
-        <p:nvSpPr>
-          <p:cNvPr id="4" name="Shape 2"/>
-          <p:cNvSpPr/>
-          <p:nvPr/>
-        </p:nvSpPr>
-        <p:spPr>
-          <a:xfrm>
-            <a:off x="640080" y="1783080"/>
-            <a:ext cx="457200" cy="457200"/>
-          </a:xfrm>
-          <a:prstGeom prst="ellipse">
-            <a:avLst/>
-          </a:prstGeom>
-          <a:solidFill>
-            <a:srgbClr val="14563C"/>
-          </a:solidFill>
-          <a:ln/>
-        </p:spPr>
-      </p:sp>
-      <p:sp>
-        <p:nvSpPr>
-          <p:cNvPr id="5" name="Text 3"/>
-          <p:cNvSpPr/>
-          <p:nvPr/>
-        </p:nvSpPr>
-        <p:spPr>
-          <a:xfrm>
-            <a:off x="640080" y="1783080"/>
-            <a:ext cx="457200" cy="457200"/>
-          </a:xfrm>
-          <a:prstGeom prst="rect">
-            <a:avLst/>
-          </a:prstGeom>
-          <a:noFill/>
-          <a:ln/>
-        </p:spPr>
-        <p:txBody>
-          <a:bodyPr wrap="square" lIns="0" tIns="0" rIns="0" bIns="0" rtlCol="0" anchor="ctr"/>
-          <a:lstStyle/>
-          <a:p>
-            <a:pPr algn="ctr" indent="0" marL="0">
-              <a:buNone/>
-            </a:pPr>
-            <a:r>
-              <a:rPr lang="en-US" sz="1400" b="1" dirty="0">
-                <a:solidFill>
-                  <a:srgbClr val="FFFFFF"/>
-                </a:solidFill>
-                <a:latin typeface="Calibri" pitchFamily="34" charset="0"/>
-                <a:ea typeface="Calibri" pitchFamily="34" charset="-122"/>
-                <a:cs typeface="Calibri" pitchFamily="34" charset="-120"/>
-              </a:rPr>
-              <a:t>1</a:t>
-            </a:r>
-            <a:endParaRPr lang="en-US" sz="1400" dirty="0"/>
-          </a:p>
-        </p:txBody>
-      </p:sp>
-      <p:sp>
-        <p:nvSpPr>
-          <p:cNvPr id="6" name="Text 4"/>
-          <p:cNvSpPr/>
-          <p:nvPr/>
-        </p:nvSpPr>
-        <p:spPr>
-          <a:xfrm>
-            <a:off x="1234440" y="1764792"/>
-            <a:ext cx="6309360" cy="548640"/>
-          </a:xfrm>
-          <a:prstGeom prst="rect">
-            <a:avLst/>
-          </a:prstGeom>
-          <a:noFill/>
-          <a:ln/>
-        </p:spPr>
-        <p:txBody>
-          <a:bodyPr wrap="square" lIns="0" tIns="0" rIns="0" bIns="0" rtlCol="0" anchor="ctr"/>
-          <a:lstStyle/>
-          <a:p>
-            <a:pPr indent="0" marL="0">
-              <a:buNone/>
-            </a:pPr>
-            <a:r>
-              <a:rPr lang="en-US" sz="1400" b="1" dirty="0">
-                <a:solidFill>
-                  <a:srgbClr val="1C2A24"/>
-                </a:solidFill>
-                <a:latin typeface="Calibri" pitchFamily="34" charset="0"/>
-                <a:ea typeface="Calibri" pitchFamily="34" charset="-122"/>
-                <a:cs typeface="Calibri" pitchFamily="34" charset="-120"/>
-              </a:rPr>
-              <a:t>tp_penalites.py</a:t>
-            </a:r>
-            <a:pPr indent="0" marL="0">
-              <a:buNone/>
-            </a:pPr>
-            <a:r>
-              <a:rPr lang="en-US" sz="1400" dirty="0">
-                <a:solidFill>
-                  <a:srgbClr val="5C6B63"/>
-                </a:solidFill>
-                <a:latin typeface="Calibri" pitchFamily="34" charset="0"/>
-                <a:ea typeface="Calibri" pitchFamily="34" charset="-122"/>
-                <a:cs typeface="Calibri" pitchFamily="34" charset="-120"/>
-              </a:rPr>
-              <a:t>  —  faire passer tous les assert — les bords d’abord</a:t>
-            </a:r>
-            <a:endParaRPr lang="en-US" sz="1400" dirty="0"/>
-          </a:p>
-        </p:txBody>
-      </p:sp>
-      <p:sp>
-        <p:nvSpPr>
-          <p:cNvPr id="7" name="Shape 5"/>
-          <p:cNvSpPr/>
-          <p:nvPr/>
-        </p:nvSpPr>
-        <p:spPr>
-          <a:xfrm>
-            <a:off x="640080" y="2532888"/>
-            <a:ext cx="457200" cy="457200"/>
-          </a:xfrm>
-          <a:prstGeom prst="ellipse">
-            <a:avLst/>
-          </a:prstGeom>
-          <a:solidFill>
-            <a:srgbClr val="14563C"/>
-          </a:solidFill>
-          <a:ln/>
-        </p:spPr>
-      </p:sp>
-      <p:sp>
-        <p:nvSpPr>
-          <p:cNvPr id="8" name="Text 6"/>
-          <p:cNvSpPr/>
-          <p:nvPr/>
-        </p:nvSpPr>
-        <p:spPr>
-          <a:xfrm>
-            <a:off x="640080" y="2532888"/>
-            <a:ext cx="457200" cy="457200"/>
-          </a:xfrm>
-          <a:prstGeom prst="rect">
-            <a:avLst/>
-          </a:prstGeom>
-          <a:noFill/>
-          <a:ln/>
-        </p:spPr>
-        <p:txBody>
-          <a:bodyPr wrap="square" lIns="0" tIns="0" rIns="0" bIns="0" rtlCol="0" anchor="ctr"/>
-          <a:lstStyle/>
-          <a:p>
-            <a:pPr algn="ctr" indent="0" marL="0">
-              <a:buNone/>
-            </a:pPr>
-            <a:r>
-              <a:rPr lang="en-US" sz="1400" b="1" dirty="0">
-                <a:solidFill>
-                  <a:srgbClr val="FFFFFF"/>
-                </a:solidFill>
-                <a:latin typeface="Calibri" pitchFamily="34" charset="0"/>
-                <a:ea typeface="Calibri" pitchFamily="34" charset="-122"/>
-                <a:cs typeface="Calibri" pitchFamily="34" charset="-120"/>
-              </a:rPr>
-              <a:t>2</a:t>
-            </a:r>
-            <a:endParaRPr lang="en-US" sz="1400" dirty="0"/>
-          </a:p>
-        </p:txBody>
-      </p:sp>
-      <p:sp>
-        <p:nvSpPr>
-          <p:cNvPr id="9" name="Text 7"/>
-          <p:cNvSpPr/>
-          <p:nvPr/>
-        </p:nvSpPr>
-        <p:spPr>
-          <a:xfrm>
-            <a:off x="1234440" y="2514600"/>
-            <a:ext cx="6309360" cy="548640"/>
-          </a:xfrm>
-          <a:prstGeom prst="rect">
-            <a:avLst/>
-          </a:prstGeom>
-          <a:noFill/>
-          <a:ln/>
-        </p:spPr>
-        <p:txBody>
-          <a:bodyPr wrap="square" lIns="0" tIns="0" rIns="0" bIns="0" rtlCol="0" anchor="ctr"/>
-          <a:lstStyle/>
-          <a:p>
-            <a:pPr indent="0" marL="0">
-              <a:buNone/>
-            </a:pPr>
-            <a:r>
-              <a:rPr lang="en-US" sz="1400" b="1" dirty="0">
-                <a:solidFill>
-                  <a:srgbClr val="1C2A24"/>
-                </a:solidFill>
-                <a:latin typeface="Calibri" pitchFamily="34" charset="0"/>
-                <a:ea typeface="Calibri" pitchFamily="34" charset="-122"/>
-                <a:cs typeface="Calibri" pitchFamily="34" charset="-120"/>
-              </a:rPr>
-              <a:t>tp_annuaire.py</a:t>
-            </a:r>
-            <a:pPr indent="0" marL="0">
-              <a:buNone/>
-            </a:pPr>
-            <a:r>
-              <a:rPr lang="en-US" sz="1400" dirty="0">
-                <a:solidFill>
-                  <a:srgbClr val="5C6B63"/>
-                </a:solidFill>
-                <a:latin typeface="Calibri" pitchFamily="34" charset="0"/>
-                <a:ea typeface="Calibri" pitchFamily="34" charset="-122"/>
-                <a:cs typeface="Calibri" pitchFamily="34" charset="-120"/>
-              </a:rPr>
-              <a:t>  —  comptage par région, dédoublonnage, orphelins, tri</a:t>
-            </a:r>
-            <a:endParaRPr lang="en-US" sz="1400" dirty="0"/>
-          </a:p>
-        </p:txBody>
-      </p:sp>
-      <p:sp>
-        <p:nvSpPr>
-          <p:cNvPr id="10" name="Shape 8"/>
-          <p:cNvSpPr/>
-          <p:nvPr/>
-        </p:nvSpPr>
-        <p:spPr>
-          <a:xfrm>
-            <a:off x="640080" y="3282696"/>
-            <a:ext cx="457200" cy="457200"/>
-          </a:xfrm>
-          <a:prstGeom prst="ellipse">
-            <a:avLst/>
-          </a:prstGeom>
-          <a:solidFill>
-            <a:srgbClr val="14563C"/>
-          </a:solidFill>
-          <a:ln/>
-        </p:spPr>
-      </p:sp>
-      <p:sp>
-        <p:nvSpPr>
-          <p:cNvPr id="11" name="Text 9"/>
-          <p:cNvSpPr/>
-          <p:nvPr/>
-        </p:nvSpPr>
-        <p:spPr>
-          <a:xfrm>
-            <a:off x="640080" y="3282696"/>
-            <a:ext cx="457200" cy="457200"/>
-          </a:xfrm>
-          <a:prstGeom prst="rect">
-            <a:avLst/>
-          </a:prstGeom>
-          <a:noFill/>
-          <a:ln/>
-        </p:spPr>
-        <p:txBody>
-          <a:bodyPr wrap="square" lIns="0" tIns="0" rIns="0" bIns="0" rtlCol="0" anchor="ctr"/>
-          <a:lstStyle/>
-          <a:p>
-            <a:pPr algn="ctr" indent="0" marL="0">
-              <a:buNone/>
-            </a:pPr>
-            <a:r>
-              <a:rPr lang="en-US" sz="1400" b="1" dirty="0">
-                <a:solidFill>
-                  <a:srgbClr val="FFFFFF"/>
-                </a:solidFill>
-                <a:latin typeface="Calibri" pitchFamily="34" charset="0"/>
-                <a:ea typeface="Calibri" pitchFamily="34" charset="-122"/>
-                <a:cs typeface="Calibri" pitchFamily="34" charset="-120"/>
-              </a:rPr>
-              <a:t>3</a:t>
-            </a:r>
-            <a:endParaRPr lang="en-US" sz="1400" dirty="0"/>
-          </a:p>
-        </p:txBody>
-      </p:sp>
-      <p:sp>
-        <p:nvSpPr>
-          <p:cNvPr id="12" name="Text 10"/>
-          <p:cNvSpPr/>
-          <p:nvPr/>
-        </p:nvSpPr>
-        <p:spPr>
-          <a:xfrm>
-            <a:off x="1234440" y="3264408"/>
-            <a:ext cx="6309360" cy="548640"/>
-          </a:xfrm>
-          <a:prstGeom prst="rect">
-            <a:avLst/>
-          </a:prstGeom>
-          <a:noFill/>
-          <a:ln/>
-        </p:spPr>
-        <p:txBody>
-          <a:bodyPr wrap="square" lIns="0" tIns="0" rIns="0" bIns="0" rtlCol="0" anchor="ctr"/>
-          <a:lstStyle/>
-          <a:p>
-            <a:pPr indent="0" marL="0">
-              <a:buNone/>
-            </a:pPr>
-            <a:r>
-              <a:rPr lang="en-US" sz="1400" b="1" dirty="0">
-                <a:solidFill>
-                  <a:srgbClr val="1C2A24"/>
-                </a:solidFill>
-                <a:latin typeface="Calibri" pitchFamily="34" charset="0"/>
-                <a:ea typeface="Calibri" pitchFamily="34" charset="-122"/>
-                <a:cs typeface="Calibri" pitchFamily="34" charset="-120"/>
-              </a:rPr>
-              <a:t>Relire son J1</a:t>
-            </a:r>
-            <a:pPr indent="0" marL="0">
-              <a:buNone/>
-            </a:pPr>
-            <a:r>
-              <a:rPr lang="en-US" sz="1400" dirty="0">
-                <a:solidFill>
-                  <a:srgbClr val="5C6B63"/>
-                </a:solidFill>
-                <a:latin typeface="Calibri" pitchFamily="34" charset="0"/>
-                <a:ea typeface="Calibri" pitchFamily="34" charset="-122"/>
-                <a:cs typeface="Calibri" pitchFamily="34" charset="-120"/>
-              </a:rPr>
-              <a:t>  —  remplacer les répétitions par des fonctions</a:t>
-            </a:r>
-            <a:endParaRPr lang="en-US" sz="1400" dirty="0"/>
-          </a:p>
-        </p:txBody>
-      </p:sp>
-      <p:sp>
-        <p:nvSpPr>
-          <p:cNvPr id="13" name="Shape 11"/>
-          <p:cNvSpPr/>
-          <p:nvPr/>
-        </p:nvSpPr>
-        <p:spPr>
-          <a:xfrm>
-            <a:off x="640080" y="4032504"/>
-            <a:ext cx="457200" cy="457200"/>
-          </a:xfrm>
-          <a:prstGeom prst="ellipse">
-            <a:avLst/>
-          </a:prstGeom>
-          <a:solidFill>
-            <a:srgbClr val="14563C"/>
-          </a:solidFill>
-          <a:ln/>
-        </p:spPr>
-      </p:sp>
-      <p:sp>
-        <p:nvSpPr>
-          <p:cNvPr id="14" name="Text 12"/>
-          <p:cNvSpPr/>
-          <p:nvPr/>
-        </p:nvSpPr>
-        <p:spPr>
-          <a:xfrm>
-            <a:off x="640080" y="4032504"/>
-            <a:ext cx="457200" cy="457200"/>
-          </a:xfrm>
-          <a:prstGeom prst="rect">
-            <a:avLst/>
-          </a:prstGeom>
-          <a:noFill/>
-          <a:ln/>
-        </p:spPr>
-        <p:txBody>
-          <a:bodyPr wrap="square" lIns="0" tIns="0" rIns="0" bIns="0" rtlCol="0" anchor="ctr"/>
-          <a:lstStyle/>
-          <a:p>
-            <a:pPr algn="ctr" indent="0" marL="0">
-              <a:buNone/>
-            </a:pPr>
-            <a:r>
-              <a:rPr lang="en-US" sz="1400" b="1" dirty="0">
-                <a:solidFill>
-                  <a:srgbClr val="FFFFFF"/>
-                </a:solidFill>
-                <a:latin typeface="Calibri" pitchFamily="34" charset="0"/>
-                <a:ea typeface="Calibri" pitchFamily="34" charset="-122"/>
-                <a:cs typeface="Calibri" pitchFamily="34" charset="-120"/>
-              </a:rPr>
-              <a:t>4</a:t>
-            </a:r>
-            <a:endParaRPr lang="en-US" sz="1400" dirty="0"/>
-          </a:p>
-        </p:txBody>
-      </p:sp>
-      <p:sp>
-        <p:nvSpPr>
-          <p:cNvPr id="15" name="Text 13"/>
-          <p:cNvSpPr/>
-          <p:nvPr/>
-        </p:nvSpPr>
-        <p:spPr>
-          <a:xfrm>
-            <a:off x="1234440" y="4014216"/>
-            <a:ext cx="6309360" cy="548640"/>
-          </a:xfrm>
-          <a:prstGeom prst="rect">
-            <a:avLst/>
-          </a:prstGeom>
-          <a:noFill/>
-          <a:ln/>
-        </p:spPr>
-        <p:txBody>
-          <a:bodyPr wrap="square" lIns="0" tIns="0" rIns="0" bIns="0" rtlCol="0" anchor="ctr"/>
-          <a:lstStyle/>
-          <a:p>
-            <a:pPr indent="0" marL="0">
-              <a:buNone/>
-            </a:pPr>
-            <a:r>
-              <a:rPr lang="en-US" sz="1400" b="1" dirty="0">
-                <a:solidFill>
-                  <a:srgbClr val="1C2A24"/>
-                </a:solidFill>
-                <a:latin typeface="Calibri" pitchFamily="34" charset="0"/>
-                <a:ea typeface="Calibri" pitchFamily="34" charset="-122"/>
-                <a:cs typeface="Calibri" pitchFamily="34" charset="-120"/>
-              </a:rPr>
-              <a:t>Pour les rapides</a:t>
-            </a:r>
-            <a:pPr indent="0" marL="0">
-              <a:buNone/>
-            </a:pPr>
-            <a:r>
-              <a:rPr lang="en-US" sz="1400" dirty="0">
-                <a:solidFill>
-                  <a:srgbClr val="5C6B63"/>
-                </a:solidFill>
-                <a:latin typeface="Calibri" pitchFamily="34" charset="0"/>
-                <a:ea typeface="Calibri" pitchFamily="34" charset="-122"/>
-                <a:cs typeface="Calibri" pitchFamily="34" charset="-120"/>
-              </a:rPr>
-              <a:t>  —  declarations_manquantes(annee) en avance de phase</a:t>
-            </a:r>
-            <a:endParaRPr lang="en-US" sz="1400" dirty="0"/>
-          </a:p>
-        </p:txBody>
-      </p:sp>
-      <p:sp>
-        <p:nvSpPr>
-          <p:cNvPr id="16" name="Shape 14"/>
-          <p:cNvSpPr/>
-          <p:nvPr/>
-        </p:nvSpPr>
-        <p:spPr>
-          <a:xfrm>
-            <a:off x="7863840" y="1737360"/>
-            <a:ext cx="3749040" cy="3017520"/>
-          </a:xfrm>
-          <a:prstGeom prst="roundRect">
-            <a:avLst>
-              <a:gd name="adj" fmla="val 3030"/>
-            </a:avLst>
-          </a:prstGeom>
-          <a:solidFill>
-            <a:srgbClr val="EEF4F0"/>
-          </a:solidFill>
-          <a:ln/>
-        </p:spPr>
-      </p:sp>
-      <p:sp>
-        <p:nvSpPr>
-          <p:cNvPr id="17" name="Shape 15"/>
-          <p:cNvSpPr/>
-          <p:nvPr/>
-        </p:nvSpPr>
-        <p:spPr>
-          <a:xfrm>
-            <a:off x="8138160" y="1965960"/>
-            <a:ext cx="457200" cy="457200"/>
-          </a:xfrm>
-          <a:prstGeom prst="ellipse">
-            <a:avLst/>
-          </a:prstGeom>
-          <a:solidFill>
-            <a:srgbClr val="C9A227"/>
-          </a:solidFill>
-          <a:ln/>
-        </p:spPr>
-      </p:sp>
       <p:pic>
         <p:nvPicPr>
-          <p:cNvPr id="18" name="Image 0" descr="icons/folder.png">    </p:cNvPr>
+          <p:cNvPr id="4" name="Image 0" descr="logo-dgi.png">    </p:cNvPr>
           <p:cNvPicPr>
             <a:picLocks noChangeAspect="1"/>
           </p:cNvPicPr>
@@ -12580,8 +12326,8 @@
         </p:blipFill>
         <p:spPr>
           <a:xfrm>
-            <a:off x="8257032" y="2084832"/>
-            <a:ext cx="219456" cy="219456"/>
+            <a:off x="10744200" y="384048"/>
+            <a:ext cx="1051560" cy="795528"/>
           </a:xfrm>
           <a:prstGeom prst="rect">
             <a:avLst/>
@@ -12590,14 +12336,34 @@
       </p:pic>
       <p:sp>
         <p:nvSpPr>
-          <p:cNvPr id="19" name="Text 16"/>
-          <p:cNvSpPr/>
-          <p:nvPr/>
-        </p:nvSpPr>
-        <p:spPr>
-          <a:xfrm>
-            <a:off x="8732520" y="2011680"/>
-            <a:ext cx="2743200" cy="365760"/>
+          <p:cNvPr id="5" name="Shape 2"/>
+          <p:cNvSpPr/>
+          <p:nvPr/>
+        </p:nvSpPr>
+        <p:spPr>
+          <a:xfrm>
+            <a:off x="640080" y="1783080"/>
+            <a:ext cx="457200" cy="457200"/>
+          </a:xfrm>
+          <a:prstGeom prst="ellipse">
+            <a:avLst/>
+          </a:prstGeom>
+          <a:solidFill>
+            <a:srgbClr val="0E7A3D"/>
+          </a:solidFill>
+          <a:ln/>
+        </p:spPr>
+      </p:sp>
+      <p:sp>
+        <p:nvSpPr>
+          <p:cNvPr id="6" name="Text 3"/>
+          <p:cNvSpPr/>
+          <p:nvPr/>
+        </p:nvSpPr>
+        <p:spPr>
+          <a:xfrm>
+            <a:off x="640080" y="1783080"/>
+            <a:ext cx="457200" cy="457200"/>
           </a:xfrm>
           <a:prstGeom prst="rect">
             <a:avLst/>
@@ -12609,19 +12375,19 @@
           <a:bodyPr wrap="square" lIns="0" tIns="0" rIns="0" bIns="0" rtlCol="0" anchor="ctr"/>
           <a:lstStyle/>
           <a:p>
-            <a:pPr indent="0" marL="0">
+            <a:pPr algn="ctr" indent="0" marL="0">
               <a:buNone/>
             </a:pPr>
             <a:r>
               <a:rPr lang="en-US" sz="1400" b="1" dirty="0">
                 <a:solidFill>
-                  <a:srgbClr val="14563C"/>
+                  <a:srgbClr val="FFFFFF"/>
                 </a:solidFill>
                 <a:latin typeface="Calibri" pitchFamily="34" charset="0"/>
                 <a:ea typeface="Calibri" pitchFamily="34" charset="-122"/>
                 <a:cs typeface="Calibri" pitchFamily="34" charset="-120"/>
               </a:rPr>
-              <a:t>Fichiers du jour</a:t>
+              <a:t>1</a:t>
             </a:r>
             <a:endParaRPr lang="en-US" sz="1400" dirty="0"/>
           </a:p>
@@ -12629,14 +12395,14 @@
       </p:sp>
       <p:sp>
         <p:nvSpPr>
-          <p:cNvPr id="20" name="Text 17"/>
-          <p:cNvSpPr/>
-          <p:nvPr/>
-        </p:nvSpPr>
-        <p:spPr>
-          <a:xfrm>
-            <a:off x="8138160" y="2606040"/>
-            <a:ext cx="3291840" cy="2011680"/>
+          <p:cNvPr id="7" name="Text 4"/>
+          <p:cNvSpPr/>
+          <p:nvPr/>
+        </p:nvSpPr>
+        <p:spPr>
+          <a:xfrm>
+            <a:off x="1234440" y="1764792"/>
+            <a:ext cx="6309360" cy="548640"/>
           </a:xfrm>
           <a:prstGeom prst="rect">
             <a:avLst/>
@@ -12645,135 +12411,422 @@
           <a:ln/>
         </p:spPr>
         <p:txBody>
-          <a:bodyPr wrap="square" lIns="0" tIns="0" rIns="0" bIns="0" rtlCol="0" anchor="t"/>
+          <a:bodyPr wrap="square" lIns="0" tIns="0" rIns="0" bIns="0" rtlCol="0" anchor="ctr"/>
           <a:lstStyle/>
           <a:p>
             <a:pPr indent="0" marL="0">
-              <a:lnSpc>
-                <a:spcPct val="135000"/>
-              </a:lnSpc>
-              <a:buNone/>
-            </a:pPr>
-            <a:r>
-              <a:rPr lang="en-US" sz="1150" dirty="0">
+              <a:buNone/>
+            </a:pPr>
+            <a:r>
+              <a:rPr lang="en-US" sz="1400" b="1" dirty="0">
                 <a:solidFill>
                   <a:srgbClr val="1C2A24"/>
                 </a:solidFill>
-                <a:latin typeface="Courier New" pitchFamily="34" charset="0"/>
-                <a:ea typeface="Courier New" pitchFamily="34" charset="-122"/>
-                <a:cs typeface="Courier New" pitchFamily="34" charset="-120"/>
-              </a:rPr>
-              <a:t>03-fonctions/</a:t>
-            </a:r>
-            <a:endParaRPr lang="en-US" sz="1150" dirty="0"/>
-          </a:p>
-          <a:p>
-            <a:pPr indent="0" marL="0">
-              <a:lnSpc>
-                <a:spcPct val="135000"/>
-              </a:lnSpc>
-              <a:buNone/>
-            </a:pPr>
-            <a:r>
-              <a:rPr lang="en-US" sz="1150" dirty="0">
+                <a:latin typeface="Calibri" pitchFamily="34" charset="0"/>
+                <a:ea typeface="Calibri" pitchFamily="34" charset="-122"/>
+                <a:cs typeface="Calibri" pitchFamily="34" charset="-120"/>
+              </a:rPr>
+              <a:t>tp_penalites.py</a:t>
+            </a:r>
+            <a:pPr indent="0" marL="0">
+              <a:buNone/>
+            </a:pPr>
+            <a:r>
+              <a:rPr lang="en-US" sz="1400" dirty="0">
+                <a:solidFill>
+                  <a:srgbClr val="5C6B63"/>
+                </a:solidFill>
+                <a:latin typeface="Calibri" pitchFamily="34" charset="0"/>
+                <a:ea typeface="Calibri" pitchFamily="34" charset="-122"/>
+                <a:cs typeface="Calibri" pitchFamily="34" charset="-120"/>
+              </a:rPr>
+              <a:t>  —  faire passer tous les assert — les bords d’abord</a:t>
+            </a:r>
+            <a:endParaRPr lang="en-US" sz="1400" dirty="0"/>
+          </a:p>
+        </p:txBody>
+      </p:sp>
+      <p:sp>
+        <p:nvSpPr>
+          <p:cNvPr id="8" name="Shape 5"/>
+          <p:cNvSpPr/>
+          <p:nvPr/>
+        </p:nvSpPr>
+        <p:spPr>
+          <a:xfrm>
+            <a:off x="640080" y="2532888"/>
+            <a:ext cx="457200" cy="457200"/>
+          </a:xfrm>
+          <a:prstGeom prst="ellipse">
+            <a:avLst/>
+          </a:prstGeom>
+          <a:solidFill>
+            <a:srgbClr val="0E7A3D"/>
+          </a:solidFill>
+          <a:ln/>
+        </p:spPr>
+      </p:sp>
+      <p:sp>
+        <p:nvSpPr>
+          <p:cNvPr id="9" name="Text 6"/>
+          <p:cNvSpPr/>
+          <p:nvPr/>
+        </p:nvSpPr>
+        <p:spPr>
+          <a:xfrm>
+            <a:off x="640080" y="2532888"/>
+            <a:ext cx="457200" cy="457200"/>
+          </a:xfrm>
+          <a:prstGeom prst="rect">
+            <a:avLst/>
+          </a:prstGeom>
+          <a:noFill/>
+          <a:ln/>
+        </p:spPr>
+        <p:txBody>
+          <a:bodyPr wrap="square" lIns="0" tIns="0" rIns="0" bIns="0" rtlCol="0" anchor="ctr"/>
+          <a:lstStyle/>
+          <a:p>
+            <a:pPr algn="ctr" indent="0" marL="0">
+              <a:buNone/>
+            </a:pPr>
+            <a:r>
+              <a:rPr lang="en-US" sz="1400" b="1" dirty="0">
+                <a:solidFill>
+                  <a:srgbClr val="FFFFFF"/>
+                </a:solidFill>
+                <a:latin typeface="Calibri" pitchFamily="34" charset="0"/>
+                <a:ea typeface="Calibri" pitchFamily="34" charset="-122"/>
+                <a:cs typeface="Calibri" pitchFamily="34" charset="-120"/>
+              </a:rPr>
+              <a:t>2</a:t>
+            </a:r>
+            <a:endParaRPr lang="en-US" sz="1400" dirty="0"/>
+          </a:p>
+        </p:txBody>
+      </p:sp>
+      <p:sp>
+        <p:nvSpPr>
+          <p:cNvPr id="10" name="Text 7"/>
+          <p:cNvSpPr/>
+          <p:nvPr/>
+        </p:nvSpPr>
+        <p:spPr>
+          <a:xfrm>
+            <a:off x="1234440" y="2514600"/>
+            <a:ext cx="6309360" cy="548640"/>
+          </a:xfrm>
+          <a:prstGeom prst="rect">
+            <a:avLst/>
+          </a:prstGeom>
+          <a:noFill/>
+          <a:ln/>
+        </p:spPr>
+        <p:txBody>
+          <a:bodyPr wrap="square" lIns="0" tIns="0" rIns="0" bIns="0" rtlCol="0" anchor="ctr"/>
+          <a:lstStyle/>
+          <a:p>
+            <a:pPr indent="0" marL="0">
+              <a:buNone/>
+            </a:pPr>
+            <a:r>
+              <a:rPr lang="en-US" sz="1400" b="1" dirty="0">
                 <a:solidFill>
                   <a:srgbClr val="1C2A24"/>
                 </a:solidFill>
-                <a:latin typeface="Courier New" pitchFamily="34" charset="0"/>
-                <a:ea typeface="Courier New" pitchFamily="34" charset="-122"/>
-                <a:cs typeface="Courier New" pitchFamily="34" charset="-120"/>
-              </a:rPr>
-              <a:t>  tp_penalites.py</a:t>
-            </a:r>
-            <a:endParaRPr lang="en-US" sz="1150" dirty="0"/>
-          </a:p>
-          <a:p>
-            <a:pPr indent="0" marL="0">
-              <a:lnSpc>
-                <a:spcPct val="135000"/>
-              </a:lnSpc>
-              <a:buNone/>
-            </a:pPr>
-            <a:r>
-              <a:rPr lang="en-US" sz="1150" dirty="0">
+                <a:latin typeface="Calibri" pitchFamily="34" charset="0"/>
+                <a:ea typeface="Calibri" pitchFamily="34" charset="-122"/>
+                <a:cs typeface="Calibri" pitchFamily="34" charset="-120"/>
+              </a:rPr>
+              <a:t>tp_annuaire.py</a:t>
+            </a:r>
+            <a:pPr indent="0" marL="0">
+              <a:buNone/>
+            </a:pPr>
+            <a:r>
+              <a:rPr lang="en-US" sz="1400" dirty="0">
+                <a:solidFill>
+                  <a:srgbClr val="5C6B63"/>
+                </a:solidFill>
+                <a:latin typeface="Calibri" pitchFamily="34" charset="0"/>
+                <a:ea typeface="Calibri" pitchFamily="34" charset="-122"/>
+                <a:cs typeface="Calibri" pitchFamily="34" charset="-120"/>
+              </a:rPr>
+              <a:t>  —  comptage par région, dédoublonnage, orphelins, tri</a:t>
+            </a:r>
+            <a:endParaRPr lang="en-US" sz="1400" dirty="0"/>
+          </a:p>
+        </p:txBody>
+      </p:sp>
+      <p:sp>
+        <p:nvSpPr>
+          <p:cNvPr id="11" name="Shape 8"/>
+          <p:cNvSpPr/>
+          <p:nvPr/>
+        </p:nvSpPr>
+        <p:spPr>
+          <a:xfrm>
+            <a:off x="640080" y="3282696"/>
+            <a:ext cx="457200" cy="457200"/>
+          </a:xfrm>
+          <a:prstGeom prst="ellipse">
+            <a:avLst/>
+          </a:prstGeom>
+          <a:solidFill>
+            <a:srgbClr val="0E7A3D"/>
+          </a:solidFill>
+          <a:ln/>
+        </p:spPr>
+      </p:sp>
+      <p:sp>
+        <p:nvSpPr>
+          <p:cNvPr id="12" name="Text 9"/>
+          <p:cNvSpPr/>
+          <p:nvPr/>
+        </p:nvSpPr>
+        <p:spPr>
+          <a:xfrm>
+            <a:off x="640080" y="3282696"/>
+            <a:ext cx="457200" cy="457200"/>
+          </a:xfrm>
+          <a:prstGeom prst="rect">
+            <a:avLst/>
+          </a:prstGeom>
+          <a:noFill/>
+          <a:ln/>
+        </p:spPr>
+        <p:txBody>
+          <a:bodyPr wrap="square" lIns="0" tIns="0" rIns="0" bIns="0" rtlCol="0" anchor="ctr"/>
+          <a:lstStyle/>
+          <a:p>
+            <a:pPr algn="ctr" indent="0" marL="0">
+              <a:buNone/>
+            </a:pPr>
+            <a:r>
+              <a:rPr lang="en-US" sz="1400" b="1" dirty="0">
+                <a:solidFill>
+                  <a:srgbClr val="FFFFFF"/>
+                </a:solidFill>
+                <a:latin typeface="Calibri" pitchFamily="34" charset="0"/>
+                <a:ea typeface="Calibri" pitchFamily="34" charset="-122"/>
+                <a:cs typeface="Calibri" pitchFamily="34" charset="-120"/>
+              </a:rPr>
+              <a:t>3</a:t>
+            </a:r>
+            <a:endParaRPr lang="en-US" sz="1400" dirty="0"/>
+          </a:p>
+        </p:txBody>
+      </p:sp>
+      <p:sp>
+        <p:nvSpPr>
+          <p:cNvPr id="13" name="Text 10"/>
+          <p:cNvSpPr/>
+          <p:nvPr/>
+        </p:nvSpPr>
+        <p:spPr>
+          <a:xfrm>
+            <a:off x="1234440" y="3264408"/>
+            <a:ext cx="6309360" cy="548640"/>
+          </a:xfrm>
+          <a:prstGeom prst="rect">
+            <a:avLst/>
+          </a:prstGeom>
+          <a:noFill/>
+          <a:ln/>
+        </p:spPr>
+        <p:txBody>
+          <a:bodyPr wrap="square" lIns="0" tIns="0" rIns="0" bIns="0" rtlCol="0" anchor="ctr"/>
+          <a:lstStyle/>
+          <a:p>
+            <a:pPr indent="0" marL="0">
+              <a:buNone/>
+            </a:pPr>
+            <a:r>
+              <a:rPr lang="en-US" sz="1400" b="1" dirty="0">
                 <a:solidFill>
                   <a:srgbClr val="1C2A24"/>
                 </a:solidFill>
-                <a:latin typeface="Courier New" pitchFamily="34" charset="0"/>
-                <a:ea typeface="Courier New" pitchFamily="34" charset="-122"/>
-                <a:cs typeface="Courier New" pitchFamily="34" charset="-120"/>
-              </a:rPr>
-              <a:t>04-structures-de-donnees/</a:t>
-            </a:r>
-            <a:endParaRPr lang="en-US" sz="1150" dirty="0"/>
-          </a:p>
-          <a:p>
-            <a:pPr indent="0" marL="0">
-              <a:lnSpc>
-                <a:spcPct val="135000"/>
-              </a:lnSpc>
-              <a:buNone/>
-            </a:pPr>
-            <a:r>
-              <a:rPr lang="en-US" sz="1150" dirty="0">
+                <a:latin typeface="Calibri" pitchFamily="34" charset="0"/>
+                <a:ea typeface="Calibri" pitchFamily="34" charset="-122"/>
+                <a:cs typeface="Calibri" pitchFamily="34" charset="-120"/>
+              </a:rPr>
+              <a:t>Relire son J1</a:t>
+            </a:r>
+            <a:pPr indent="0" marL="0">
+              <a:buNone/>
+            </a:pPr>
+            <a:r>
+              <a:rPr lang="en-US" sz="1400" dirty="0">
+                <a:solidFill>
+                  <a:srgbClr val="5C6B63"/>
+                </a:solidFill>
+                <a:latin typeface="Calibri" pitchFamily="34" charset="0"/>
+                <a:ea typeface="Calibri" pitchFamily="34" charset="-122"/>
+                <a:cs typeface="Calibri" pitchFamily="34" charset="-120"/>
+              </a:rPr>
+              <a:t>  —  remplacer les répétitions par des fonctions</a:t>
+            </a:r>
+            <a:endParaRPr lang="en-US" sz="1400" dirty="0"/>
+          </a:p>
+        </p:txBody>
+      </p:sp>
+      <p:sp>
+        <p:nvSpPr>
+          <p:cNvPr id="14" name="Shape 11"/>
+          <p:cNvSpPr/>
+          <p:nvPr/>
+        </p:nvSpPr>
+        <p:spPr>
+          <a:xfrm>
+            <a:off x="640080" y="4032504"/>
+            <a:ext cx="457200" cy="457200"/>
+          </a:xfrm>
+          <a:prstGeom prst="ellipse">
+            <a:avLst/>
+          </a:prstGeom>
+          <a:solidFill>
+            <a:srgbClr val="0E7A3D"/>
+          </a:solidFill>
+          <a:ln/>
+        </p:spPr>
+      </p:sp>
+      <p:sp>
+        <p:nvSpPr>
+          <p:cNvPr id="15" name="Text 12"/>
+          <p:cNvSpPr/>
+          <p:nvPr/>
+        </p:nvSpPr>
+        <p:spPr>
+          <a:xfrm>
+            <a:off x="640080" y="4032504"/>
+            <a:ext cx="457200" cy="457200"/>
+          </a:xfrm>
+          <a:prstGeom prst="rect">
+            <a:avLst/>
+          </a:prstGeom>
+          <a:noFill/>
+          <a:ln/>
+        </p:spPr>
+        <p:txBody>
+          <a:bodyPr wrap="square" lIns="0" tIns="0" rIns="0" bIns="0" rtlCol="0" anchor="ctr"/>
+          <a:lstStyle/>
+          <a:p>
+            <a:pPr algn="ctr" indent="0" marL="0">
+              <a:buNone/>
+            </a:pPr>
+            <a:r>
+              <a:rPr lang="en-US" sz="1400" b="1" dirty="0">
+                <a:solidFill>
+                  <a:srgbClr val="FFFFFF"/>
+                </a:solidFill>
+                <a:latin typeface="Calibri" pitchFamily="34" charset="0"/>
+                <a:ea typeface="Calibri" pitchFamily="34" charset="-122"/>
+                <a:cs typeface="Calibri" pitchFamily="34" charset="-120"/>
+              </a:rPr>
+              <a:t>4</a:t>
+            </a:r>
+            <a:endParaRPr lang="en-US" sz="1400" dirty="0"/>
+          </a:p>
+        </p:txBody>
+      </p:sp>
+      <p:sp>
+        <p:nvSpPr>
+          <p:cNvPr id="16" name="Text 13"/>
+          <p:cNvSpPr/>
+          <p:nvPr/>
+        </p:nvSpPr>
+        <p:spPr>
+          <a:xfrm>
+            <a:off x="1234440" y="4014216"/>
+            <a:ext cx="6309360" cy="548640"/>
+          </a:xfrm>
+          <a:prstGeom prst="rect">
+            <a:avLst/>
+          </a:prstGeom>
+          <a:noFill/>
+          <a:ln/>
+        </p:spPr>
+        <p:txBody>
+          <a:bodyPr wrap="square" lIns="0" tIns="0" rIns="0" bIns="0" rtlCol="0" anchor="ctr"/>
+          <a:lstStyle/>
+          <a:p>
+            <a:pPr indent="0" marL="0">
+              <a:buNone/>
+            </a:pPr>
+            <a:r>
+              <a:rPr lang="en-US" sz="1400" b="1" dirty="0">
                 <a:solidFill>
                   <a:srgbClr val="1C2A24"/>
                 </a:solidFill>
-                <a:latin typeface="Courier New" pitchFamily="34" charset="0"/>
-                <a:ea typeface="Courier New" pitchFamily="34" charset="-122"/>
-                <a:cs typeface="Courier New" pitchFamily="34" charset="-120"/>
-              </a:rPr>
-              <a:t>  tp_annuaire.py</a:t>
-            </a:r>
-            <a:endParaRPr lang="en-US" sz="1150" dirty="0"/>
+                <a:latin typeface="Calibri" pitchFamily="34" charset="0"/>
+                <a:ea typeface="Calibri" pitchFamily="34" charset="-122"/>
+                <a:cs typeface="Calibri" pitchFamily="34" charset="-120"/>
+              </a:rPr>
+              <a:t>Pour les rapides</a:t>
+            </a:r>
+            <a:pPr indent="0" marL="0">
+              <a:buNone/>
+            </a:pPr>
+            <a:r>
+              <a:rPr lang="en-US" sz="1400" dirty="0">
+                <a:solidFill>
+                  <a:srgbClr val="5C6B63"/>
+                </a:solidFill>
+                <a:latin typeface="Calibri" pitchFamily="34" charset="0"/>
+                <a:ea typeface="Calibri" pitchFamily="34" charset="-122"/>
+                <a:cs typeface="Calibri" pitchFamily="34" charset="-120"/>
+              </a:rPr>
+              <a:t>  —  declarations_manquantes(annee) en avance de phase</a:t>
+            </a:r>
+            <a:endParaRPr lang="en-US" sz="1400" dirty="0"/>
           </a:p>
         </p:txBody>
       </p:sp>
       <p:sp>
         <p:nvSpPr>
-          <p:cNvPr id="21" name="Shape 18"/>
-          <p:cNvSpPr/>
-          <p:nvPr/>
-        </p:nvSpPr>
-        <p:spPr>
-          <a:xfrm>
-            <a:off x="7863840" y="4983480"/>
-            <a:ext cx="3749040" cy="1234440"/>
+          <p:cNvPr id="17" name="Shape 14"/>
+          <p:cNvSpPr/>
+          <p:nvPr/>
+        </p:nvSpPr>
+        <p:spPr>
+          <a:xfrm>
+            <a:off x="7863840" y="1737360"/>
+            <a:ext cx="3749040" cy="3017520"/>
           </a:xfrm>
           <a:prstGeom prst="roundRect">
             <a:avLst>
-              <a:gd name="adj" fmla="val 7407"/>
+              <a:gd name="adj" fmla="val 3030"/>
             </a:avLst>
           </a:prstGeom>
           <a:solidFill>
-            <a:srgbClr val="0D3325"/>
+            <a:srgbClr val="EEF5EF"/>
           </a:solidFill>
           <a:ln/>
         </p:spPr>
       </p:sp>
       <p:sp>
         <p:nvSpPr>
-          <p:cNvPr id="22" name="Shape 19"/>
-          <p:cNvSpPr/>
-          <p:nvPr/>
-        </p:nvSpPr>
-        <p:spPr>
-          <a:xfrm>
-            <a:off x="8138160" y="5212080"/>
+          <p:cNvPr id="18" name="Shape 15"/>
+          <p:cNvSpPr/>
+          <p:nvPr/>
+        </p:nvSpPr>
+        <p:spPr>
+          <a:xfrm>
+            <a:off x="8138160" y="1965960"/>
             <a:ext cx="457200" cy="457200"/>
           </a:xfrm>
           <a:prstGeom prst="ellipse">
             <a:avLst/>
           </a:prstGeom>
           <a:solidFill>
-            <a:srgbClr val="C9A227"/>
+            <a:srgbClr val="C79100"/>
           </a:solidFill>
           <a:ln/>
         </p:spPr>
       </p:sp>
       <p:pic>
         <p:nvPicPr>
-          <p:cNvPr id="23" name="Image 1" descr="icons/bulb.png">    </p:cNvPr>
+          <p:cNvPr id="19" name="Image 1" descr="icons/folder.png">    </p:cNvPr>
           <p:cNvPicPr>
             <a:picLocks noChangeAspect="1"/>
           </p:cNvPicPr>
@@ -12787,6 +12840,213 @@
         </p:blipFill>
         <p:spPr>
           <a:xfrm>
+            <a:off x="8257032" y="2084832"/>
+            <a:ext cx="219456" cy="219456"/>
+          </a:xfrm>
+          <a:prstGeom prst="rect">
+            <a:avLst/>
+          </a:prstGeom>
+        </p:spPr>
+      </p:pic>
+      <p:sp>
+        <p:nvSpPr>
+          <p:cNvPr id="20" name="Text 16"/>
+          <p:cNvSpPr/>
+          <p:nvPr/>
+        </p:nvSpPr>
+        <p:spPr>
+          <a:xfrm>
+            <a:off x="8732520" y="2011680"/>
+            <a:ext cx="2743200" cy="365760"/>
+          </a:xfrm>
+          <a:prstGeom prst="rect">
+            <a:avLst/>
+          </a:prstGeom>
+          <a:noFill/>
+          <a:ln/>
+        </p:spPr>
+        <p:txBody>
+          <a:bodyPr wrap="square" lIns="0" tIns="0" rIns="0" bIns="0" rtlCol="0" anchor="ctr"/>
+          <a:lstStyle/>
+          <a:p>
+            <a:pPr indent="0" marL="0">
+              <a:buNone/>
+            </a:pPr>
+            <a:r>
+              <a:rPr lang="en-US" sz="1400" b="1" dirty="0">
+                <a:solidFill>
+                  <a:srgbClr val="0E7A3D"/>
+                </a:solidFill>
+                <a:latin typeface="Calibri" pitchFamily="34" charset="0"/>
+                <a:ea typeface="Calibri" pitchFamily="34" charset="-122"/>
+                <a:cs typeface="Calibri" pitchFamily="34" charset="-120"/>
+              </a:rPr>
+              <a:t>Fichiers du jour</a:t>
+            </a:r>
+            <a:endParaRPr lang="en-US" sz="1400" dirty="0"/>
+          </a:p>
+        </p:txBody>
+      </p:sp>
+      <p:sp>
+        <p:nvSpPr>
+          <p:cNvPr id="21" name="Text 17"/>
+          <p:cNvSpPr/>
+          <p:nvPr/>
+        </p:nvSpPr>
+        <p:spPr>
+          <a:xfrm>
+            <a:off x="8138160" y="2606040"/>
+            <a:ext cx="3291840" cy="2011680"/>
+          </a:xfrm>
+          <a:prstGeom prst="rect">
+            <a:avLst/>
+          </a:prstGeom>
+          <a:noFill/>
+          <a:ln/>
+        </p:spPr>
+        <p:txBody>
+          <a:bodyPr wrap="square" lIns="0" tIns="0" rIns="0" bIns="0" rtlCol="0" anchor="t"/>
+          <a:lstStyle/>
+          <a:p>
+            <a:pPr indent="0" marL="0">
+              <a:lnSpc>
+                <a:spcPct val="135000"/>
+              </a:lnSpc>
+              <a:buNone/>
+            </a:pPr>
+            <a:r>
+              <a:rPr lang="en-US" sz="1150" dirty="0">
+                <a:solidFill>
+                  <a:srgbClr val="1C2A24"/>
+                </a:solidFill>
+                <a:latin typeface="Courier New" pitchFamily="34" charset="0"/>
+                <a:ea typeface="Courier New" pitchFamily="34" charset="-122"/>
+                <a:cs typeface="Courier New" pitchFamily="34" charset="-120"/>
+              </a:rPr>
+              <a:t>03-fonctions/</a:t>
+            </a:r>
+            <a:endParaRPr lang="en-US" sz="1150" dirty="0"/>
+          </a:p>
+          <a:p>
+            <a:pPr indent="0" marL="0">
+              <a:lnSpc>
+                <a:spcPct val="135000"/>
+              </a:lnSpc>
+              <a:buNone/>
+            </a:pPr>
+            <a:r>
+              <a:rPr lang="en-US" sz="1150" dirty="0">
+                <a:solidFill>
+                  <a:srgbClr val="1C2A24"/>
+                </a:solidFill>
+                <a:latin typeface="Courier New" pitchFamily="34" charset="0"/>
+                <a:ea typeface="Courier New" pitchFamily="34" charset="-122"/>
+                <a:cs typeface="Courier New" pitchFamily="34" charset="-120"/>
+              </a:rPr>
+              <a:t>  tp_penalites.py</a:t>
+            </a:r>
+            <a:endParaRPr lang="en-US" sz="1150" dirty="0"/>
+          </a:p>
+          <a:p>
+            <a:pPr indent="0" marL="0">
+              <a:lnSpc>
+                <a:spcPct val="135000"/>
+              </a:lnSpc>
+              <a:buNone/>
+            </a:pPr>
+            <a:r>
+              <a:rPr lang="en-US" sz="1150" dirty="0">
+                <a:solidFill>
+                  <a:srgbClr val="1C2A24"/>
+                </a:solidFill>
+                <a:latin typeface="Courier New" pitchFamily="34" charset="0"/>
+                <a:ea typeface="Courier New" pitchFamily="34" charset="-122"/>
+                <a:cs typeface="Courier New" pitchFamily="34" charset="-120"/>
+              </a:rPr>
+              <a:t>04-structures-de-donnees/</a:t>
+            </a:r>
+            <a:endParaRPr lang="en-US" sz="1150" dirty="0"/>
+          </a:p>
+          <a:p>
+            <a:pPr indent="0" marL="0">
+              <a:lnSpc>
+                <a:spcPct val="135000"/>
+              </a:lnSpc>
+              <a:buNone/>
+            </a:pPr>
+            <a:r>
+              <a:rPr lang="en-US" sz="1150" dirty="0">
+                <a:solidFill>
+                  <a:srgbClr val="1C2A24"/>
+                </a:solidFill>
+                <a:latin typeface="Courier New" pitchFamily="34" charset="0"/>
+                <a:ea typeface="Courier New" pitchFamily="34" charset="-122"/>
+                <a:cs typeface="Courier New" pitchFamily="34" charset="-120"/>
+              </a:rPr>
+              <a:t>  tp_annuaire.py</a:t>
+            </a:r>
+            <a:endParaRPr lang="en-US" sz="1150" dirty="0"/>
+          </a:p>
+        </p:txBody>
+      </p:sp>
+      <p:sp>
+        <p:nvSpPr>
+          <p:cNvPr id="22" name="Shape 18"/>
+          <p:cNvSpPr/>
+          <p:nvPr/>
+        </p:nvSpPr>
+        <p:spPr>
+          <a:xfrm>
+            <a:off x="7863840" y="4983480"/>
+            <a:ext cx="3749040" cy="1234440"/>
+          </a:xfrm>
+          <a:prstGeom prst="roundRect">
+            <a:avLst>
+              <a:gd name="adj" fmla="val 7407"/>
+            </a:avLst>
+          </a:prstGeom>
+          <a:solidFill>
+            <a:srgbClr val="0A2E1A"/>
+          </a:solidFill>
+          <a:ln/>
+        </p:spPr>
+      </p:sp>
+      <p:sp>
+        <p:nvSpPr>
+          <p:cNvPr id="23" name="Shape 19"/>
+          <p:cNvSpPr/>
+          <p:nvPr/>
+        </p:nvSpPr>
+        <p:spPr>
+          <a:xfrm>
+            <a:off x="8138160" y="5212080"/>
+            <a:ext cx="457200" cy="457200"/>
+          </a:xfrm>
+          <a:prstGeom prst="ellipse">
+            <a:avLst/>
+          </a:prstGeom>
+          <a:solidFill>
+            <a:srgbClr val="C79100"/>
+          </a:solidFill>
+          <a:ln/>
+        </p:spPr>
+      </p:sp>
+      <p:pic>
+        <p:nvPicPr>
+          <p:cNvPr id="24" name="Image 2" descr="icons/bulb.png">    </p:cNvPr>
+          <p:cNvPicPr>
+            <a:picLocks noChangeAspect="1"/>
+          </p:cNvPicPr>
+          <p:nvPr/>
+        </p:nvPicPr>
+        <p:blipFill>
+          <a:blip r:embed="rId3"/>
+          <a:stretch>
+            <a:fillRect/>
+          </a:stretch>
+        </p:blipFill>
+        <p:spPr>
+          <a:xfrm>
             <a:off x="8257032" y="5330952"/>
             <a:ext cx="219456" cy="219456"/>
           </a:xfrm>
@@ -12797,7 +13057,7 @@
       </p:pic>
       <p:sp>
         <p:nvSpPr>
-          <p:cNvPr id="24" name="Text 20"/>
+          <p:cNvPr id="25" name="Text 20"/>
           <p:cNvSpPr/>
           <p:nvPr/>
         </p:nvSpPr>

--- a/slides/sources/J2-fonctions-structures.pptx
+++ b/slides/sources/J2-fonctions-structures.pptx
@@ -1658,7 +1658,7 @@
     <p:bg>
       <p:bgPr>
         <a:solidFill>
-          <a:srgbClr val="0A2E1A"/>
+          <a:srgbClr val="FFFFFF"/>
         </a:solidFill>
       </p:bgPr>
     </p:bg>
@@ -1684,14 +1684,14 @@
         </p:nvSpPr>
         <p:spPr>
           <a:xfrm>
-            <a:off x="9692640" y="-1463040"/>
-            <a:ext cx="4206240" cy="4206240"/>
+            <a:off x="10149840" y="4846320"/>
+            <a:ext cx="3291840" cy="3291840"/>
           </a:xfrm>
           <a:prstGeom prst="ellipse">
             <a:avLst/>
           </a:prstGeom>
           <a:solidFill>
-            <a:srgbClr val="0E7A3D"/>
+            <a:srgbClr val="EEF5EF"/>
           </a:solidFill>
           <a:ln/>
         </p:spPr>
@@ -1704,67 +1704,21 @@
         </p:nvSpPr>
         <p:spPr>
           <a:xfrm>
-            <a:off x="10698480" y="4480560"/>
-            <a:ext cx="3108960" cy="3108960"/>
+            <a:off x="-1188720" y="-1371600"/>
+            <a:ext cx="2743200" cy="2743200"/>
           </a:xfrm>
           <a:prstGeom prst="ellipse">
             <a:avLst/>
           </a:prstGeom>
           <a:solidFill>
-            <a:srgbClr val="FCD116">
-              <a:alpha val="55000"/>
-            </a:srgbClr>
-          </a:solidFill>
-          <a:ln/>
-        </p:spPr>
-      </p:sp>
-      <p:sp>
-        <p:nvSpPr>
-          <p:cNvPr id="4" name="Shape 2"/>
-          <p:cNvSpPr/>
-          <p:nvPr/>
-        </p:nvSpPr>
-        <p:spPr>
-          <a:xfrm>
-            <a:off x="-1097280" y="5120640"/>
-            <a:ext cx="2743200" cy="2743200"/>
-          </a:xfrm>
-          <a:prstGeom prst="ellipse">
-            <a:avLst/>
-          </a:prstGeom>
-          <a:solidFill>
-            <a:srgbClr val="CE1126">
-              <a:alpha val="65000"/>
-            </a:srgbClr>
-          </a:solidFill>
-          <a:ln/>
-        </p:spPr>
-      </p:sp>
-      <p:sp>
-        <p:nvSpPr>
-          <p:cNvPr id="5" name="Shape 3"/>
-          <p:cNvSpPr/>
-          <p:nvPr/>
-        </p:nvSpPr>
-        <p:spPr>
-          <a:xfrm>
-            <a:off x="9464040" y="502920"/>
-            <a:ext cx="2148840" cy="1828800"/>
-          </a:xfrm>
-          <a:prstGeom prst="roundRect">
-            <a:avLst>
-              <a:gd name="adj" fmla="val 6000"/>
-            </a:avLst>
-          </a:prstGeom>
-          <a:solidFill>
-            <a:srgbClr val="FFFFFF"/>
+            <a:srgbClr val="EEF5EF"/>
           </a:solidFill>
           <a:ln/>
         </p:spPr>
       </p:sp>
       <p:pic>
         <p:nvPicPr>
-          <p:cNvPr id="6" name="Image 0" descr="logo-dgi.png">    </p:cNvPr>
+          <p:cNvPr id="4" name="Image 0" descr="logo-ministere.png">    </p:cNvPr>
           <p:cNvPicPr>
             <a:picLocks noChangeAspect="1"/>
           </p:cNvPicPr>
@@ -1778,23 +1732,47 @@
         </p:blipFill>
         <p:spPr>
           <a:xfrm>
-            <a:off x="9646920" y="740664"/>
-            <a:ext cx="1783080" cy="1353312"/>
+            <a:off x="640080" y="457200"/>
+            <a:ext cx="4206240" cy="822960"/>
           </a:xfrm>
           <a:prstGeom prst="rect">
             <a:avLst/>
           </a:prstGeom>
         </p:spPr>
       </p:pic>
-      <p:sp>
-        <p:nvSpPr>
-          <p:cNvPr id="7" name="Text 4"/>
-          <p:cNvSpPr/>
-          <p:nvPr/>
-        </p:nvSpPr>
-        <p:spPr>
-          <a:xfrm>
-            <a:off x="640080" y="777240"/>
+      <p:pic>
+        <p:nvPicPr>
+          <p:cNvPr id="5" name="Image 1" descr="logo-dgci.png">    </p:cNvPr>
+          <p:cNvPicPr>
+            <a:picLocks noChangeAspect="1"/>
+          </p:cNvPicPr>
+          <p:nvPr/>
+        </p:nvPicPr>
+        <p:blipFill>
+          <a:blip r:embed="rId2"/>
+          <a:stretch>
+            <a:fillRect/>
+          </a:stretch>
+        </p:blipFill>
+        <p:spPr>
+          <a:xfrm>
+            <a:off x="9144000" y="475488"/>
+            <a:ext cx="2468880" cy="758952"/>
+          </a:xfrm>
+          <a:prstGeom prst="rect">
+            <a:avLst/>
+          </a:prstGeom>
+        </p:spPr>
+      </p:pic>
+      <p:sp>
+        <p:nvSpPr>
+          <p:cNvPr id="6" name="Text 2"/>
+          <p:cNvSpPr/>
+          <p:nvPr/>
+        </p:nvSpPr>
+        <p:spPr>
+          <a:xfrm>
+            <a:off x="640080" y="1874520"/>
             <a:ext cx="7315200" cy="365760"/>
           </a:xfrm>
           <a:prstGeom prst="rect">
@@ -1813,7 +1791,7 @@
             <a:r>
               <a:rPr lang="en-US" sz="1500" b="1" spc="300" kern="0" dirty="0">
                 <a:solidFill>
-                  <a:srgbClr val="FCD116"/>
+                  <a:srgbClr val="C79100"/>
                 </a:solidFill>
                 <a:latin typeface="Calibri" pitchFamily="34" charset="0"/>
                 <a:ea typeface="Calibri" pitchFamily="34" charset="-122"/>
@@ -1827,13 +1805,13 @@
       </p:sp>
       <p:sp>
         <p:nvSpPr>
-          <p:cNvPr id="8" name="Text 5"/>
-          <p:cNvSpPr/>
-          <p:nvPr/>
-        </p:nvSpPr>
-        <p:spPr>
-          <a:xfrm>
-            <a:off x="640080" y="1417320"/>
+          <p:cNvPr id="7" name="Text 3"/>
+          <p:cNvSpPr/>
+          <p:nvPr/>
+        </p:nvSpPr>
+        <p:spPr>
+          <a:xfrm>
+            <a:off x="640080" y="2286000"/>
             <a:ext cx="8686800" cy="1371600"/>
           </a:xfrm>
           <a:prstGeom prst="rect">
@@ -1850,9 +1828,9 @@
               <a:buNone/>
             </a:pPr>
             <a:r>
-              <a:rPr lang="en-US" sz="8400" b="1" dirty="0">
-                <a:solidFill>
-                  <a:srgbClr val="FFFFFF"/>
+              <a:rPr lang="en-US" sz="8000" b="1" dirty="0">
+                <a:solidFill>
+                  <a:srgbClr val="0E7A3D"/>
                 </a:solidFill>
                 <a:latin typeface="Cambria" pitchFamily="34" charset="0"/>
                 <a:ea typeface="Cambria" pitchFamily="34" charset="-122"/>
@@ -1860,20 +1838,20 @@
               </a:rPr>
               <a:t>J2</a:t>
             </a:r>
-            <a:endParaRPr lang="en-US" sz="8400" dirty="0"/>
+            <a:endParaRPr lang="en-US" sz="8000" dirty="0"/>
           </a:p>
         </p:txBody>
       </p:sp>
       <p:sp>
         <p:nvSpPr>
-          <p:cNvPr id="9" name="Text 6"/>
-          <p:cNvSpPr/>
-          <p:nvPr/>
-        </p:nvSpPr>
-        <p:spPr>
-          <a:xfrm>
-            <a:off x="640080" y="2880360"/>
-            <a:ext cx="9418320" cy="914400"/>
+          <p:cNvPr id="8" name="Text 4"/>
+          <p:cNvSpPr/>
+          <p:nvPr/>
+        </p:nvSpPr>
+        <p:spPr>
+          <a:xfrm>
+            <a:off x="640080" y="3657600"/>
+            <a:ext cx="10058400" cy="914400"/>
           </a:xfrm>
           <a:prstGeom prst="rect">
             <a:avLst/>
@@ -1889,9 +1867,9 @@
               <a:buNone/>
             </a:pPr>
             <a:r>
-              <a:rPr lang="en-US" sz="3500" b="1" dirty="0">
-                <a:solidFill>
-                  <a:srgbClr val="FCD116"/>
+              <a:rPr lang="en-US" sz="3400" b="1" dirty="0">
+                <a:solidFill>
+                  <a:srgbClr val="1C2A24"/>
                 </a:solidFill>
                 <a:latin typeface="Cambria" pitchFamily="34" charset="0"/>
                 <a:ea typeface="Cambria" pitchFamily="34" charset="-122"/>
@@ -1899,20 +1877,20 @@
               </a:rPr>
               <a:t>Fonctions et structures de données</a:t>
             </a:r>
-            <a:endParaRPr lang="en-US" sz="3500" dirty="0"/>
+            <a:endParaRPr lang="en-US" sz="3400" dirty="0"/>
           </a:p>
         </p:txBody>
       </p:sp>
       <p:sp>
         <p:nvSpPr>
-          <p:cNvPr id="10" name="Text 7"/>
-          <p:cNvSpPr/>
-          <p:nvPr/>
-        </p:nvSpPr>
-        <p:spPr>
-          <a:xfrm>
-            <a:off x="640080" y="3794760"/>
-            <a:ext cx="8778240" cy="822960"/>
+          <p:cNvPr id="9" name="Text 5"/>
+          <p:cNvSpPr/>
+          <p:nvPr/>
+        </p:nvSpPr>
+        <p:spPr>
+          <a:xfrm>
+            <a:off x="640080" y="4526280"/>
+            <a:ext cx="9326880" cy="822960"/>
           </a:xfrm>
           <a:prstGeom prst="rect">
             <a:avLst/>
@@ -1931,9 +1909,9 @@
               <a:buNone/>
             </a:pPr>
             <a:r>
-              <a:rPr lang="en-US" sz="1600" dirty="0">
-                <a:solidFill>
-                  <a:srgbClr val="CADFD2"/>
+              <a:rPr lang="en-US" sz="1550" dirty="0">
+                <a:solidFill>
+                  <a:srgbClr val="5C6B63"/>
                 </a:solidFill>
                 <a:latin typeface="Calibri" pitchFamily="34" charset="0"/>
                 <a:ea typeface="Calibri" pitchFamily="34" charset="-122"/>
@@ -1941,7 +1919,7 @@
               </a:rPr>
               <a:t>Découper le code en fonctions réutilisables, et choisir la bonne</a:t>
             </a:r>
-            <a:endParaRPr lang="en-US" sz="1600" dirty="0"/>
+            <a:endParaRPr lang="en-US" sz="1550" dirty="0"/>
           </a:p>
           <a:p>
             <a:pPr indent="0" marL="0">
@@ -1951,9 +1929,9 @@
               <a:buNone/>
             </a:pPr>
             <a:r>
-              <a:rPr lang="en-US" sz="1600" dirty="0">
-                <a:solidFill>
-                  <a:srgbClr val="CADFD2"/>
+              <a:rPr lang="en-US" sz="1550" dirty="0">
+                <a:solidFill>
+                  <a:srgbClr val="5C6B63"/>
                 </a:solidFill>
                 <a:latin typeface="Calibri" pitchFamily="34" charset="0"/>
                 <a:ea typeface="Calibri" pitchFamily="34" charset="-122"/>
@@ -1961,19 +1939,19 @@
               </a:rPr>
               <a:t>structure : liste, dictionnaire, ensemble, tuple.</a:t>
             </a:r>
-            <a:endParaRPr lang="en-US" sz="1600" dirty="0"/>
+            <a:endParaRPr lang="en-US" sz="1550" dirty="0"/>
           </a:p>
         </p:txBody>
       </p:sp>
       <p:sp>
         <p:nvSpPr>
-          <p:cNvPr id="11" name="Shape 8"/>
-          <p:cNvSpPr/>
-          <p:nvPr/>
-        </p:nvSpPr>
-        <p:spPr>
-          <a:xfrm>
-            <a:off x="640080" y="5120640"/>
+          <p:cNvPr id="10" name="Shape 6"/>
+          <p:cNvSpPr/>
+          <p:nvPr/>
+        </p:nvSpPr>
+        <p:spPr>
+          <a:xfrm>
+            <a:off x="640080" y="5440680"/>
             <a:ext cx="1536192" cy="475488"/>
           </a:xfrm>
           <a:prstGeom prst="roundRect">
@@ -1989,13 +1967,13 @@
       </p:sp>
       <p:sp>
         <p:nvSpPr>
-          <p:cNvPr id="12" name="Text 9"/>
-          <p:cNvSpPr/>
-          <p:nvPr/>
-        </p:nvSpPr>
-        <p:spPr>
-          <a:xfrm>
-            <a:off x="640080" y="5120640"/>
+          <p:cNvPr id="11" name="Text 7"/>
+          <p:cNvSpPr/>
+          <p:nvPr/>
+        </p:nvSpPr>
+        <p:spPr>
+          <a:xfrm>
+            <a:off x="640080" y="5440680"/>
             <a:ext cx="1536192" cy="475488"/>
           </a:xfrm>
           <a:prstGeom prst="rect">
@@ -2028,13 +2006,13 @@
       </p:sp>
       <p:sp>
         <p:nvSpPr>
-          <p:cNvPr id="13" name="Shape 10"/>
-          <p:cNvSpPr/>
-          <p:nvPr/>
-        </p:nvSpPr>
-        <p:spPr>
-          <a:xfrm>
-            <a:off x="2404872" y="5120640"/>
+          <p:cNvPr id="12" name="Shape 8"/>
+          <p:cNvSpPr/>
+          <p:nvPr/>
+        </p:nvSpPr>
+        <p:spPr>
+          <a:xfrm>
+            <a:off x="2404872" y="5440680"/>
             <a:ext cx="2688336" cy="475488"/>
           </a:xfrm>
           <a:prstGeom prst="roundRect">
@@ -2050,13 +2028,13 @@
       </p:sp>
       <p:sp>
         <p:nvSpPr>
-          <p:cNvPr id="14" name="Text 11"/>
-          <p:cNvSpPr/>
-          <p:nvPr/>
-        </p:nvSpPr>
-        <p:spPr>
-          <a:xfrm>
-            <a:off x="2404872" y="5120640"/>
+          <p:cNvPr id="13" name="Text 9"/>
+          <p:cNvSpPr/>
+          <p:nvPr/>
+        </p:nvSpPr>
+        <p:spPr>
+          <a:xfrm>
+            <a:off x="2404872" y="5440680"/>
             <a:ext cx="2688336" cy="475488"/>
           </a:xfrm>
           <a:prstGeom prst="rect">
@@ -2089,14 +2067,14 @@
       </p:sp>
       <p:sp>
         <p:nvSpPr>
-          <p:cNvPr id="15" name="Text 12"/>
-          <p:cNvSpPr/>
-          <p:nvPr/>
-        </p:nvSpPr>
-        <p:spPr>
-          <a:xfrm>
-            <a:off x="640080" y="6172200"/>
-            <a:ext cx="10058400" cy="320040"/>
+          <p:cNvPr id="14" name="Text 10"/>
+          <p:cNvSpPr/>
+          <p:nvPr/>
+        </p:nvSpPr>
+        <p:spPr>
+          <a:xfrm>
+            <a:off x="640080" y="6263640"/>
+            <a:ext cx="10972800" cy="320040"/>
           </a:xfrm>
           <a:prstGeom prst="rect">
             <a:avLst/>
@@ -2112,17 +2090,17 @@
               <a:buNone/>
             </a:pPr>
             <a:r>
-              <a:rPr lang="en-US" sz="1200" dirty="0">
-                <a:solidFill>
-                  <a:srgbClr val="8FAF9F"/>
+              <a:rPr lang="en-US" sz="1150" dirty="0">
+                <a:solidFill>
+                  <a:srgbClr val="5C6B63"/>
                 </a:solidFill>
                 <a:latin typeface="Calibri" pitchFamily="34" charset="0"/>
                 <a:ea typeface="Calibri" pitchFamily="34" charset="-122"/>
                 <a:cs typeface="Calibri" pitchFamily="34" charset="-120"/>
               </a:rPr>
-              <a:t>DGI — Direction Générale des Impôts · Guinée-Bissau · données pédagogiques fictives</a:t>
-            </a:r>
-            <a:endParaRPr lang="en-US" sz="1200" dirty="0"/>
+              <a:t>DGCI — Direção Geral das Contribuições e Impostos · Guinée-Bissau · données pédagogiques fictives</a:t>
+            </a:r>
+            <a:endParaRPr lang="en-US" sz="1150" dirty="0"/>
           </a:p>
         </p:txBody>
       </p:sp>
@@ -3019,7 +2997,7 @@
       </p:sp>
       <p:pic>
         <p:nvPicPr>
-          <p:cNvPr id="4" name="Image 0" descr="logo-dgi.png">    </p:cNvPr>
+          <p:cNvPr id="4" name="Image 0" descr="logo-dgci.png">    </p:cNvPr>
           <p:cNvPicPr>
             <a:picLocks noChangeAspect="1"/>
           </p:cNvPicPr>
@@ -3033,8 +3011,8 @@
         </p:blipFill>
         <p:spPr>
           <a:xfrm>
-            <a:off x="10744200" y="384048"/>
-            <a:ext cx="1051560" cy="795528"/>
+            <a:off x="10287000" y="475488"/>
+            <a:ext cx="1481328" cy="457200"/>
           </a:xfrm>
           <a:prstGeom prst="rect">
             <a:avLst/>
@@ -4231,7 +4209,7 @@
       </p:sp>
       <p:pic>
         <p:nvPicPr>
-          <p:cNvPr id="4" name="Image 0" descr="logo-dgi.png">    </p:cNvPr>
+          <p:cNvPr id="4" name="Image 0" descr="logo-dgci.png">    </p:cNvPr>
           <p:cNvPicPr>
             <a:picLocks noChangeAspect="1"/>
           </p:cNvPicPr>
@@ -4245,8 +4223,8 @@
         </p:blipFill>
         <p:spPr>
           <a:xfrm>
-            <a:off x="10744200" y="384048"/>
-            <a:ext cx="1051560" cy="795528"/>
+            <a:off x="10287000" y="475488"/>
+            <a:ext cx="1481328" cy="457200"/>
           </a:xfrm>
           <a:prstGeom prst="rect">
             <a:avLst/>
@@ -5642,7 +5620,7 @@
       </p:sp>
       <p:pic>
         <p:nvPicPr>
-          <p:cNvPr id="4" name="Image 0" descr="logo-dgi.png">    </p:cNvPr>
+          <p:cNvPr id="4" name="Image 0" descr="logo-dgci.png">    </p:cNvPr>
           <p:cNvPicPr>
             <a:picLocks noChangeAspect="1"/>
           </p:cNvPicPr>
@@ -5656,8 +5634,8 @@
         </p:blipFill>
         <p:spPr>
           <a:xfrm>
-            <a:off x="10744200" y="384048"/>
-            <a:ext cx="1051560" cy="795528"/>
+            <a:off x="10287000" y="475488"/>
+            <a:ext cx="1481328" cy="457200"/>
           </a:xfrm>
           <a:prstGeom prst="rect">
             <a:avLst/>
@@ -6920,7 +6898,7 @@
       </p:sp>
       <p:pic>
         <p:nvPicPr>
-          <p:cNvPr id="4" name="Image 0" descr="logo-dgi.png">    </p:cNvPr>
+          <p:cNvPr id="4" name="Image 0" descr="logo-dgci.png">    </p:cNvPr>
           <p:cNvPicPr>
             <a:picLocks noChangeAspect="1"/>
           </p:cNvPicPr>
@@ -6934,8 +6912,8 @@
         </p:blipFill>
         <p:spPr>
           <a:xfrm>
-            <a:off x="10744200" y="384048"/>
-            <a:ext cx="1051560" cy="795528"/>
+            <a:off x="10287000" y="475488"/>
+            <a:ext cx="1481328" cy="457200"/>
           </a:xfrm>
           <a:prstGeom prst="rect">
             <a:avLst/>
@@ -8181,7 +8159,7 @@
       </p:sp>
       <p:pic>
         <p:nvPicPr>
-          <p:cNvPr id="4" name="Image 0" descr="logo-dgi.png">    </p:cNvPr>
+          <p:cNvPr id="4" name="Image 0" descr="logo-dgci.png">    </p:cNvPr>
           <p:cNvPicPr>
             <a:picLocks noChangeAspect="1"/>
           </p:cNvPicPr>
@@ -8195,8 +8173,8 @@
         </p:blipFill>
         <p:spPr>
           <a:xfrm>
-            <a:off x="10744200" y="384048"/>
-            <a:ext cx="1051560" cy="795528"/>
+            <a:off x="10287000" y="475488"/>
+            <a:ext cx="1481328" cy="457200"/>
           </a:xfrm>
           <a:prstGeom prst="rect">
             <a:avLst/>
@@ -9354,7 +9332,7 @@
       </p:sp>
       <p:pic>
         <p:nvPicPr>
-          <p:cNvPr id="4" name="Image 0" descr="logo-dgi.png">    </p:cNvPr>
+          <p:cNvPr id="4" name="Image 0" descr="logo-dgci.png">    </p:cNvPr>
           <p:cNvPicPr>
             <a:picLocks noChangeAspect="1"/>
           </p:cNvPicPr>
@@ -9368,8 +9346,8 @@
         </p:blipFill>
         <p:spPr>
           <a:xfrm>
-            <a:off x="10744200" y="384048"/>
-            <a:ext cx="1051560" cy="795528"/>
+            <a:off x="10287000" y="475488"/>
+            <a:ext cx="1481328" cy="457200"/>
           </a:xfrm>
           <a:prstGeom prst="rect">
             <a:avLst/>
@@ -10666,7 +10644,7 @@
       </p:sp>
       <p:pic>
         <p:nvPicPr>
-          <p:cNvPr id="4" name="Image 0" descr="logo-dgi.png">    </p:cNvPr>
+          <p:cNvPr id="4" name="Image 0" descr="logo-dgci.png">    </p:cNvPr>
           <p:cNvPicPr>
             <a:picLocks noChangeAspect="1"/>
           </p:cNvPicPr>
@@ -10680,8 +10658,8 @@
         </p:blipFill>
         <p:spPr>
           <a:xfrm>
-            <a:off x="10744200" y="384048"/>
-            <a:ext cx="1051560" cy="795528"/>
+            <a:off x="10287000" y="475488"/>
+            <a:ext cx="1481328" cy="457200"/>
           </a:xfrm>
           <a:prstGeom prst="rect">
             <a:avLst/>
@@ -12312,7 +12290,7 @@
       </p:sp>
       <p:pic>
         <p:nvPicPr>
-          <p:cNvPr id="4" name="Image 0" descr="logo-dgi.png">    </p:cNvPr>
+          <p:cNvPr id="4" name="Image 0" descr="logo-dgci.png">    </p:cNvPr>
           <p:cNvPicPr>
             <a:picLocks noChangeAspect="1"/>
           </p:cNvPicPr>
@@ -12326,8 +12304,8 @@
         </p:blipFill>
         <p:spPr>
           <a:xfrm>
-            <a:off x="10744200" y="384048"/>
-            <a:ext cx="1051560" cy="795528"/>
+            <a:off x="10287000" y="475488"/>
+            <a:ext cx="1481328" cy="457200"/>
           </a:xfrm>
           <a:prstGeom prst="rect">
             <a:avLst/>
